--- a/slides/01 - T1 - I database NoSQL.pptx
+++ b/slides/01 - T1 - I database NoSQL.pptx
@@ -298,7 +298,7 @@
           <a:p>
             <a:fld id="{02297A90-1AFB-4FA1-ADF2-69FD2D1230BA}" type="datetimeFigureOut">
               <a:rPr lang="en-US" smtClean="0"/>
-              <a:t>4/5/2024</a:t>
+              <a:t>4/27/2026</a:t>
             </a:fld>
             <a:endParaRPr lang="en-US"/>
           </a:p>
@@ -476,7 +476,7 @@
           <a:p>
             <a:fld id="{2D15495C-7C85-4DFE-8C2B-354A7A489EB6}" type="datetimeFigureOut">
               <a:rPr lang="it-IT" smtClean="0"/>
-              <a:t>05/04/2024</a:t>
+              <a:t>27/04/2026</a:t>
             </a:fld>
             <a:endParaRPr lang="it-IT"/>
           </a:p>
@@ -851,19 +851,15 @@
           <a:p>
             <a:r>
               <a:rPr lang="it-IT" dirty="0"/>
-              <a:t>https://stackoverflow.com/questions/5040617/what-is-the-difference-between-a-graph-database-and-a-network-database</a:t>
-            </a:r>
-          </a:p>
-          <a:p>
-            <a:r>
-              <a:rPr lang="it-IT" dirty="0"/>
-              <a:t>- Garanzia ACID, molto più forte degli altri modelli citati, infatti vedremo che si fa più fatica a distribuire</a:t>
-            </a:r>
-          </a:p>
-          <a:p>
-            <a:r>
-              <a:rPr lang="it-IT" dirty="0"/>
-              <a:t>- Gli archi sono dei puntatori fisici</a:t>
+              <a:t>https://en.wikipedia.org/wiki/LiveJournal </a:t>
+            </a:r>
+            <a:r>
+              <a:rPr lang="it-IT" dirty="0" err="1"/>
+              <a:t>LiveJournal</a:t>
+            </a:r>
+            <a:r>
+              <a:rPr lang="it-IT" dirty="0"/>
+              <a:t> è una sorta di MSN russo</a:t>
             </a:r>
           </a:p>
         </p:txBody>
@@ -871,7 +867,7 @@
     </p:spTree>
     <p:extLst>
       <p:ext uri="{BB962C8B-B14F-4D97-AF65-F5344CB8AC3E}">
-        <p14:creationId xmlns:p14="http://schemas.microsoft.com/office/powerpoint/2010/main" val="2056728117"/>
+        <p14:creationId xmlns:p14="http://schemas.microsoft.com/office/powerpoint/2010/main" val="2665115093"/>
       </p:ext>
     </p:extLst>
   </p:cSld>
@@ -925,45 +921,17 @@
           <a:bodyPr/>
           <a:lstStyle/>
           <a:p>
-            <a:pPr marL="171450" indent="-171450">
-              <a:buFontTx/>
-              <a:buChar char="-"/>
-            </a:pPr>
-            <a:r>
-              <a:rPr lang="it-IT" dirty="0"/>
-              <a:t>Scalabilità limitata modello a grafo: es. frammentare un grafo senza frammentare archi è spesso impossibile</a:t>
-            </a:r>
-          </a:p>
-          <a:p>
-            <a:pPr marL="171450" indent="-171450">
-              <a:buFontTx/>
-              <a:buChar char="-"/>
-            </a:pPr>
-            <a:endParaRPr lang="it-IT" dirty="0"/>
-          </a:p>
-          <a:p>
-            <a:pPr marL="171450" indent="-171450">
-              <a:buFontTx/>
-              <a:buChar char="-"/>
-            </a:pPr>
-            <a:r>
-              <a:rPr lang="it-IT" dirty="0"/>
-              <a:t>Usare aggregati di contro, può portare incongruenze nei dati, non faccio join </a:t>
-            </a:r>
-            <a:r>
-              <a:rPr lang="it-IT" dirty="0">
-                <a:sym typeface="Wingdings" panose="05000000000000000000" pitchFamily="2" charset="2"/>
-              </a:rPr>
-              <a:t> ridondanza</a:t>
-            </a:r>
-            <a:endParaRPr lang="it-IT" dirty="0"/>
+            <a:r>
+              <a:rPr lang="it-IT" dirty="0"/>
+              <a:t>Un’operazione che coinvolge tante righe non è atomica</a:t>
+            </a:r>
           </a:p>
         </p:txBody>
       </p:sp>
     </p:spTree>
     <p:extLst>
       <p:ext uri="{BB962C8B-B14F-4D97-AF65-F5344CB8AC3E}">
-        <p14:creationId xmlns:p14="http://schemas.microsoft.com/office/powerpoint/2010/main" val="2197778615"/>
+        <p14:creationId xmlns:p14="http://schemas.microsoft.com/office/powerpoint/2010/main" val="2979786480"/>
       </p:ext>
     </p:extLst>
   </p:cSld>
@@ -1017,14 +985,17 @@
           <a:bodyPr/>
           <a:lstStyle/>
           <a:p>
-            <a:endParaRPr lang="en-US" dirty="0"/>
+            <a:r>
+              <a:rPr lang="it-IT" dirty="0"/>
+              <a:t>Il nesting è limitato, rispetto a quello del documentale</a:t>
+            </a:r>
           </a:p>
         </p:txBody>
       </p:sp>
     </p:spTree>
     <p:extLst>
       <p:ext uri="{BB962C8B-B14F-4D97-AF65-F5344CB8AC3E}">
-        <p14:creationId xmlns:p14="http://schemas.microsoft.com/office/powerpoint/2010/main" val="822281910"/>
+        <p14:creationId xmlns:p14="http://schemas.microsoft.com/office/powerpoint/2010/main" val="3838656144"/>
       </p:ext>
     </p:extLst>
   </p:cSld>
@@ -1079,21 +1050,49 @@
           <a:lstStyle/>
           <a:p>
             <a:r>
-              <a:rPr lang="it-IT" dirty="0"/>
-              <a:t>Posso fare join con i prodotti o gestire le </a:t>
-            </a:r>
-            <a:r>
               <a:rPr lang="it-IT" dirty="0" err="1"/>
-              <a:t>denormalizzazioni</a:t>
-            </a:r>
+              <a:t>Row</a:t>
+            </a:r>
+            <a:r>
+              <a:rPr lang="it-IT" dirty="0"/>
+              <a:t> </a:t>
+            </a:r>
+            <a:r>
+              <a:rPr lang="it-IT" dirty="0" err="1"/>
+              <a:t>oriented</a:t>
+            </a:r>
+            <a:r>
+              <a:rPr lang="it-IT" dirty="0"/>
+              <a:t>: inserire un record è facile, ma è possibile accedere a dati non necessari durante la lettura</a:t>
+            </a:r>
+          </a:p>
+          <a:p>
             <a:endParaRPr lang="it-IT" dirty="0"/>
+          </a:p>
+          <a:p>
+            <a:r>
+              <a:rPr lang="it-IT" dirty="0" err="1"/>
+              <a:t>Column</a:t>
+            </a:r>
+            <a:r>
+              <a:rPr lang="it-IT" dirty="0"/>
+              <a:t> </a:t>
+            </a:r>
+            <a:r>
+              <a:rPr lang="it-IT" dirty="0" err="1"/>
+              <a:t>oriented</a:t>
+            </a:r>
+            <a:r>
+              <a:rPr lang="it-IT" dirty="0"/>
+              <a:t>: solo i valori richiesti sono accessibili, la scrittura di un record richiede più accessi</a:t>
+            </a:r>
           </a:p>
         </p:txBody>
       </p:sp>
     </p:spTree>
     <p:extLst>
       <p:ext uri="{BB962C8B-B14F-4D97-AF65-F5344CB8AC3E}">
-        <p14:creationId xmlns:p14="http://schemas.microsoft.com/office/powerpoint/2010/main" val="2345087375"/>
+        <p14:creationId xmlns:p14="http://schemas.microsoft.com/office/powerpoint/2010/main" val="1307117406"/>
       </p:ext>
     </p:extLst>
   </p:cSld>
@@ -1149,7 +1148,19 @@
           <a:p>
             <a:r>
               <a:rPr lang="it-IT" dirty="0"/>
-              <a:t>In questo caso devo fare per forza join ordine e cliente per accedere ai dati del cliente. Ho più consistenza</a:t>
+              <a:t>https://stackoverflow.com/questions/5040617/what-is-the-difference-between-a-graph-database-and-a-network-database</a:t>
+            </a:r>
+          </a:p>
+          <a:p>
+            <a:r>
+              <a:rPr lang="it-IT" dirty="0"/>
+              <a:t>- Garanzia ACID, molto più forte degli altri modelli citati, infatti vedremo che si fa più fatica a distribuire</a:t>
+            </a:r>
+          </a:p>
+          <a:p>
+            <a:r>
+              <a:rPr lang="it-IT" dirty="0"/>
+              <a:t>- Gli archi sono dei puntatori fisici</a:t>
             </a:r>
           </a:p>
         </p:txBody>
@@ -1157,7 +1168,7 @@
     </p:spTree>
     <p:extLst>
       <p:ext uri="{BB962C8B-B14F-4D97-AF65-F5344CB8AC3E}">
-        <p14:creationId xmlns:p14="http://schemas.microsoft.com/office/powerpoint/2010/main" val="2129493162"/>
+        <p14:creationId xmlns:p14="http://schemas.microsoft.com/office/powerpoint/2010/main" val="2056728117"/>
       </p:ext>
     </p:extLst>
   </p:cSld>
@@ -1211,68 +1222,45 @@
           <a:bodyPr/>
           <a:lstStyle/>
           <a:p>
-            <a:r>
-              <a:rPr lang="en-US" dirty="0"/>
-              <a:t>1. </a:t>
-            </a:r>
-            <a:r>
-              <a:rPr lang="en-US" dirty="0" err="1"/>
-              <a:t>Valorizza</a:t>
-            </a:r>
-            <a:r>
-              <a:rPr lang="en-US" dirty="0"/>
-              <a:t> solo </a:t>
-            </a:r>
-            <a:r>
-              <a:rPr lang="en-US" dirty="0" err="1"/>
-              <a:t>i</a:t>
-            </a:r>
-            <a:r>
-              <a:rPr lang="en-US" dirty="0"/>
-              <a:t> </a:t>
-            </a:r>
-            <a:r>
-              <a:rPr lang="en-US" dirty="0" err="1"/>
-              <a:t>prodotti</a:t>
-            </a:r>
-            <a:r>
-              <a:rPr lang="en-US" dirty="0"/>
-              <a:t> </a:t>
-            </a:r>
-            <a:r>
-              <a:rPr lang="en-US" dirty="0" err="1"/>
-              <a:t>acquistati</a:t>
-            </a:r>
-            <a:endParaRPr lang="en-US" dirty="0"/>
-          </a:p>
-          <a:p>
-            <a:endParaRPr lang="en-US" dirty="0"/>
-          </a:p>
-          <a:p>
-            <a:r>
-              <a:rPr lang="en-US" dirty="0"/>
-              <a:t>2. </a:t>
-            </a:r>
-            <a:r>
-              <a:rPr lang="en-US" dirty="0" err="1"/>
-              <a:t>Esempio</a:t>
-            </a:r>
-            <a:r>
-              <a:rPr lang="en-US" dirty="0"/>
-              <a:t> di super </a:t>
-            </a:r>
-            <a:r>
-              <a:rPr lang="en-US" dirty="0" err="1"/>
-              <a:t>colonna</a:t>
-            </a:r>
-            <a:endParaRPr lang="en-US" dirty="0"/>
+            <a:pPr marL="171450" indent="-171450">
+              <a:buFontTx/>
+              <a:buChar char="-"/>
+            </a:pPr>
+            <a:r>
+              <a:rPr lang="it-IT" dirty="0"/>
+              <a:t>Scalabilità limitata modello a grafo: es. frammentare un grafo senza frammentare archi è spesso impossibile</a:t>
+            </a:r>
+          </a:p>
+          <a:p>
+            <a:pPr marL="171450" indent="-171450">
+              <a:buFontTx/>
+              <a:buChar char="-"/>
+            </a:pPr>
+            <a:endParaRPr lang="it-IT" dirty="0"/>
+          </a:p>
+          <a:p>
+            <a:pPr marL="171450" indent="-171450">
+              <a:buFontTx/>
+              <a:buChar char="-"/>
+            </a:pPr>
+            <a:r>
+              <a:rPr lang="it-IT" dirty="0"/>
+              <a:t>Usare aggregati di contro, può portare incongruenze nei dati, non faccio join </a:t>
+            </a:r>
+            <a:r>
+              <a:rPr lang="it-IT" dirty="0">
+                <a:sym typeface="Wingdings" panose="05000000000000000000" pitchFamily="2" charset="2"/>
+              </a:rPr>
+              <a:t> ridondanza</a:t>
+            </a:r>
+            <a:endParaRPr lang="it-IT" dirty="0"/>
           </a:p>
         </p:txBody>
       </p:sp>
     </p:spTree>
     <p:extLst>
       <p:ext uri="{BB962C8B-B14F-4D97-AF65-F5344CB8AC3E}">
-        <p14:creationId xmlns:p14="http://schemas.microsoft.com/office/powerpoint/2010/main" val="2152471288"/>
+        <p14:creationId xmlns:p14="http://schemas.microsoft.com/office/powerpoint/2010/main" val="2197778615"/>
       </p:ext>
     </p:extLst>
   </p:cSld>
@@ -1326,64 +1314,14 @@
           <a:bodyPr/>
           <a:lstStyle/>
           <a:p>
-            <a:r>
-              <a:rPr lang="en-US" sz="1200" b="0" i="0" u="none" strike="noStrike" kern="1200" baseline="0" dirty="0">
-                <a:solidFill>
-                  <a:schemeClr val="tx1"/>
-                </a:solidFill>
-                <a:latin typeface="+mn-lt"/>
-                <a:ea typeface="+mn-ea"/>
-                <a:cs typeface="+mn-cs"/>
-              </a:rPr>
-              <a:t>As data volumes increase, it becomes more difficult and expensive to</a:t>
-            </a:r>
-          </a:p>
-          <a:p>
-            <a:r>
-              <a:rPr lang="en-US" sz="1200" b="0" i="0" u="none" strike="noStrike" kern="1200" baseline="0" dirty="0">
-                <a:solidFill>
-                  <a:schemeClr val="tx1"/>
-                </a:solidFill>
-                <a:latin typeface="+mn-lt"/>
-                <a:ea typeface="+mn-ea"/>
-                <a:cs typeface="+mn-cs"/>
-              </a:rPr>
-              <a:t>scale up—buy a bigger server to run the database on. A more appealing option is to</a:t>
-            </a:r>
-          </a:p>
-          <a:p>
-            <a:r>
-              <a:rPr lang="en-US" sz="1200" b="0" i="0" u="none" strike="noStrike" kern="1200" baseline="0" dirty="0">
-                <a:solidFill>
-                  <a:schemeClr val="tx1"/>
-                </a:solidFill>
-                <a:latin typeface="+mn-lt"/>
-                <a:ea typeface="+mn-ea"/>
-                <a:cs typeface="+mn-cs"/>
-              </a:rPr>
-              <a:t>scale out—run the database on a cluster of servers. Aggregate orientation fits well</a:t>
-            </a:r>
-          </a:p>
-          <a:p>
-            <a:r>
-              <a:rPr lang="en-US" sz="1200" b="0" i="0" u="none" strike="noStrike" kern="1200" baseline="0" dirty="0">
-                <a:solidFill>
-                  <a:schemeClr val="tx1"/>
-                </a:solidFill>
-                <a:latin typeface="+mn-lt"/>
-                <a:ea typeface="+mn-ea"/>
-                <a:cs typeface="+mn-cs"/>
-              </a:rPr>
-              <a:t>with scaling out because the aggregate is a natural unit to use for distribution.</a:t>
-            </a:r>
-            <a:endParaRPr lang="it-IT" dirty="0"/>
+            <a:endParaRPr lang="en-US" dirty="0"/>
           </a:p>
         </p:txBody>
       </p:sp>
     </p:spTree>
     <p:extLst>
       <p:ext uri="{BB962C8B-B14F-4D97-AF65-F5344CB8AC3E}">
-        <p14:creationId xmlns:p14="http://schemas.microsoft.com/office/powerpoint/2010/main" val="4149708024"/>
+        <p14:creationId xmlns:p14="http://schemas.microsoft.com/office/powerpoint/2010/main" val="822281910"/>
       </p:ext>
     </p:extLst>
   </p:cSld>
@@ -1437,6 +1375,14 @@
           <a:bodyPr/>
           <a:lstStyle/>
           <a:p>
+            <a:r>
+              <a:rPr lang="it-IT" dirty="0"/>
+              <a:t>Posso fare join con i prodotti o gestire le </a:t>
+            </a:r>
+            <a:r>
+              <a:rPr lang="it-IT" dirty="0" err="1"/>
+              <a:t>denormalizzazioni</a:t>
+            </a:r>
             <a:endParaRPr lang="it-IT" dirty="0"/>
           </a:p>
         </p:txBody>
@@ -1444,7 +1390,7 @@
     </p:spTree>
     <p:extLst>
       <p:ext uri="{BB962C8B-B14F-4D97-AF65-F5344CB8AC3E}">
-        <p14:creationId xmlns:p14="http://schemas.microsoft.com/office/powerpoint/2010/main" val="1794097921"/>
+        <p14:creationId xmlns:p14="http://schemas.microsoft.com/office/powerpoint/2010/main" val="2345087375"/>
       </p:ext>
     </p:extLst>
   </p:cSld>
@@ -1498,74 +1444,17 @@
           <a:bodyPr/>
           <a:lstStyle/>
           <a:p>
-            <a:pPr marL="0" marR="0" lvl="0" indent="0" algn="l" defTabSz="914400" rtl="0" eaLnBrk="1" fontAlgn="auto" latinLnBrk="0" hangingPunct="1">
-              <a:lnSpc>
-                <a:spcPct val="100000"/>
-              </a:lnSpc>
-              <a:spcBef>
-                <a:spcPts val="0"/>
-              </a:spcBef>
-              <a:spcAft>
-                <a:spcPts val="0"/>
-              </a:spcAft>
-              <a:buClrTx/>
-              <a:buSzTx/>
-              <a:buFontTx/>
-              <a:buNone/>
-              <a:tabLst/>
-              <a:defRPr/>
-            </a:pPr>
-            <a:r>
-              <a:rPr lang="it-IT" dirty="0"/>
-              <a:t>Rimosso: Non dimenticarsi che, nei cluster,</a:t>
-            </a:r>
-            <a:br>
-              <a:rPr lang="it-IT" dirty="0"/>
-            </a:br>
-            <a:r>
-              <a:rPr lang="it-IT" dirty="0"/>
-              <a:t>si usano macchine meno </a:t>
-            </a:r>
-            <a:br>
-              <a:rPr lang="it-IT" dirty="0"/>
-            </a:br>
-            <a:r>
-              <a:rPr lang="it-IT" dirty="0"/>
-              <a:t>affidabili – </a:t>
-            </a:r>
-            <a:r>
-              <a:rPr lang="it-IT" dirty="0">
-                <a:solidFill>
-                  <a:srgbClr val="0070C0"/>
-                </a:solidFill>
-              </a:rPr>
-              <a:t>diminuisce </a:t>
-            </a:r>
-            <a:br>
-              <a:rPr lang="it-IT" dirty="0">
-                <a:solidFill>
-                  <a:srgbClr val="0070C0"/>
-                </a:solidFill>
-              </a:rPr>
-            </a:br>
-            <a:r>
-              <a:rPr lang="it-IT" dirty="0">
-                <a:solidFill>
-                  <a:srgbClr val="0070C0"/>
-                </a:solidFill>
-              </a:rPr>
-              <a:t>la resistenza ai guasti</a:t>
-            </a:r>
-          </a:p>
-          <a:p>
-            <a:endParaRPr lang="it-IT" dirty="0"/>
+            <a:r>
+              <a:rPr lang="it-IT" dirty="0"/>
+              <a:t>In questo caso devo fare per forza join ordine e cliente per accedere ai dati del cliente. Ho più consistenza</a:t>
+            </a:r>
           </a:p>
         </p:txBody>
       </p:sp>
     </p:spTree>
     <p:extLst>
       <p:ext uri="{BB962C8B-B14F-4D97-AF65-F5344CB8AC3E}">
-        <p14:creationId xmlns:p14="http://schemas.microsoft.com/office/powerpoint/2010/main" val="1224349592"/>
+        <p14:creationId xmlns:p14="http://schemas.microsoft.com/office/powerpoint/2010/main" val="2129493162"/>
       </p:ext>
     </p:extLst>
   </p:cSld>
@@ -1619,14 +1508,68 @@
           <a:bodyPr/>
           <a:lstStyle/>
           <a:p>
-            <a:endParaRPr lang="it-IT" dirty="0"/>
+            <a:r>
+              <a:rPr lang="en-US" dirty="0"/>
+              <a:t>1. </a:t>
+            </a:r>
+            <a:r>
+              <a:rPr lang="en-US" dirty="0" err="1"/>
+              <a:t>Valorizza</a:t>
+            </a:r>
+            <a:r>
+              <a:rPr lang="en-US" dirty="0"/>
+              <a:t> solo </a:t>
+            </a:r>
+            <a:r>
+              <a:rPr lang="en-US" dirty="0" err="1"/>
+              <a:t>i</a:t>
+            </a:r>
+            <a:r>
+              <a:rPr lang="en-US" dirty="0"/>
+              <a:t> </a:t>
+            </a:r>
+            <a:r>
+              <a:rPr lang="en-US" dirty="0" err="1"/>
+              <a:t>prodotti</a:t>
+            </a:r>
+            <a:r>
+              <a:rPr lang="en-US" dirty="0"/>
+              <a:t> </a:t>
+            </a:r>
+            <a:r>
+              <a:rPr lang="en-US" dirty="0" err="1"/>
+              <a:t>acquistati</a:t>
+            </a:r>
+            <a:endParaRPr lang="en-US" dirty="0"/>
+          </a:p>
+          <a:p>
+            <a:endParaRPr lang="en-US" dirty="0"/>
+          </a:p>
+          <a:p>
+            <a:r>
+              <a:rPr lang="en-US" dirty="0"/>
+              <a:t>2. </a:t>
+            </a:r>
+            <a:r>
+              <a:rPr lang="en-US" dirty="0" err="1"/>
+              <a:t>Esempio</a:t>
+            </a:r>
+            <a:r>
+              <a:rPr lang="en-US" dirty="0"/>
+              <a:t> di super </a:t>
+            </a:r>
+            <a:r>
+              <a:rPr lang="en-US" dirty="0" err="1"/>
+              <a:t>colonna</a:t>
+            </a:r>
+            <a:endParaRPr lang="en-US" dirty="0"/>
           </a:p>
         </p:txBody>
       </p:sp>
     </p:spTree>
     <p:extLst>
       <p:ext uri="{BB962C8B-B14F-4D97-AF65-F5344CB8AC3E}">
-        <p14:creationId xmlns:p14="http://schemas.microsoft.com/office/powerpoint/2010/main" val="2940467202"/>
+        <p14:creationId xmlns:p14="http://schemas.microsoft.com/office/powerpoint/2010/main" val="2152471288"/>
       </p:ext>
     </p:extLst>
   </p:cSld>
@@ -1680,17 +1623,14 @@
           <a:bodyPr/>
           <a:lstStyle/>
           <a:p>
-            <a:r>
-              <a:rPr lang="it-IT" dirty="0"/>
-              <a:t>Il fatto di essere standard garantisce la portabilità delle applicazioni</a:t>
-            </a:r>
+            <a:endParaRPr lang="it-IT" dirty="0"/>
           </a:p>
         </p:txBody>
       </p:sp>
     </p:spTree>
     <p:extLst>
       <p:ext uri="{BB962C8B-B14F-4D97-AF65-F5344CB8AC3E}">
-        <p14:creationId xmlns:p14="http://schemas.microsoft.com/office/powerpoint/2010/main" val="19197220"/>
+        <p14:creationId xmlns:p14="http://schemas.microsoft.com/office/powerpoint/2010/main" val="1992286442"/>
       </p:ext>
     </p:extLst>
   </p:cSld>
@@ -1744,6 +1684,56 @@
           <a:bodyPr/>
           <a:lstStyle/>
           <a:p>
+            <a:r>
+              <a:rPr lang="en-US" sz="1200" b="0" i="0" u="none" strike="noStrike" kern="1200" baseline="0" dirty="0">
+                <a:solidFill>
+                  <a:schemeClr val="tx1"/>
+                </a:solidFill>
+                <a:latin typeface="+mn-lt"/>
+                <a:ea typeface="+mn-ea"/>
+                <a:cs typeface="+mn-cs"/>
+              </a:rPr>
+              <a:t>As data volumes increase, it becomes more difficult and expensive to</a:t>
+            </a:r>
+          </a:p>
+          <a:p>
+            <a:r>
+              <a:rPr lang="en-US" sz="1200" b="0" i="0" u="none" strike="noStrike" kern="1200" baseline="0" dirty="0">
+                <a:solidFill>
+                  <a:schemeClr val="tx1"/>
+                </a:solidFill>
+                <a:latin typeface="+mn-lt"/>
+                <a:ea typeface="+mn-ea"/>
+                <a:cs typeface="+mn-cs"/>
+              </a:rPr>
+              <a:t>scale up—buy a bigger server to run the database on. A more appealing option is to</a:t>
+            </a:r>
+          </a:p>
+          <a:p>
+            <a:r>
+              <a:rPr lang="en-US" sz="1200" b="0" i="0" u="none" strike="noStrike" kern="1200" baseline="0" dirty="0">
+                <a:solidFill>
+                  <a:schemeClr val="tx1"/>
+                </a:solidFill>
+                <a:latin typeface="+mn-lt"/>
+                <a:ea typeface="+mn-ea"/>
+                <a:cs typeface="+mn-cs"/>
+              </a:rPr>
+              <a:t>scale out—run the database on a cluster of servers. Aggregate orientation fits well</a:t>
+            </a:r>
+          </a:p>
+          <a:p>
+            <a:r>
+              <a:rPr lang="en-US" sz="1200" b="0" i="0" u="none" strike="noStrike" kern="1200" baseline="0" dirty="0">
+                <a:solidFill>
+                  <a:schemeClr val="tx1"/>
+                </a:solidFill>
+                <a:latin typeface="+mn-lt"/>
+                <a:ea typeface="+mn-ea"/>
+                <a:cs typeface="+mn-cs"/>
+              </a:rPr>
+              <a:t>with scaling out because the aggregate is a natural unit to use for distribution.</a:t>
+            </a:r>
             <a:endParaRPr lang="it-IT" dirty="0"/>
           </a:p>
         </p:txBody>
@@ -1751,7 +1741,7 @@
     </p:spTree>
     <p:extLst>
       <p:ext uri="{BB962C8B-B14F-4D97-AF65-F5344CB8AC3E}">
-        <p14:creationId xmlns:p14="http://schemas.microsoft.com/office/powerpoint/2010/main" val="960822183"/>
+        <p14:creationId xmlns:p14="http://schemas.microsoft.com/office/powerpoint/2010/main" val="4149708024"/>
       </p:ext>
     </p:extLst>
   </p:cSld>
@@ -1805,17 +1795,14 @@
           <a:bodyPr/>
           <a:lstStyle/>
           <a:p>
-            <a:r>
-              <a:rPr lang="it-IT" dirty="0"/>
-              <a:t>Parliamo di replica completa, per ora</a:t>
-            </a:r>
+            <a:endParaRPr lang="it-IT" dirty="0"/>
           </a:p>
         </p:txBody>
       </p:sp>
     </p:spTree>
     <p:extLst>
       <p:ext uri="{BB962C8B-B14F-4D97-AF65-F5344CB8AC3E}">
-        <p14:creationId xmlns:p14="http://schemas.microsoft.com/office/powerpoint/2010/main" val="372586737"/>
+        <p14:creationId xmlns:p14="http://schemas.microsoft.com/office/powerpoint/2010/main" val="1794097921"/>
       </p:ext>
     </p:extLst>
   </p:cSld>
@@ -1869,17 +1856,74 @@
           <a:bodyPr/>
           <a:lstStyle/>
           <a:p>
-            <a:r>
-              <a:rPr lang="it-IT" dirty="0"/>
-              <a:t>Parliamo di replica completa, per ora</a:t>
-            </a:r>
+            <a:pPr marL="0" marR="0" lvl="0" indent="0" algn="l" defTabSz="914400" rtl="0" eaLnBrk="1" fontAlgn="auto" latinLnBrk="0" hangingPunct="1">
+              <a:lnSpc>
+                <a:spcPct val="100000"/>
+              </a:lnSpc>
+              <a:spcBef>
+                <a:spcPts val="0"/>
+              </a:spcBef>
+              <a:spcAft>
+                <a:spcPts val="0"/>
+              </a:spcAft>
+              <a:buClrTx/>
+              <a:buSzTx/>
+              <a:buFontTx/>
+              <a:buNone/>
+              <a:tabLst/>
+              <a:defRPr/>
+            </a:pPr>
+            <a:r>
+              <a:rPr lang="it-IT" dirty="0"/>
+              <a:t>Rimosso: Non dimenticarsi che, nei cluster,</a:t>
+            </a:r>
+            <a:br>
+              <a:rPr lang="it-IT" dirty="0"/>
+            </a:br>
+            <a:r>
+              <a:rPr lang="it-IT" dirty="0"/>
+              <a:t>si usano macchine meno </a:t>
+            </a:r>
+            <a:br>
+              <a:rPr lang="it-IT" dirty="0"/>
+            </a:br>
+            <a:r>
+              <a:rPr lang="it-IT" dirty="0"/>
+              <a:t>affidabili – </a:t>
+            </a:r>
+            <a:r>
+              <a:rPr lang="it-IT" dirty="0">
+                <a:solidFill>
+                  <a:srgbClr val="0070C0"/>
+                </a:solidFill>
+              </a:rPr>
+              <a:t>diminuisce </a:t>
+            </a:r>
+            <a:br>
+              <a:rPr lang="it-IT" dirty="0">
+                <a:solidFill>
+                  <a:srgbClr val="0070C0"/>
+                </a:solidFill>
+              </a:rPr>
+            </a:br>
+            <a:r>
+              <a:rPr lang="it-IT" dirty="0">
+                <a:solidFill>
+                  <a:srgbClr val="0070C0"/>
+                </a:solidFill>
+              </a:rPr>
+              <a:t>la resistenza ai guasti</a:t>
+            </a:r>
+          </a:p>
+          <a:p>
+            <a:endParaRPr lang="it-IT" dirty="0"/>
           </a:p>
         </p:txBody>
       </p:sp>
     </p:spTree>
     <p:extLst>
       <p:ext uri="{BB962C8B-B14F-4D97-AF65-F5344CB8AC3E}">
-        <p14:creationId xmlns:p14="http://schemas.microsoft.com/office/powerpoint/2010/main" val="443965194"/>
+        <p14:creationId xmlns:p14="http://schemas.microsoft.com/office/powerpoint/2010/main" val="1224349592"/>
       </p:ext>
     </p:extLst>
   </p:cSld>
@@ -1933,14 +1977,6 @@
           <a:bodyPr/>
           <a:lstStyle/>
           <a:p>
-            <a:r>
-              <a:rPr lang="it-IT" dirty="0"/>
-              <a:t>TODO: come gestire</a:t>
-            </a:r>
-            <a:r>
-              <a:rPr lang="it-IT" baseline="0" dirty="0"/>
-              <a:t> conflitti in scrittura? Quorum, l‘ultimo vince o segnalazione.</a:t>
-            </a:r>
             <a:endParaRPr lang="it-IT" dirty="0"/>
           </a:p>
         </p:txBody>
@@ -1948,7 +1984,7 @@
     </p:spTree>
     <p:extLst>
       <p:ext uri="{BB962C8B-B14F-4D97-AF65-F5344CB8AC3E}">
-        <p14:creationId xmlns:p14="http://schemas.microsoft.com/office/powerpoint/2010/main" val="71313449"/>
+        <p14:creationId xmlns:p14="http://schemas.microsoft.com/office/powerpoint/2010/main" val="2940467202"/>
       </p:ext>
     </p:extLst>
   </p:cSld>
@@ -2002,111 +2038,6 @@
           <a:bodyPr/>
           <a:lstStyle/>
           <a:p>
-            <a:r>
-              <a:rPr lang="it-IT" noProof="0" dirty="0" err="1"/>
-              <a:t>Eventual</a:t>
-            </a:r>
-            <a:r>
-              <a:rPr lang="it-IT" noProof="0" dirty="0"/>
-              <a:t> </a:t>
-            </a:r>
-            <a:r>
-              <a:rPr lang="it-IT" noProof="0" dirty="0" err="1"/>
-              <a:t>consistency</a:t>
-            </a:r>
-            <a:r>
-              <a:rPr lang="it-IT" noProof="0" dirty="0"/>
-              <a:t> </a:t>
-            </a:r>
-            <a:r>
-              <a:rPr lang="it-IT" noProof="0" dirty="0" err="1"/>
-              <a:t>is</a:t>
-            </a:r>
-            <a:r>
-              <a:rPr lang="it-IT" noProof="0" dirty="0"/>
-              <a:t> </a:t>
-            </a:r>
-            <a:r>
-              <a:rPr lang="it-IT" noProof="0" dirty="0" err="1"/>
-              <a:t>independent</a:t>
-            </a:r>
-            <a:r>
-              <a:rPr lang="it-IT" noProof="0" dirty="0"/>
-              <a:t> from </a:t>
-            </a:r>
-            <a:r>
-              <a:rPr lang="it-IT" noProof="0" dirty="0" err="1"/>
-              <a:t>logical</a:t>
-            </a:r>
-            <a:r>
-              <a:rPr lang="it-IT" noProof="0" dirty="0"/>
-              <a:t> </a:t>
-            </a:r>
-            <a:r>
-              <a:rPr lang="it-IT" noProof="0" dirty="0" err="1"/>
-              <a:t>consistency</a:t>
-            </a:r>
-            <a:r>
-              <a:rPr lang="it-IT" noProof="0" dirty="0"/>
-              <a:t> </a:t>
-            </a:r>
-            <a:r>
-              <a:rPr lang="it-IT" noProof="0" dirty="0" err="1"/>
-              <a:t>but</a:t>
-            </a:r>
-            <a:r>
-              <a:rPr lang="it-IT" noProof="0" dirty="0"/>
-              <a:t> </a:t>
-            </a:r>
-            <a:r>
-              <a:rPr lang="it-IT" noProof="0" dirty="0" err="1"/>
-              <a:t>replication</a:t>
-            </a:r>
-            <a:r>
-              <a:rPr lang="it-IT" noProof="0" dirty="0"/>
-              <a:t> can </a:t>
-            </a:r>
-            <a:r>
-              <a:rPr lang="it-IT" noProof="0" dirty="0" err="1"/>
-              <a:t>lengthen</a:t>
-            </a:r>
-            <a:r>
-              <a:rPr lang="it-IT" noProof="0" dirty="0"/>
-              <a:t> the </a:t>
-            </a:r>
-            <a:r>
-              <a:rPr lang="it-IT" noProof="0" dirty="0" err="1"/>
-              <a:t>inconsistency</a:t>
-            </a:r>
-            <a:r>
-              <a:rPr lang="it-IT" noProof="0" dirty="0"/>
-              <a:t> window. </a:t>
-            </a:r>
-          </a:p>
-          <a:p>
-            <a:endParaRPr lang="it-IT" noProof="0" dirty="0"/>
-          </a:p>
-          <a:p>
-            <a:r>
-              <a:rPr lang="it-IT" noProof="0" dirty="0"/>
-              <a:t>Read-</a:t>
-            </a:r>
-            <a:r>
-              <a:rPr lang="it-IT" noProof="0" dirty="0" err="1"/>
-              <a:t>your</a:t>
-            </a:r>
-            <a:r>
-              <a:rPr lang="it-IT" noProof="0" dirty="0"/>
-              <a:t>-</a:t>
-            </a:r>
-            <a:r>
-              <a:rPr lang="it-IT" noProof="0" dirty="0" err="1"/>
-              <a:t>write</a:t>
-            </a:r>
-            <a:r>
-              <a:rPr lang="it-IT" noProof="0" dirty="0"/>
-              <a:t> si applica solo alle letture che seguono immediatamente un’operazione di scrittura. Un modo è associare un utente a un nodo (rischio di carichi di lavoro sbilanciati)</a:t>
-            </a:r>
             <a:endParaRPr lang="it-IT" dirty="0"/>
           </a:p>
         </p:txBody>
@@ -2114,7 +2045,7 @@
     </p:spTree>
     <p:extLst>
       <p:ext uri="{BB962C8B-B14F-4D97-AF65-F5344CB8AC3E}">
-        <p14:creationId xmlns:p14="http://schemas.microsoft.com/office/powerpoint/2010/main" val="2881554717"/>
+        <p14:creationId xmlns:p14="http://schemas.microsoft.com/office/powerpoint/2010/main" val="960822183"/>
       </p:ext>
     </p:extLst>
   </p:cSld>
@@ -2170,7 +2101,7 @@
           <a:p>
             <a:r>
               <a:rPr lang="it-IT" dirty="0"/>
-              <a:t>A seconda di come si imposta il quorum di scrittura cambia, es. se metto W = 5 vedrò tutto bene.</a:t>
+              <a:t>Parliamo di replica completa, per ora</a:t>
             </a:r>
           </a:p>
         </p:txBody>
@@ -2178,7 +2109,7 @@
     </p:spTree>
     <p:extLst>
       <p:ext uri="{BB962C8B-B14F-4D97-AF65-F5344CB8AC3E}">
-        <p14:creationId xmlns:p14="http://schemas.microsoft.com/office/powerpoint/2010/main" val="3124853014"/>
+        <p14:creationId xmlns:p14="http://schemas.microsoft.com/office/powerpoint/2010/main" val="372586737"/>
       </p:ext>
     </p:extLst>
   </p:cSld>
@@ -2234,15 +2165,7 @@
           <a:p>
             <a:r>
               <a:rPr lang="it-IT" dirty="0"/>
-              <a:t>Fornisce </a:t>
-            </a:r>
-            <a:r>
-              <a:rPr lang="it-IT" dirty="0" err="1"/>
-              <a:t>granzie</a:t>
-            </a:r>
-            <a:r>
-              <a:rPr lang="it-IT" dirty="0"/>
-              <a:t> in termini di consistenza e accessi simultanei</a:t>
+              <a:t>Parliamo di replica completa, per ora</a:t>
             </a:r>
           </a:p>
         </p:txBody>
@@ -2250,7 +2173,7 @@
     </p:spTree>
     <p:extLst>
       <p:ext uri="{BB962C8B-B14F-4D97-AF65-F5344CB8AC3E}">
-        <p14:creationId xmlns:p14="http://schemas.microsoft.com/office/powerpoint/2010/main" val="298767556"/>
+        <p14:creationId xmlns:p14="http://schemas.microsoft.com/office/powerpoint/2010/main" val="443965194"/>
       </p:ext>
     </p:extLst>
   </p:cSld>
@@ -2304,6 +2227,14 @@
           <a:bodyPr/>
           <a:lstStyle/>
           <a:p>
+            <a:r>
+              <a:rPr lang="it-IT" dirty="0"/>
+              <a:t>TODO: come gestire</a:t>
+            </a:r>
+            <a:r>
+              <a:rPr lang="it-IT" baseline="0" dirty="0"/>
+              <a:t> conflitti in scrittura? Quorum, l‘ultimo vince o segnalazione.</a:t>
+            </a:r>
             <a:endParaRPr lang="it-IT" dirty="0"/>
           </a:p>
         </p:txBody>
@@ -2311,7 +2242,7 @@
     </p:spTree>
     <p:extLst>
       <p:ext uri="{BB962C8B-B14F-4D97-AF65-F5344CB8AC3E}">
-        <p14:creationId xmlns:p14="http://schemas.microsoft.com/office/powerpoint/2010/main" val="3180473861"/>
+        <p14:creationId xmlns:p14="http://schemas.microsoft.com/office/powerpoint/2010/main" val="71313449"/>
       </p:ext>
     </p:extLst>
   </p:cSld>
@@ -2366,64 +2297,118 @@
           <a:lstStyle/>
           <a:p>
             <a:r>
-              <a:rPr lang="it-IT" dirty="0"/>
-              <a:t>- </a:t>
-            </a:r>
-            <a:r>
-              <a:rPr lang="it-IT" dirty="0" err="1"/>
-              <a:t>Conistente</a:t>
-            </a:r>
-            <a:r>
-              <a:rPr lang="it-IT" dirty="0"/>
-              <a:t>: ogni nodo restituisce la stesa, più recente, scrittura riuscita. Ogni cliente ha la stessa vista dei dati</a:t>
-            </a:r>
-          </a:p>
-          <a:p>
-            <a:pPr marL="171450" indent="-171450">
-              <a:buFontTx/>
-              <a:buChar char="-"/>
-            </a:pPr>
-            <a:r>
-              <a:rPr lang="it-IT" dirty="0"/>
-              <a:t>Disponibile: Ogni nodo (non fallito) </a:t>
-            </a:r>
-            <a:r>
-              <a:rPr lang="it-IT" dirty="0" err="1"/>
-              <a:t>resistuice</a:t>
-            </a:r>
-            <a:r>
-              <a:rPr lang="it-IT" dirty="0"/>
-              <a:t> una risposta per tutte le richieste di scrittura o lettura in un ragionevole periodo di tempo</a:t>
-            </a:r>
-          </a:p>
-          <a:p>
-            <a:pPr marL="171450" indent="-171450">
-              <a:buFontTx/>
-              <a:buChar char="-"/>
-            </a:pPr>
-            <a:r>
-              <a:rPr lang="it-IT" dirty="0" err="1"/>
-              <a:t>Partition</a:t>
-            </a:r>
-            <a:r>
-              <a:rPr lang="it-IT" dirty="0"/>
+              <a:rPr lang="it-IT" noProof="0" dirty="0" err="1"/>
+              <a:t>Eventual</a:t>
+            </a:r>
+            <a:r>
+              <a:rPr lang="it-IT" noProof="0" dirty="0"/>
               <a:t> </a:t>
             </a:r>
             <a:r>
-              <a:rPr lang="it-IT" dirty="0" err="1"/>
-              <a:t>tolerance</a:t>
-            </a:r>
-            <a:r>
-              <a:rPr lang="it-IT" dirty="0"/>
-              <a:t>: nonostante un insieme di macchine rimanga scollegato il sistema continua a funzionare, questo problema può capitare nei sistemi distribuiti</a:t>
-            </a:r>
+              <a:rPr lang="it-IT" noProof="0" dirty="0" err="1"/>
+              <a:t>consistency</a:t>
+            </a:r>
+            <a:r>
+              <a:rPr lang="it-IT" noProof="0" dirty="0"/>
+              <a:t> </a:t>
+            </a:r>
+            <a:r>
+              <a:rPr lang="it-IT" noProof="0" dirty="0" err="1"/>
+              <a:t>is</a:t>
+            </a:r>
+            <a:r>
+              <a:rPr lang="it-IT" noProof="0" dirty="0"/>
+              <a:t> </a:t>
+            </a:r>
+            <a:r>
+              <a:rPr lang="it-IT" noProof="0" dirty="0" err="1"/>
+              <a:t>independent</a:t>
+            </a:r>
+            <a:r>
+              <a:rPr lang="it-IT" noProof="0" dirty="0"/>
+              <a:t> from </a:t>
+            </a:r>
+            <a:r>
+              <a:rPr lang="it-IT" noProof="0" dirty="0" err="1"/>
+              <a:t>logical</a:t>
+            </a:r>
+            <a:r>
+              <a:rPr lang="it-IT" noProof="0" dirty="0"/>
+              <a:t> </a:t>
+            </a:r>
+            <a:r>
+              <a:rPr lang="it-IT" noProof="0" dirty="0" err="1"/>
+              <a:t>consistency</a:t>
+            </a:r>
+            <a:r>
+              <a:rPr lang="it-IT" noProof="0" dirty="0"/>
+              <a:t> </a:t>
+            </a:r>
+            <a:r>
+              <a:rPr lang="it-IT" noProof="0" dirty="0" err="1"/>
+              <a:t>but</a:t>
+            </a:r>
+            <a:r>
+              <a:rPr lang="it-IT" noProof="0" dirty="0"/>
+              <a:t> </a:t>
+            </a:r>
+            <a:r>
+              <a:rPr lang="it-IT" noProof="0" dirty="0" err="1"/>
+              <a:t>replication</a:t>
+            </a:r>
+            <a:r>
+              <a:rPr lang="it-IT" noProof="0" dirty="0"/>
+              <a:t> can </a:t>
+            </a:r>
+            <a:r>
+              <a:rPr lang="it-IT" noProof="0" dirty="0" err="1"/>
+              <a:t>lengthen</a:t>
+            </a:r>
+            <a:r>
+              <a:rPr lang="it-IT" noProof="0" dirty="0"/>
+              <a:t> the </a:t>
+            </a:r>
+            <a:r>
+              <a:rPr lang="it-IT" noProof="0" dirty="0" err="1"/>
+              <a:t>inconsistency</a:t>
+            </a:r>
+            <a:r>
+              <a:rPr lang="it-IT" noProof="0" dirty="0"/>
+              <a:t> window. </a:t>
+            </a:r>
+          </a:p>
+          <a:p>
+            <a:endParaRPr lang="it-IT" noProof="0" dirty="0"/>
+          </a:p>
+          <a:p>
+            <a:r>
+              <a:rPr lang="it-IT" noProof="0" dirty="0"/>
+              <a:t>Read-</a:t>
+            </a:r>
+            <a:r>
+              <a:rPr lang="it-IT" noProof="0" dirty="0" err="1"/>
+              <a:t>your</a:t>
+            </a:r>
+            <a:r>
+              <a:rPr lang="it-IT" noProof="0" dirty="0"/>
+              <a:t>-</a:t>
+            </a:r>
+            <a:r>
+              <a:rPr lang="it-IT" noProof="0" dirty="0" err="1"/>
+              <a:t>write</a:t>
+            </a:r>
+            <a:r>
+              <a:rPr lang="it-IT" noProof="0" dirty="0"/>
+              <a:t> si applica solo alle letture che seguono immediatamente un’operazione di scrittura. Un modo è associare un utente a un nodo (rischio di carichi di lavoro sbilanciati)</a:t>
+            </a:r>
+            <a:endParaRPr lang="it-IT" dirty="0"/>
           </a:p>
         </p:txBody>
       </p:sp>
     </p:spTree>
     <p:extLst>
       <p:ext uri="{BB962C8B-B14F-4D97-AF65-F5344CB8AC3E}">
-        <p14:creationId xmlns:p14="http://schemas.microsoft.com/office/powerpoint/2010/main" val="3950622864"/>
+        <p14:creationId xmlns:p14="http://schemas.microsoft.com/office/powerpoint/2010/main" val="2881554717"/>
       </p:ext>
     </p:extLst>
   </p:cSld>
@@ -2479,7 +2464,7 @@
           <a:p>
             <a:r>
               <a:rPr lang="it-IT" dirty="0"/>
-              <a:t>http://dbmsmusings.blogspot.com/2010/04/problems-with-cap-and-yahoos-little.html</a:t>
+              <a:t>A seconda di come si imposta il quorum di scrittura cambia, es. se metto W = 5 vedrò tutto bene.</a:t>
             </a:r>
           </a:p>
         </p:txBody>
@@ -2487,7 +2472,7 @@
     </p:spTree>
     <p:extLst>
       <p:ext uri="{BB962C8B-B14F-4D97-AF65-F5344CB8AC3E}">
-        <p14:creationId xmlns:p14="http://schemas.microsoft.com/office/powerpoint/2010/main" val="3262069686"/>
+        <p14:creationId xmlns:p14="http://schemas.microsoft.com/office/powerpoint/2010/main" val="3124853014"/>
       </p:ext>
     </p:extLst>
   </p:cSld>
@@ -2541,17 +2526,14 @@
           <a:bodyPr/>
           <a:lstStyle/>
           <a:p>
-            <a:r>
-              <a:rPr lang="it-IT" dirty="0"/>
-              <a:t>Il motivo scatenante è il fatto di non scalare orizzontalmente</a:t>
-            </a:r>
+            <a:endParaRPr lang="it-IT" dirty="0"/>
           </a:p>
         </p:txBody>
       </p:sp>
     </p:spTree>
     <p:extLst>
       <p:ext uri="{BB962C8B-B14F-4D97-AF65-F5344CB8AC3E}">
-        <p14:creationId xmlns:p14="http://schemas.microsoft.com/office/powerpoint/2010/main" val="588048382"/>
+        <p14:creationId xmlns:p14="http://schemas.microsoft.com/office/powerpoint/2010/main" val="3450367549"/>
       </p:ext>
     </p:extLst>
   </p:cSld>
@@ -2607,71 +2589,23 @@
           <a:p>
             <a:r>
               <a:rPr lang="it-IT" dirty="0"/>
-              <a:t>Gestione del conflitto in scrittura:</a:t>
-            </a:r>
-          </a:p>
-          <a:p>
-            <a:pPr marL="171450" indent="-171450">
-              <a:buFontTx/>
-              <a:buChar char="-"/>
-            </a:pPr>
-            <a:r>
-              <a:rPr lang="it-IT" dirty="0"/>
-              <a:t>Last </a:t>
+              <a:t>Fornisce </a:t>
             </a:r>
             <a:r>
               <a:rPr lang="it-IT" dirty="0" err="1"/>
-              <a:t>one</a:t>
-            </a:r>
-            <a:r>
-              <a:rPr lang="it-IT" dirty="0"/>
-              <a:t> </a:t>
-            </a:r>
-            <a:r>
-              <a:rPr lang="it-IT" dirty="0" err="1"/>
-              <a:t>wins</a:t>
-            </a:r>
-            <a:r>
-              <a:rPr lang="it-IT" dirty="0"/>
-              <a:t> (vince l’ultimo</a:t>
-            </a:r>
-            <a:r>
-              <a:rPr lang="it-IT" baseline="0" dirty="0"/>
-              <a:t> che arriva)</a:t>
-            </a:r>
-            <a:endParaRPr lang="it-IT" dirty="0"/>
-          </a:p>
-          <a:p>
-            <a:pPr marL="171450" indent="-171450">
-              <a:buFontTx/>
-              <a:buChar char="-"/>
-            </a:pPr>
-            <a:r>
-              <a:rPr lang="it-IT" dirty="0"/>
-              <a:t>Segnalazione</a:t>
-            </a:r>
-            <a:r>
-              <a:rPr lang="it-IT" baseline="0" dirty="0"/>
-              <a:t> all’utente del conflitto</a:t>
-            </a:r>
-          </a:p>
-          <a:p>
-            <a:pPr marL="171450" indent="-171450">
-              <a:buFontTx/>
-              <a:buChar char="-"/>
-            </a:pPr>
-            <a:r>
-              <a:rPr lang="it-IT" baseline="0" dirty="0"/>
-              <a:t>Quorum</a:t>
-            </a:r>
-            <a:endParaRPr lang="it-IT" dirty="0"/>
+              <a:t>granzie</a:t>
+            </a:r>
+            <a:r>
+              <a:rPr lang="it-IT" dirty="0"/>
+              <a:t> in termini di consistenza e accessi simultanei</a:t>
+            </a:r>
           </a:p>
         </p:txBody>
       </p:sp>
     </p:spTree>
     <p:extLst>
       <p:ext uri="{BB962C8B-B14F-4D97-AF65-F5344CB8AC3E}">
-        <p14:creationId xmlns:p14="http://schemas.microsoft.com/office/powerpoint/2010/main" val="3737598672"/>
+        <p14:creationId xmlns:p14="http://schemas.microsoft.com/office/powerpoint/2010/main" val="298767556"/>
       </p:ext>
     </p:extLst>
   </p:cSld>
@@ -2725,25 +2659,6 @@
           <a:bodyPr/>
           <a:lstStyle/>
           <a:p>
-            <a:r>
-              <a:rPr lang="it-IT" dirty="0"/>
-              <a:t>1 RDBMS </a:t>
-            </a:r>
-            <a:r>
-              <a:rPr lang="it-IT" dirty="0" err="1"/>
-              <a:t>would</a:t>
-            </a:r>
-            <a:r>
-              <a:rPr lang="it-IT" dirty="0"/>
-              <a:t> be </a:t>
-            </a:r>
-            <a:r>
-              <a:rPr lang="it-IT" dirty="0" err="1"/>
-              <a:t>overkill</a:t>
-            </a:r>
-            <a:endParaRPr lang="it-IT" dirty="0"/>
-          </a:p>
-          <a:p>
             <a:endParaRPr lang="it-IT" dirty="0"/>
           </a:p>
         </p:txBody>
@@ -2751,7 +2666,7 @@
     </p:spTree>
     <p:extLst>
       <p:ext uri="{BB962C8B-B14F-4D97-AF65-F5344CB8AC3E}">
-        <p14:creationId xmlns:p14="http://schemas.microsoft.com/office/powerpoint/2010/main" val="3616611352"/>
+        <p14:creationId xmlns:p14="http://schemas.microsoft.com/office/powerpoint/2010/main" val="3180473861"/>
       </p:ext>
     </p:extLst>
   </p:cSld>
@@ -2807,38 +2722,55 @@
           <a:p>
             <a:r>
               <a:rPr lang="it-IT" dirty="0"/>
-              <a:t>1 RDBMS </a:t>
+              <a:t>- </a:t>
             </a:r>
             <a:r>
               <a:rPr lang="it-IT" dirty="0" err="1"/>
-              <a:t>would</a:t>
-            </a:r>
-            <a:r>
-              <a:rPr lang="it-IT" dirty="0"/>
-              <a:t> be </a:t>
+              <a:t>Conistente</a:t>
+            </a:r>
+            <a:r>
+              <a:rPr lang="it-IT" dirty="0"/>
+              <a:t>: ogni nodo restituisce la stesa, più recente, scrittura riuscita. Ogni cliente ha la stessa vista dei dati</a:t>
+            </a:r>
+          </a:p>
+          <a:p>
+            <a:pPr marL="171450" indent="-171450">
+              <a:buFontTx/>
+              <a:buChar char="-"/>
+            </a:pPr>
+            <a:r>
+              <a:rPr lang="it-IT" dirty="0"/>
+              <a:t>Disponibile: Ogni nodo (non fallito) </a:t>
             </a:r>
             <a:r>
               <a:rPr lang="it-IT" dirty="0" err="1"/>
-              <a:t>overkill</a:t>
-            </a:r>
-            <a:endParaRPr lang="it-IT" dirty="0"/>
-          </a:p>
-          <a:p>
-            <a:r>
-              <a:rPr lang="it-IT" dirty="0"/>
-              <a:t>https://www.infoq.com/presentations/Real-Time-Delivery-Twitter</a:t>
-            </a:r>
-          </a:p>
-          <a:p>
-            <a:r>
-              <a:rPr lang="it-IT" dirty="0"/>
-              <a:t>http://highscalability.com/blog/2014/9/8/how-twitter-uses-redis-to-scale-105tb-ram-39mm-qps-10000-ins.html</a:t>
-            </a:r>
-          </a:p>
-          <a:p>
-            <a:r>
-              <a:rPr lang="it-IT" dirty="0"/>
-              <a:t>https://www.quora.com/Why-is-Twitter-not-using-NoSQL</a:t>
+              <a:t>resistuice</a:t>
+            </a:r>
+            <a:r>
+              <a:rPr lang="it-IT" dirty="0"/>
+              <a:t> una risposta per tutte le richieste di scrittura o lettura in un ragionevole periodo di tempo</a:t>
+            </a:r>
+          </a:p>
+          <a:p>
+            <a:pPr marL="171450" indent="-171450">
+              <a:buFontTx/>
+              <a:buChar char="-"/>
+            </a:pPr>
+            <a:r>
+              <a:rPr lang="it-IT" dirty="0" err="1"/>
+              <a:t>Partition</a:t>
+            </a:r>
+            <a:r>
+              <a:rPr lang="it-IT" dirty="0"/>
+              <a:t> </a:t>
+            </a:r>
+            <a:r>
+              <a:rPr lang="it-IT" dirty="0" err="1"/>
+              <a:t>tolerance</a:t>
+            </a:r>
+            <a:r>
+              <a:rPr lang="it-IT" dirty="0"/>
+              <a:t>: nonostante un insieme di macchine rimanga scollegato il sistema continua a funzionare, questo problema può capitare nei sistemi distribuiti</a:t>
             </a:r>
           </a:p>
         </p:txBody>
@@ -2846,7 +2778,7 @@
     </p:spTree>
     <p:extLst>
       <p:ext uri="{BB962C8B-B14F-4D97-AF65-F5344CB8AC3E}">
-        <p14:creationId xmlns:p14="http://schemas.microsoft.com/office/powerpoint/2010/main" val="1529172759"/>
+        <p14:creationId xmlns:p14="http://schemas.microsoft.com/office/powerpoint/2010/main" val="3950622864"/>
       </p:ext>
     </p:extLst>
   </p:cSld>
@@ -2900,68 +2832,17 @@
           <a:bodyPr/>
           <a:lstStyle/>
           <a:p>
-            <a:pPr marL="0" marR="0" lvl="0" indent="0" algn="l" defTabSz="914400" rtl="0" eaLnBrk="1" fontAlgn="auto" latinLnBrk="0" hangingPunct="1">
-              <a:lnSpc>
-                <a:spcPct val="100000"/>
-              </a:lnSpc>
-              <a:spcBef>
-                <a:spcPts val="0"/>
-              </a:spcBef>
-              <a:spcAft>
-                <a:spcPts val="0"/>
-              </a:spcAft>
-              <a:buClrTx/>
-              <a:buSzTx/>
-              <a:buFontTx/>
-              <a:buNone/>
-              <a:tabLst/>
-              <a:defRPr/>
-            </a:pPr>
-            <a:r>
-              <a:rPr lang="en-US" baseline="0" dirty="0"/>
-              <a:t>Netflix: 12M trans/sec. </a:t>
-            </a:r>
-            <a:r>
-              <a:rPr lang="en-US" baseline="0" dirty="0" err="1"/>
-              <a:t>Ebay</a:t>
-            </a:r>
-            <a:r>
-              <a:rPr lang="en-US" baseline="0" dirty="0"/>
-              <a:t>, &gt;100TB. </a:t>
-            </a:r>
-            <a:r>
-              <a:rPr lang="en-US" baseline="0" dirty="0" err="1"/>
-              <a:t>IoT</a:t>
-            </a:r>
-            <a:endParaRPr lang="en-US" baseline="0" dirty="0"/>
-          </a:p>
-          <a:p>
-            <a:endParaRPr lang="en-US" dirty="0"/>
-          </a:p>
-          <a:p>
-            <a:r>
-              <a:rPr lang="en-US" dirty="0"/>
-              <a:t>https://labs.spotify.com/2015/01/09/personalization-at-spotify-using-cassandra/</a:t>
-            </a:r>
-          </a:p>
-          <a:p>
-            <a:endParaRPr lang="en-US" dirty="0"/>
-          </a:p>
-          <a:p>
-            <a:r>
-              <a:rPr lang="en-US" dirty="0"/>
-              <a:t>https://academy.datastax.com/resources/ds220-data-modeling?unit=use-cases-use-case-introduction</a:t>
-            </a:r>
-          </a:p>
-          <a:p>
-            <a:endParaRPr lang="en-US" dirty="0"/>
+            <a:r>
+              <a:rPr lang="it-IT" dirty="0"/>
+              <a:t>http://dbmsmusings.blogspot.com/2010/04/problems-with-cap-and-yahoos-little.html</a:t>
+            </a:r>
           </a:p>
         </p:txBody>
       </p:sp>
     </p:spTree>
     <p:extLst>
       <p:ext uri="{BB962C8B-B14F-4D97-AF65-F5344CB8AC3E}">
-        <p14:creationId xmlns:p14="http://schemas.microsoft.com/office/powerpoint/2010/main" val="3204084860"/>
+        <p14:creationId xmlns:p14="http://schemas.microsoft.com/office/powerpoint/2010/main" val="3262069686"/>
       </p:ext>
     </p:extLst>
   </p:cSld>
@@ -3015,109 +2896,65 @@
           <a:bodyPr/>
           <a:lstStyle/>
           <a:p>
-            <a:pPr marL="0" marR="0" lvl="0" indent="0" algn="l" defTabSz="914400" rtl="0" eaLnBrk="1" fontAlgn="auto" latinLnBrk="0" hangingPunct="1">
-              <a:lnSpc>
-                <a:spcPct val="100000"/>
-              </a:lnSpc>
-              <a:spcBef>
-                <a:spcPts val="0"/>
-              </a:spcBef>
-              <a:spcAft>
-                <a:spcPts val="0"/>
-              </a:spcAft>
-              <a:buClrTx/>
-              <a:buSzTx/>
+            <a:r>
+              <a:rPr lang="it-IT" dirty="0"/>
+              <a:t>Gestione del conflitto in scrittura:</a:t>
+            </a:r>
+          </a:p>
+          <a:p>
+            <a:pPr marL="171450" indent="-171450">
               <a:buFontTx/>
-              <a:buNone/>
-              <a:tabLst/>
-              <a:defRPr/>
+              <a:buChar char="-"/>
             </a:pPr>
             <a:r>
-              <a:rPr lang="it-IT" noProof="0" dirty="0"/>
-              <a:t>Prototipazioni: </a:t>
-            </a:r>
-            <a:r>
-              <a:rPr lang="it-IT" dirty="0"/>
-              <a:t>nelle prima fasi di progetto, i pattern delle </a:t>
+              <a:rPr lang="it-IT" dirty="0"/>
+              <a:t>Last </a:t>
             </a:r>
             <a:r>
               <a:rPr lang="it-IT" dirty="0" err="1"/>
-              <a:t>query</a:t>
-            </a:r>
-            <a:r>
-              <a:rPr lang="it-IT" dirty="0"/>
-              <a:t> possono cambiare frequentemente, con la conseguenza di dover riprogettare le famiglie di colonne. </a:t>
-            </a:r>
-            <a:r>
-              <a:rPr lang="it-IT" noProof="0" dirty="0"/>
-              <a:t>In Cassandra, the </a:t>
-            </a:r>
-            <a:r>
-              <a:rPr lang="it-IT" noProof="0" dirty="0" err="1"/>
-              <a:t>cost</a:t>
-            </a:r>
-            <a:r>
-              <a:rPr lang="it-IT" noProof="0" dirty="0"/>
+              <a:t>one</a:t>
+            </a:r>
+            <a:r>
+              <a:rPr lang="it-IT" dirty="0"/>
               <a:t> </a:t>
             </a:r>
             <a:r>
-              <a:rPr lang="it-IT" noProof="0" dirty="0" err="1"/>
-              <a:t>may</a:t>
-            </a:r>
-            <a:r>
-              <a:rPr lang="it-IT" noProof="0" dirty="0"/>
-              <a:t> be </a:t>
-            </a:r>
-            <a:r>
-              <a:rPr lang="it-IT" noProof="0" dirty="0" err="1"/>
-              <a:t>higher</a:t>
-            </a:r>
-            <a:r>
-              <a:rPr lang="it-IT" noProof="0" dirty="0"/>
-              <a:t> for </a:t>
-            </a:r>
-            <a:r>
-              <a:rPr lang="it-IT" noProof="0" dirty="0" err="1"/>
-              <a:t>query</a:t>
-            </a:r>
-            <a:r>
-              <a:rPr lang="it-IT" noProof="0" dirty="0"/>
-              <a:t> </a:t>
-            </a:r>
-            <a:r>
-              <a:rPr lang="it-IT" noProof="0" dirty="0" err="1"/>
-              <a:t>change</a:t>
-            </a:r>
-            <a:r>
-              <a:rPr lang="it-IT" noProof="0" dirty="0"/>
-              <a:t> </a:t>
-            </a:r>
-            <a:r>
-              <a:rPr lang="it-IT" noProof="0" dirty="0" err="1"/>
-              <a:t>as</a:t>
-            </a:r>
-            <a:r>
-              <a:rPr lang="it-IT" noProof="0" dirty="0"/>
-              <a:t> </a:t>
-            </a:r>
-            <a:r>
-              <a:rPr lang="it-IT" noProof="0" dirty="0" err="1"/>
-              <a:t>compared</a:t>
-            </a:r>
-            <a:r>
-              <a:rPr lang="it-IT" noProof="0" dirty="0"/>
-              <a:t> to schema </a:t>
-            </a:r>
-            <a:r>
-              <a:rPr lang="it-IT" noProof="0" dirty="0" err="1"/>
-              <a:t>change</a:t>
-            </a:r>
-            <a:r>
-              <a:rPr lang="it-IT" noProof="0" dirty="0"/>
-              <a:t>.</a:t>
-            </a:r>
-          </a:p>
-          <a:p>
+              <a:rPr lang="it-IT" dirty="0" err="1"/>
+              <a:t>wins</a:t>
+            </a:r>
+            <a:r>
+              <a:rPr lang="it-IT" dirty="0"/>
+              <a:t> (vince l’ultimo</a:t>
+            </a:r>
+            <a:r>
+              <a:rPr lang="it-IT" baseline="0" dirty="0"/>
+              <a:t> che arriva)</a:t>
+            </a:r>
+            <a:endParaRPr lang="it-IT" dirty="0"/>
+          </a:p>
+          <a:p>
+            <a:pPr marL="171450" indent="-171450">
+              <a:buFontTx/>
+              <a:buChar char="-"/>
+            </a:pPr>
+            <a:r>
+              <a:rPr lang="it-IT" dirty="0"/>
+              <a:t>Segnalazione</a:t>
+            </a:r>
+            <a:r>
+              <a:rPr lang="it-IT" baseline="0" dirty="0"/>
+              <a:t> all’utente del conflitto</a:t>
+            </a:r>
+          </a:p>
+          <a:p>
+            <a:pPr marL="171450" indent="-171450">
+              <a:buFontTx/>
+              <a:buChar char="-"/>
+            </a:pPr>
+            <a:r>
+              <a:rPr lang="it-IT" baseline="0" dirty="0"/>
+              <a:t>Quorum</a:t>
+            </a:r>
             <a:endParaRPr lang="it-IT" dirty="0"/>
           </a:p>
         </p:txBody>
@@ -3125,7 +2962,7 @@
     </p:spTree>
     <p:extLst>
       <p:ext uri="{BB962C8B-B14F-4D97-AF65-F5344CB8AC3E}">
-        <p14:creationId xmlns:p14="http://schemas.microsoft.com/office/powerpoint/2010/main" val="872742841"/>
+        <p14:creationId xmlns:p14="http://schemas.microsoft.com/office/powerpoint/2010/main" val="3737598672"/>
       </p:ext>
     </p:extLst>
   </p:cSld>
@@ -3180,16 +3017,32 @@
           <a:lstStyle/>
           <a:p>
             <a:r>
-              <a:rPr lang="en-US" dirty="0"/>
-              <a:t>https://developer.ibm.com/dwblog/2017/detecting-complex-fraud-real-time-graph-databases/</a:t>
-            </a:r>
+              <a:rPr lang="it-IT" dirty="0"/>
+              <a:t>1 RDBMS </a:t>
+            </a:r>
+            <a:r>
+              <a:rPr lang="it-IT" dirty="0" err="1"/>
+              <a:t>would</a:t>
+            </a:r>
+            <a:r>
+              <a:rPr lang="it-IT" dirty="0"/>
+              <a:t> be </a:t>
+            </a:r>
+            <a:r>
+              <a:rPr lang="it-IT" dirty="0" err="1"/>
+              <a:t>overkill</a:t>
+            </a:r>
+            <a:endParaRPr lang="it-IT" dirty="0"/>
+          </a:p>
+          <a:p>
+            <a:endParaRPr lang="it-IT" dirty="0"/>
           </a:p>
         </p:txBody>
       </p:sp>
     </p:spTree>
     <p:extLst>
       <p:ext uri="{BB962C8B-B14F-4D97-AF65-F5344CB8AC3E}">
-        <p14:creationId xmlns:p14="http://schemas.microsoft.com/office/powerpoint/2010/main" val="2486013967"/>
+        <p14:creationId xmlns:p14="http://schemas.microsoft.com/office/powerpoint/2010/main" val="3616611352"/>
       </p:ext>
     </p:extLst>
   </p:cSld>
@@ -3243,14 +3096,48 @@
           <a:bodyPr/>
           <a:lstStyle/>
           <a:p>
+            <a:r>
+              <a:rPr lang="it-IT" dirty="0"/>
+              <a:t>1 RDBMS </a:t>
+            </a:r>
+            <a:r>
+              <a:rPr lang="it-IT" dirty="0" err="1"/>
+              <a:t>would</a:t>
+            </a:r>
+            <a:r>
+              <a:rPr lang="it-IT" dirty="0"/>
+              <a:t> be </a:t>
+            </a:r>
+            <a:r>
+              <a:rPr lang="it-IT" dirty="0" err="1"/>
+              <a:t>overkill</a:t>
+            </a:r>
             <a:endParaRPr lang="it-IT" dirty="0"/>
+          </a:p>
+          <a:p>
+            <a:r>
+              <a:rPr lang="it-IT" dirty="0"/>
+              <a:t>https://www.infoq.com/presentations/Real-Time-Delivery-Twitter</a:t>
+            </a:r>
+          </a:p>
+          <a:p>
+            <a:r>
+              <a:rPr lang="it-IT" dirty="0"/>
+              <a:t>http://highscalability.com/blog/2014/9/8/how-twitter-uses-redis-to-scale-105tb-ram-39mm-qps-10000-ins.html</a:t>
+            </a:r>
+          </a:p>
+          <a:p>
+            <a:r>
+              <a:rPr lang="it-IT" dirty="0"/>
+              <a:t>https://www.quora.com/Why-is-Twitter-not-using-NoSQL</a:t>
+            </a:r>
           </a:p>
         </p:txBody>
       </p:sp>
     </p:spTree>
     <p:extLst>
       <p:ext uri="{BB962C8B-B14F-4D97-AF65-F5344CB8AC3E}">
-        <p14:creationId xmlns:p14="http://schemas.microsoft.com/office/powerpoint/2010/main" val="2158725968"/>
+        <p14:creationId xmlns:p14="http://schemas.microsoft.com/office/powerpoint/2010/main" val="1529172759"/>
       </p:ext>
     </p:extLst>
   </p:cSld>
@@ -3304,45 +3191,68 @@
           <a:bodyPr/>
           <a:lstStyle/>
           <a:p>
-            <a:r>
-              <a:rPr lang="en-US" dirty="0" err="1"/>
-              <a:t>Termine</a:t>
-            </a:r>
+            <a:pPr marL="0" marR="0" lvl="0" indent="0" algn="l" defTabSz="914400" rtl="0" eaLnBrk="1" fontAlgn="auto" latinLnBrk="0" hangingPunct="1">
+              <a:lnSpc>
+                <a:spcPct val="100000"/>
+              </a:lnSpc>
+              <a:spcBef>
+                <a:spcPts val="0"/>
+              </a:spcBef>
+              <a:spcAft>
+                <a:spcPts val="0"/>
+              </a:spcAft>
+              <a:buClrTx/>
+              <a:buSzTx/>
+              <a:buFontTx/>
+              <a:buNone/>
+              <a:tabLst/>
+              <a:defRPr/>
+            </a:pPr>
+            <a:r>
+              <a:rPr lang="en-US" baseline="0" dirty="0"/>
+              <a:t>Netflix: 12M trans/sec. </a:t>
+            </a:r>
+            <a:r>
+              <a:rPr lang="en-US" baseline="0" dirty="0" err="1"/>
+              <a:t>Ebay</a:t>
+            </a:r>
+            <a:r>
+              <a:rPr lang="en-US" baseline="0" dirty="0"/>
+              <a:t>, &gt;100TB. </a:t>
+            </a:r>
+            <a:r>
+              <a:rPr lang="en-US" baseline="0" dirty="0" err="1"/>
+              <a:t>IoT</a:t>
+            </a:r>
+            <a:endParaRPr lang="en-US" baseline="0" dirty="0"/>
+          </a:p>
+          <a:p>
+            <a:endParaRPr lang="en-US" dirty="0"/>
+          </a:p>
+          <a:p>
             <a:r>
               <a:rPr lang="en-US" dirty="0"/>
-              <a:t> </a:t>
-            </a:r>
-            <a:r>
-              <a:rPr lang="en-US" dirty="0" err="1"/>
-              <a:t>derivato</a:t>
-            </a:r>
+              <a:t>https://labs.spotify.com/2015/01/09/personalization-at-spotify-using-cassandra/</a:t>
+            </a:r>
+          </a:p>
+          <a:p>
+            <a:endParaRPr lang="en-US" dirty="0"/>
+          </a:p>
+          <a:p>
             <a:r>
               <a:rPr lang="en-US" dirty="0"/>
-              <a:t> da "</a:t>
-            </a:r>
-            <a:r>
-              <a:rPr lang="en-US" dirty="0" err="1"/>
-              <a:t>programmazione</a:t>
-            </a:r>
-            <a:r>
-              <a:rPr lang="en-US" dirty="0"/>
-              <a:t> </a:t>
-            </a:r>
-            <a:r>
-              <a:rPr lang="en-US" dirty="0" err="1"/>
-              <a:t>poliglotta</a:t>
-            </a:r>
-            <a:r>
-              <a:rPr lang="en-US" dirty="0"/>
-              <a:t>"</a:t>
-            </a:r>
+              <a:t>https://academy.datastax.com/resources/ds220-data-modeling?unit=use-cases-use-case-introduction</a:t>
+            </a:r>
+          </a:p>
+          <a:p>
+            <a:endParaRPr lang="en-US" dirty="0"/>
           </a:p>
         </p:txBody>
       </p:sp>
     </p:spTree>
     <p:extLst>
       <p:ext uri="{BB962C8B-B14F-4D97-AF65-F5344CB8AC3E}">
-        <p14:creationId xmlns:p14="http://schemas.microsoft.com/office/powerpoint/2010/main" val="1735169948"/>
+        <p14:creationId xmlns:p14="http://schemas.microsoft.com/office/powerpoint/2010/main" val="3204084860"/>
       </p:ext>
     </p:extLst>
   </p:cSld>
@@ -3396,85 +3306,107 @@
           <a:bodyPr/>
           <a:lstStyle/>
           <a:p>
-            <a:r>
-              <a:rPr lang="en-US" sz="1200" b="0" i="0" u="none" strike="noStrike" kern="1200" baseline="0" dirty="0">
-                <a:solidFill>
-                  <a:schemeClr val="tx1"/>
-                </a:solidFill>
-                <a:latin typeface="+mn-lt"/>
-                <a:ea typeface="+mn-ea"/>
-                <a:cs typeface="+mn-cs"/>
-              </a:rPr>
-              <a:t>The session, shopping cart, or order data do not need the same properties of availability, consistency, or backup requirements. Does session management storage need the same rigorous backup/recovery strategy as the e-commerce orders data? Does the session management storage need more availability of an instance of database engine to write/read session data?</a:t>
-            </a:r>
-          </a:p>
-          <a:p>
-            <a:endParaRPr lang="en-US" sz="1200" b="0" i="0" u="none" strike="noStrike" kern="1200" baseline="0" dirty="0">
-              <a:solidFill>
-                <a:schemeClr val="tx1"/>
-              </a:solidFill>
-              <a:latin typeface="+mn-lt"/>
-              <a:ea typeface="+mn-ea"/>
-              <a:cs typeface="+mn-cs"/>
-            </a:endParaRPr>
-          </a:p>
-          <a:p>
-            <a:r>
-              <a:rPr lang="en-US" sz="1200" b="0" i="0" u="none" strike="noStrike" kern="1200" baseline="0" dirty="0">
-                <a:solidFill>
-                  <a:schemeClr val="tx1"/>
-                </a:solidFill>
-                <a:latin typeface="+mn-lt"/>
-                <a:ea typeface="+mn-ea"/>
-                <a:cs typeface="+mn-cs"/>
-              </a:rPr>
-              <a:t>In 2006, Neal Ford coined the term </a:t>
-            </a:r>
-            <a:r>
-              <a:rPr lang="en-US" sz="1200" b="1" i="0" u="none" strike="noStrike" kern="1200" baseline="0" dirty="0">
-                <a:solidFill>
-                  <a:schemeClr val="tx1"/>
-                </a:solidFill>
-                <a:latin typeface="+mn-lt"/>
-                <a:ea typeface="+mn-ea"/>
-                <a:cs typeface="+mn-cs"/>
-              </a:rPr>
-              <a:t>polyglot programming</a:t>
-            </a:r>
-            <a:r>
-              <a:rPr lang="en-US" sz="1200" b="0" i="0" u="none" strike="noStrike" kern="1200" baseline="0" dirty="0">
-                <a:solidFill>
-                  <a:schemeClr val="tx1"/>
-                </a:solidFill>
-                <a:latin typeface="+mn-lt"/>
-                <a:ea typeface="+mn-ea"/>
-                <a:cs typeface="+mn-cs"/>
-              </a:rPr>
-              <a:t>, to express the idea that applications should be written in a mix of languages to take advantage of the fact that different languages are suitable for tackling different problems. Complex applications combine different types of problems, so picking the right language for each job may be more productive than trying to fit all aspects into a single </a:t>
-            </a:r>
-            <a:r>
-              <a:rPr lang="it-IT" sz="1200" b="0" i="0" u="none" strike="noStrike" kern="1200" baseline="0" dirty="0" err="1">
-                <a:solidFill>
-                  <a:schemeClr val="tx1"/>
-                </a:solidFill>
-                <a:latin typeface="+mn-lt"/>
-                <a:ea typeface="+mn-ea"/>
-                <a:cs typeface="+mn-cs"/>
-              </a:rPr>
-              <a:t>language</a:t>
-            </a:r>
-            <a:r>
-              <a:rPr lang="it-IT" sz="1200" b="0" i="0" u="none" strike="noStrike" kern="1200" baseline="0" dirty="0">
-                <a:solidFill>
-                  <a:schemeClr val="tx1"/>
-                </a:solidFill>
-                <a:latin typeface="+mn-lt"/>
-                <a:ea typeface="+mn-ea"/>
-                <a:cs typeface="+mn-cs"/>
-              </a:rPr>
+            <a:pPr marL="0" marR="0" lvl="0" indent="0" algn="l" defTabSz="914400" rtl="0" eaLnBrk="1" fontAlgn="auto" latinLnBrk="0" hangingPunct="1">
+              <a:lnSpc>
+                <a:spcPct val="100000"/>
+              </a:lnSpc>
+              <a:spcBef>
+                <a:spcPts val="0"/>
+              </a:spcBef>
+              <a:spcAft>
+                <a:spcPts val="0"/>
+              </a:spcAft>
+              <a:buClrTx/>
+              <a:buSzTx/>
+              <a:buFontTx/>
+              <a:buNone/>
+              <a:tabLst/>
+              <a:defRPr/>
+            </a:pPr>
+            <a:r>
+              <a:rPr lang="it-IT" noProof="0" dirty="0"/>
+              <a:t>Prototipazioni: </a:t>
+            </a:r>
+            <a:r>
+              <a:rPr lang="it-IT" dirty="0"/>
+              <a:t>nelle prima fasi di progetto, i pattern delle </a:t>
+            </a:r>
+            <a:r>
+              <a:rPr lang="it-IT" dirty="0" err="1"/>
+              <a:t>query</a:t>
+            </a:r>
+            <a:r>
+              <a:rPr lang="it-IT" dirty="0"/>
+              <a:t> possono cambiare frequentemente, con la conseguenza di dover riprogettare le famiglie di colonne. </a:t>
+            </a:r>
+            <a:r>
+              <a:rPr lang="it-IT" noProof="0" dirty="0"/>
+              <a:t>In Cassandra, the </a:t>
+            </a:r>
+            <a:r>
+              <a:rPr lang="it-IT" noProof="0" dirty="0" err="1"/>
+              <a:t>cost</a:t>
+            </a:r>
+            <a:r>
+              <a:rPr lang="it-IT" noProof="0" dirty="0"/>
+              <a:t> </a:t>
+            </a:r>
+            <a:r>
+              <a:rPr lang="it-IT" noProof="0" dirty="0" err="1"/>
+              <a:t>may</a:t>
+            </a:r>
+            <a:r>
+              <a:rPr lang="it-IT" noProof="0" dirty="0"/>
+              <a:t> be </a:t>
+            </a:r>
+            <a:r>
+              <a:rPr lang="it-IT" noProof="0" dirty="0" err="1"/>
+              <a:t>higher</a:t>
+            </a:r>
+            <a:r>
+              <a:rPr lang="it-IT" noProof="0" dirty="0"/>
+              <a:t> for </a:t>
+            </a:r>
+            <a:r>
+              <a:rPr lang="it-IT" noProof="0" dirty="0" err="1"/>
+              <a:t>query</a:t>
+            </a:r>
+            <a:r>
+              <a:rPr lang="it-IT" noProof="0" dirty="0"/>
+              <a:t> </a:t>
+            </a:r>
+            <a:r>
+              <a:rPr lang="it-IT" noProof="0" dirty="0" err="1"/>
+              <a:t>change</a:t>
+            </a:r>
+            <a:r>
+              <a:rPr lang="it-IT" noProof="0" dirty="0"/>
+              <a:t> </a:t>
+            </a:r>
+            <a:r>
+              <a:rPr lang="it-IT" noProof="0" dirty="0" err="1"/>
+              <a:t>as</a:t>
+            </a:r>
+            <a:r>
+              <a:rPr lang="it-IT" noProof="0" dirty="0"/>
+              <a:t> </a:t>
+            </a:r>
+            <a:r>
+              <a:rPr lang="it-IT" noProof="0" dirty="0" err="1"/>
+              <a:t>compared</a:t>
+            </a:r>
+            <a:r>
+              <a:rPr lang="it-IT" noProof="0" dirty="0"/>
+              <a:t> to schema </a:t>
+            </a:r>
+            <a:r>
+              <a:rPr lang="it-IT" noProof="0" dirty="0" err="1"/>
+              <a:t>change</a:t>
+            </a:r>
+            <a:r>
+              <a:rPr lang="it-IT" noProof="0" dirty="0"/>
               <a:t>.</a:t>
             </a:r>
-            <a:endParaRPr lang="it-IT" dirty="0"/>
           </a:p>
           <a:p>
             <a:endParaRPr lang="it-IT" dirty="0"/>
@@ -3484,7 +3416,7 @@
     </p:spTree>
     <p:extLst>
       <p:ext uri="{BB962C8B-B14F-4D97-AF65-F5344CB8AC3E}">
-        <p14:creationId xmlns:p14="http://schemas.microsoft.com/office/powerpoint/2010/main" val="4177316964"/>
+        <p14:creationId xmlns:p14="http://schemas.microsoft.com/office/powerpoint/2010/main" val="872742841"/>
       </p:ext>
     </p:extLst>
   </p:cSld>
@@ -3539,266 +3471,16 @@
           <a:lstStyle/>
           <a:p>
             <a:r>
-              <a:rPr lang="it-IT" sz="1200" b="0" i="0" u="none" strike="noStrike" kern="1200" baseline="0" dirty="0">
-                <a:solidFill>
-                  <a:schemeClr val="tx1"/>
-                </a:solidFill>
-                <a:latin typeface="+mn-lt"/>
-                <a:ea typeface="+mn-ea"/>
-                <a:cs typeface="+mn-cs"/>
-              </a:rPr>
-              <a:t>Ogni </a:t>
-            </a:r>
-            <a:r>
-              <a:rPr lang="it-IT" sz="1200" b="0" i="0" u="none" strike="noStrike" kern="1200" baseline="0" dirty="0" err="1">
-                <a:solidFill>
-                  <a:schemeClr val="tx1"/>
-                </a:solidFill>
-                <a:latin typeface="+mn-lt"/>
-                <a:ea typeface="+mn-ea"/>
-                <a:cs typeface="+mn-cs"/>
-              </a:rPr>
-              <a:t>db</a:t>
-            </a:r>
-            <a:r>
-              <a:rPr lang="it-IT" sz="1200" b="0" i="0" u="none" strike="noStrike" kern="1200" baseline="0" dirty="0">
-                <a:solidFill>
-                  <a:schemeClr val="tx1"/>
-                </a:solidFill>
-                <a:latin typeface="+mn-lt"/>
-                <a:ea typeface="+mn-ea"/>
-                <a:cs typeface="+mn-cs"/>
-              </a:rPr>
-              <a:t> dovrebbe essere «Incorporato» all’interno dei </a:t>
-            </a:r>
-            <a:r>
-              <a:rPr lang="it-IT" sz="1200" b="0" i="0" u="none" strike="noStrike" kern="1200" baseline="0" dirty="0" err="1">
-                <a:solidFill>
-                  <a:schemeClr val="tx1"/>
-                </a:solidFill>
-                <a:latin typeface="+mn-lt"/>
-                <a:ea typeface="+mn-ea"/>
-                <a:cs typeface="+mn-cs"/>
-              </a:rPr>
-              <a:t>serivizi</a:t>
-            </a:r>
-            <a:r>
-              <a:rPr lang="it-IT" sz="1200" b="0" i="0" u="none" strike="noStrike" kern="1200" baseline="0" dirty="0">
-                <a:solidFill>
-                  <a:schemeClr val="tx1"/>
-                </a:solidFill>
-                <a:latin typeface="+mn-lt"/>
-                <a:ea typeface="+mn-ea"/>
-                <a:cs typeface="+mn-cs"/>
-              </a:rPr>
-              <a:t>. I servizi offrono API per consentire accesso e manipolazione dei dati. Se la soluzione corrente non può essere modificata, i sistemi </a:t>
-            </a:r>
-            <a:r>
-              <a:rPr lang="it-IT" sz="1200" b="0" i="0" u="none" strike="noStrike" kern="1200" baseline="0" dirty="0" err="1">
-                <a:solidFill>
-                  <a:schemeClr val="tx1"/>
-                </a:solidFill>
-                <a:latin typeface="+mn-lt"/>
-                <a:ea typeface="+mn-ea"/>
-                <a:cs typeface="+mn-cs"/>
-              </a:rPr>
-              <a:t>NoSQL</a:t>
-            </a:r>
-            <a:r>
-              <a:rPr lang="it-IT" sz="1200" b="0" i="0" u="none" strike="noStrike" kern="1200" baseline="0" dirty="0">
-                <a:solidFill>
-                  <a:schemeClr val="tx1"/>
-                </a:solidFill>
-                <a:latin typeface="+mn-lt"/>
-                <a:ea typeface="+mn-ea"/>
-                <a:cs typeface="+mn-cs"/>
-              </a:rPr>
-              <a:t> possono supportarla.</a:t>
-            </a:r>
-          </a:p>
-          <a:p>
-            <a:endParaRPr lang="it-IT" sz="1200" b="0" i="0" u="none" strike="noStrike" kern="1200" baseline="0" dirty="0">
-              <a:solidFill>
-                <a:schemeClr val="tx1"/>
-              </a:solidFill>
-              <a:latin typeface="+mn-lt"/>
-              <a:ea typeface="+mn-ea"/>
-              <a:cs typeface="+mn-cs"/>
-            </a:endParaRPr>
-          </a:p>
-          <a:p>
-            <a:r>
-              <a:rPr lang="it-IT" sz="1200" b="0" i="0" u="none" strike="noStrike" kern="1200" baseline="0" dirty="0">
-                <a:solidFill>
-                  <a:schemeClr val="tx1"/>
-                </a:solidFill>
-                <a:latin typeface="+mn-lt"/>
-                <a:ea typeface="+mn-ea"/>
-                <a:cs typeface="+mn-cs"/>
-              </a:rPr>
-              <a:t>A key-</a:t>
-            </a:r>
-            <a:r>
-              <a:rPr lang="it-IT" sz="1200" b="0" i="0" u="none" strike="noStrike" kern="1200" baseline="0" dirty="0" err="1">
-                <a:solidFill>
-                  <a:schemeClr val="tx1"/>
-                </a:solidFill>
-                <a:latin typeface="+mn-lt"/>
-                <a:ea typeface="+mn-ea"/>
-                <a:cs typeface="+mn-cs"/>
-              </a:rPr>
-              <a:t>value</a:t>
-            </a:r>
-            <a:r>
-              <a:rPr lang="it-IT" sz="1200" b="0" i="0" u="none" strike="noStrike" kern="1200" baseline="0" dirty="0">
-                <a:solidFill>
-                  <a:schemeClr val="tx1"/>
-                </a:solidFill>
-                <a:latin typeface="+mn-lt"/>
-                <a:ea typeface="+mn-ea"/>
-                <a:cs typeface="+mn-cs"/>
-              </a:rPr>
-              <a:t> data </a:t>
-            </a:r>
-            <a:r>
-              <a:rPr lang="en-US" sz="1200" b="0" i="0" u="none" strike="noStrike" kern="1200" baseline="0" dirty="0">
-                <a:solidFill>
-                  <a:schemeClr val="tx1"/>
-                </a:solidFill>
-                <a:latin typeface="+mn-lt"/>
-                <a:ea typeface="+mn-ea"/>
-                <a:cs typeface="+mn-cs"/>
-              </a:rPr>
-              <a:t>store could be used to store the shopping cart data before the order is confirmed by the customer and also store the session data so that the RDBMS is not used for this transient data. Key-value stores make sense here since the shopping cart is usually accessed by user ID and, once confirmed and paid by the customer, can be saved in the RDBMS. Similarly, session data is keyed by the session ID. If we need to recommend products to customers when they place products into their shopping carts—for example, “ your friends also bought these products” or “ your friends bought these accessories for this product”—then introducing a graph data store in the mix becomes relevant.</a:t>
-            </a:r>
-          </a:p>
-          <a:p>
-            <a:endParaRPr lang="en-US" sz="1200" b="0" i="0" u="none" strike="noStrike" kern="1200" baseline="0" dirty="0">
-              <a:solidFill>
-                <a:schemeClr val="tx1"/>
-              </a:solidFill>
-              <a:latin typeface="+mn-lt"/>
-              <a:ea typeface="+mn-ea"/>
-              <a:cs typeface="+mn-cs"/>
-            </a:endParaRPr>
-          </a:p>
-          <a:p>
-            <a:r>
-              <a:rPr lang="en-US" sz="1200" b="0" i="0" u="none" strike="noStrike" kern="1200" baseline="0" dirty="0">
-                <a:solidFill>
-                  <a:schemeClr val="tx1"/>
-                </a:solidFill>
-                <a:latin typeface="+mn-lt"/>
-                <a:ea typeface="+mn-ea"/>
-                <a:cs typeface="+mn-cs"/>
-              </a:rPr>
-              <a:t>Even using specialized relational databases for different purposes, such as data warehousing appliances or analytics appliances within the same application, can be </a:t>
-            </a:r>
-            <a:r>
-              <a:rPr lang="it-IT" sz="1200" b="0" i="0" u="none" strike="noStrike" kern="1200" baseline="0" dirty="0" err="1">
-                <a:solidFill>
-                  <a:schemeClr val="tx1"/>
-                </a:solidFill>
-                <a:latin typeface="+mn-lt"/>
-                <a:ea typeface="+mn-ea"/>
-                <a:cs typeface="+mn-cs"/>
-              </a:rPr>
-              <a:t>viewed</a:t>
-            </a:r>
-            <a:r>
-              <a:rPr lang="it-IT" sz="1200" b="0" i="0" u="none" strike="noStrike" kern="1200" baseline="0" dirty="0">
-                <a:solidFill>
-                  <a:schemeClr val="tx1"/>
-                </a:solidFill>
-                <a:latin typeface="+mn-lt"/>
-                <a:ea typeface="+mn-ea"/>
-                <a:cs typeface="+mn-cs"/>
-              </a:rPr>
-              <a:t> </a:t>
-            </a:r>
-            <a:r>
-              <a:rPr lang="it-IT" sz="1200" b="0" i="0" u="none" strike="noStrike" kern="1200" baseline="0" dirty="0" err="1">
-                <a:solidFill>
-                  <a:schemeClr val="tx1"/>
-                </a:solidFill>
-                <a:latin typeface="+mn-lt"/>
-                <a:ea typeface="+mn-ea"/>
-                <a:cs typeface="+mn-cs"/>
-              </a:rPr>
-              <a:t>as</a:t>
-            </a:r>
-            <a:r>
-              <a:rPr lang="it-IT" sz="1200" b="0" i="0" u="none" strike="noStrike" kern="1200" baseline="0" dirty="0">
-                <a:solidFill>
-                  <a:schemeClr val="tx1"/>
-                </a:solidFill>
-                <a:latin typeface="+mn-lt"/>
-                <a:ea typeface="+mn-ea"/>
-                <a:cs typeface="+mn-cs"/>
-              </a:rPr>
-              <a:t> </a:t>
-            </a:r>
-            <a:r>
-              <a:rPr lang="it-IT" sz="1200" b="0" i="0" u="none" strike="noStrike" kern="1200" baseline="0" dirty="0" err="1">
-                <a:solidFill>
-                  <a:schemeClr val="tx1"/>
-                </a:solidFill>
-                <a:latin typeface="+mn-lt"/>
-                <a:ea typeface="+mn-ea"/>
-                <a:cs typeface="+mn-cs"/>
-              </a:rPr>
-              <a:t>polyglot</a:t>
-            </a:r>
-            <a:r>
-              <a:rPr lang="it-IT" sz="1200" b="0" i="0" u="none" strike="noStrike" kern="1200" baseline="0" dirty="0">
-                <a:solidFill>
-                  <a:schemeClr val="tx1"/>
-                </a:solidFill>
-                <a:latin typeface="+mn-lt"/>
-                <a:ea typeface="+mn-ea"/>
-                <a:cs typeface="+mn-cs"/>
-              </a:rPr>
-              <a:t> </a:t>
-            </a:r>
-            <a:r>
-              <a:rPr lang="it-IT" sz="1200" b="0" i="0" u="none" strike="noStrike" kern="1200" baseline="0" dirty="0" err="1">
-                <a:solidFill>
-                  <a:schemeClr val="tx1"/>
-                </a:solidFill>
-                <a:latin typeface="+mn-lt"/>
-                <a:ea typeface="+mn-ea"/>
-                <a:cs typeface="+mn-cs"/>
-              </a:rPr>
-              <a:t>persistence</a:t>
-            </a:r>
-            <a:endParaRPr lang="en-US" sz="1200" b="0" i="0" u="none" strike="noStrike" kern="1200" baseline="0" dirty="0">
-              <a:solidFill>
-                <a:schemeClr val="tx1"/>
-              </a:solidFill>
-              <a:latin typeface="+mn-lt"/>
-              <a:ea typeface="+mn-ea"/>
-              <a:cs typeface="+mn-cs"/>
-            </a:endParaRPr>
-          </a:p>
-          <a:p>
-            <a:endParaRPr lang="en-US" sz="1200" b="0" i="0" u="none" strike="noStrike" kern="1200" baseline="0" dirty="0">
-              <a:solidFill>
-                <a:schemeClr val="tx1"/>
-              </a:solidFill>
-              <a:latin typeface="+mn-lt"/>
-              <a:ea typeface="+mn-ea"/>
-              <a:cs typeface="+mn-cs"/>
-            </a:endParaRPr>
-          </a:p>
-          <a:p>
-            <a:endParaRPr lang="it-IT" dirty="0"/>
+              <a:rPr lang="en-US" dirty="0"/>
+              <a:t>https://developer.ibm.com/dwblog/2017/detecting-complex-fraud-real-time-graph-databases/</a:t>
+            </a:r>
           </a:p>
         </p:txBody>
       </p:sp>
     </p:spTree>
     <p:extLst>
       <p:ext uri="{BB962C8B-B14F-4D97-AF65-F5344CB8AC3E}">
-        <p14:creationId xmlns:p14="http://schemas.microsoft.com/office/powerpoint/2010/main" val="3609248034"/>
+        <p14:creationId xmlns:p14="http://schemas.microsoft.com/office/powerpoint/2010/main" val="2486013967"/>
       </p:ext>
     </p:extLst>
   </p:cSld>
@@ -3852,17 +3534,14 @@
           <a:bodyPr/>
           <a:lstStyle/>
           <a:p>
-            <a:r>
-              <a:rPr lang="it-IT" dirty="0"/>
-              <a:t>I join sono scoraggiati</a:t>
-            </a:r>
+            <a:endParaRPr lang="it-IT" dirty="0"/>
           </a:p>
         </p:txBody>
       </p:sp>
     </p:spTree>
     <p:extLst>
       <p:ext uri="{BB962C8B-B14F-4D97-AF65-F5344CB8AC3E}">
-        <p14:creationId xmlns:p14="http://schemas.microsoft.com/office/powerpoint/2010/main" val="3434853798"/>
+        <p14:creationId xmlns:p14="http://schemas.microsoft.com/office/powerpoint/2010/main" val="1821397854"/>
       </p:ext>
     </p:extLst>
   </p:cSld>
@@ -3923,7 +3602,7 @@
     </p:spTree>
     <p:extLst>
       <p:ext uri="{BB962C8B-B14F-4D97-AF65-F5344CB8AC3E}">
-        <p14:creationId xmlns:p14="http://schemas.microsoft.com/office/powerpoint/2010/main" val="3461734294"/>
+        <p14:creationId xmlns:p14="http://schemas.microsoft.com/office/powerpoint/2010/main" val="2158725968"/>
       </p:ext>
     </p:extLst>
   </p:cSld>
@@ -3978,6 +3657,615 @@
           <a:lstStyle/>
           <a:p>
             <a:r>
+              <a:rPr lang="en-US" dirty="0" err="1"/>
+              <a:t>Termine</a:t>
+            </a:r>
+            <a:r>
+              <a:rPr lang="en-US" dirty="0"/>
+              <a:t> </a:t>
+            </a:r>
+            <a:r>
+              <a:rPr lang="en-US" dirty="0" err="1"/>
+              <a:t>derivato</a:t>
+            </a:r>
+            <a:r>
+              <a:rPr lang="en-US" dirty="0"/>
+              <a:t> da "</a:t>
+            </a:r>
+            <a:r>
+              <a:rPr lang="en-US" dirty="0" err="1"/>
+              <a:t>programmazione</a:t>
+            </a:r>
+            <a:r>
+              <a:rPr lang="en-US" dirty="0"/>
+              <a:t> </a:t>
+            </a:r>
+            <a:r>
+              <a:rPr lang="en-US" dirty="0" err="1"/>
+              <a:t>poliglotta</a:t>
+            </a:r>
+            <a:r>
+              <a:rPr lang="en-US" dirty="0"/>
+              <a:t>"</a:t>
+            </a:r>
+          </a:p>
+        </p:txBody>
+      </p:sp>
+    </p:spTree>
+    <p:extLst>
+      <p:ext uri="{BB962C8B-B14F-4D97-AF65-F5344CB8AC3E}">
+        <p14:creationId xmlns:p14="http://schemas.microsoft.com/office/powerpoint/2010/main" val="1735169948"/>
+      </p:ext>
+    </p:extLst>
+  </p:cSld>
+  <p:clrMapOvr>
+    <a:masterClrMapping/>
+  </p:clrMapOvr>
+</p:notes>
+</file>
+
+<file path=ppt/notesSlides/notesSlide42.xml><?xml version="1.0" encoding="utf-8"?>
+<p:notes xmlns:a="http://schemas.openxmlformats.org/drawingml/2006/main" xmlns:r="http://schemas.openxmlformats.org/officeDocument/2006/relationships" xmlns:p="http://schemas.openxmlformats.org/presentationml/2006/main">
+  <p:cSld>
+    <p:spTree>
+      <p:nvGrpSpPr>
+        <p:cNvPr id="1" name=""/>
+        <p:cNvGrpSpPr/>
+        <p:nvPr/>
+      </p:nvGrpSpPr>
+      <p:grpSpPr>
+        <a:xfrm>
+          <a:off x="0" y="0"/>
+          <a:ext cx="0" cy="0"/>
+          <a:chOff x="0" y="0"/>
+          <a:chExt cx="0" cy="0"/>
+        </a:xfrm>
+      </p:grpSpPr>
+      <p:sp>
+        <p:nvSpPr>
+          <p:cNvPr id="2" name="Segnaposto immagine diapositiva 1"/>
+          <p:cNvSpPr>
+            <a:spLocks noGrp="1" noRot="1" noChangeAspect="1"/>
+          </p:cNvSpPr>
+          <p:nvPr>
+            <p:ph type="sldImg"/>
+          </p:nvPr>
+        </p:nvSpPr>
+        <p:spPr/>
+      </p:sp>
+      <p:sp>
+        <p:nvSpPr>
+          <p:cNvPr id="3" name="Segnaposto note 2"/>
+          <p:cNvSpPr>
+            <a:spLocks noGrp="1"/>
+          </p:cNvSpPr>
+          <p:nvPr>
+            <p:ph type="body" idx="1"/>
+          </p:nvPr>
+        </p:nvSpPr>
+        <p:spPr/>
+        <p:txBody>
+          <a:bodyPr/>
+          <a:lstStyle/>
+          <a:p>
+            <a:r>
+              <a:rPr lang="en-US" sz="1200" b="0" i="0" u="none" strike="noStrike" kern="1200" baseline="0" dirty="0">
+                <a:solidFill>
+                  <a:schemeClr val="tx1"/>
+                </a:solidFill>
+                <a:latin typeface="+mn-lt"/>
+                <a:ea typeface="+mn-ea"/>
+                <a:cs typeface="+mn-cs"/>
+              </a:rPr>
+              <a:t>The session, shopping cart, or order data do not need the same properties of availability, consistency, or backup requirements. Does session management storage need the same rigorous backup/recovery strategy as the e-commerce orders data? Does the session management storage need more availability of an instance of database engine to write/read session data?</a:t>
+            </a:r>
+          </a:p>
+          <a:p>
+            <a:endParaRPr lang="en-US" sz="1200" b="0" i="0" u="none" strike="noStrike" kern="1200" baseline="0" dirty="0">
+              <a:solidFill>
+                <a:schemeClr val="tx1"/>
+              </a:solidFill>
+              <a:latin typeface="+mn-lt"/>
+              <a:ea typeface="+mn-ea"/>
+              <a:cs typeface="+mn-cs"/>
+            </a:endParaRPr>
+          </a:p>
+          <a:p>
+            <a:r>
+              <a:rPr lang="en-US" sz="1200" b="0" i="0" u="none" strike="noStrike" kern="1200" baseline="0" dirty="0">
+                <a:solidFill>
+                  <a:schemeClr val="tx1"/>
+                </a:solidFill>
+                <a:latin typeface="+mn-lt"/>
+                <a:ea typeface="+mn-ea"/>
+                <a:cs typeface="+mn-cs"/>
+              </a:rPr>
+              <a:t>In 2006, Neal Ford coined the term </a:t>
+            </a:r>
+            <a:r>
+              <a:rPr lang="en-US" sz="1200" b="1" i="0" u="none" strike="noStrike" kern="1200" baseline="0" dirty="0">
+                <a:solidFill>
+                  <a:schemeClr val="tx1"/>
+                </a:solidFill>
+                <a:latin typeface="+mn-lt"/>
+                <a:ea typeface="+mn-ea"/>
+                <a:cs typeface="+mn-cs"/>
+              </a:rPr>
+              <a:t>polyglot programming</a:t>
+            </a:r>
+            <a:r>
+              <a:rPr lang="en-US" sz="1200" b="0" i="0" u="none" strike="noStrike" kern="1200" baseline="0" dirty="0">
+                <a:solidFill>
+                  <a:schemeClr val="tx1"/>
+                </a:solidFill>
+                <a:latin typeface="+mn-lt"/>
+                <a:ea typeface="+mn-ea"/>
+                <a:cs typeface="+mn-cs"/>
+              </a:rPr>
+              <a:t>, to express the idea that applications should be written in a mix of languages to take advantage of the fact that different languages are suitable for tackling different problems. Complex applications combine different types of problems, so picking the right language for each job may be more productive than trying to fit all aspects into a single </a:t>
+            </a:r>
+            <a:r>
+              <a:rPr lang="it-IT" sz="1200" b="0" i="0" u="none" strike="noStrike" kern="1200" baseline="0" dirty="0" err="1">
+                <a:solidFill>
+                  <a:schemeClr val="tx1"/>
+                </a:solidFill>
+                <a:latin typeface="+mn-lt"/>
+                <a:ea typeface="+mn-ea"/>
+                <a:cs typeface="+mn-cs"/>
+              </a:rPr>
+              <a:t>language</a:t>
+            </a:r>
+            <a:r>
+              <a:rPr lang="it-IT" sz="1200" b="0" i="0" u="none" strike="noStrike" kern="1200" baseline="0" dirty="0">
+                <a:solidFill>
+                  <a:schemeClr val="tx1"/>
+                </a:solidFill>
+                <a:latin typeface="+mn-lt"/>
+                <a:ea typeface="+mn-ea"/>
+                <a:cs typeface="+mn-cs"/>
+              </a:rPr>
+              <a:t>.</a:t>
+            </a:r>
+            <a:endParaRPr lang="it-IT" dirty="0"/>
+          </a:p>
+          <a:p>
+            <a:endParaRPr lang="it-IT" dirty="0"/>
+          </a:p>
+        </p:txBody>
+      </p:sp>
+    </p:spTree>
+    <p:extLst>
+      <p:ext uri="{BB962C8B-B14F-4D97-AF65-F5344CB8AC3E}">
+        <p14:creationId xmlns:p14="http://schemas.microsoft.com/office/powerpoint/2010/main" val="4177316964"/>
+      </p:ext>
+    </p:extLst>
+  </p:cSld>
+  <p:clrMapOvr>
+    <a:masterClrMapping/>
+  </p:clrMapOvr>
+</p:notes>
+</file>
+
+<file path=ppt/notesSlides/notesSlide43.xml><?xml version="1.0" encoding="utf-8"?>
+<p:notes xmlns:a="http://schemas.openxmlformats.org/drawingml/2006/main" xmlns:r="http://schemas.openxmlformats.org/officeDocument/2006/relationships" xmlns:p="http://schemas.openxmlformats.org/presentationml/2006/main">
+  <p:cSld>
+    <p:spTree>
+      <p:nvGrpSpPr>
+        <p:cNvPr id="1" name=""/>
+        <p:cNvGrpSpPr/>
+        <p:nvPr/>
+      </p:nvGrpSpPr>
+      <p:grpSpPr>
+        <a:xfrm>
+          <a:off x="0" y="0"/>
+          <a:ext cx="0" cy="0"/>
+          <a:chOff x="0" y="0"/>
+          <a:chExt cx="0" cy="0"/>
+        </a:xfrm>
+      </p:grpSpPr>
+      <p:sp>
+        <p:nvSpPr>
+          <p:cNvPr id="2" name="Segnaposto immagine diapositiva 1"/>
+          <p:cNvSpPr>
+            <a:spLocks noGrp="1" noRot="1" noChangeAspect="1"/>
+          </p:cNvSpPr>
+          <p:nvPr>
+            <p:ph type="sldImg"/>
+          </p:nvPr>
+        </p:nvSpPr>
+        <p:spPr/>
+      </p:sp>
+      <p:sp>
+        <p:nvSpPr>
+          <p:cNvPr id="3" name="Segnaposto note 2"/>
+          <p:cNvSpPr>
+            <a:spLocks noGrp="1"/>
+          </p:cNvSpPr>
+          <p:nvPr>
+            <p:ph type="body" idx="1"/>
+          </p:nvPr>
+        </p:nvSpPr>
+        <p:spPr/>
+        <p:txBody>
+          <a:bodyPr/>
+          <a:lstStyle/>
+          <a:p>
+            <a:r>
+              <a:rPr lang="it-IT" sz="1200" b="0" i="0" u="none" strike="noStrike" kern="1200" baseline="0" dirty="0">
+                <a:solidFill>
+                  <a:schemeClr val="tx1"/>
+                </a:solidFill>
+                <a:latin typeface="+mn-lt"/>
+                <a:ea typeface="+mn-ea"/>
+                <a:cs typeface="+mn-cs"/>
+              </a:rPr>
+              <a:t>Ogni </a:t>
+            </a:r>
+            <a:r>
+              <a:rPr lang="it-IT" sz="1200" b="0" i="0" u="none" strike="noStrike" kern="1200" baseline="0" dirty="0" err="1">
+                <a:solidFill>
+                  <a:schemeClr val="tx1"/>
+                </a:solidFill>
+                <a:latin typeface="+mn-lt"/>
+                <a:ea typeface="+mn-ea"/>
+                <a:cs typeface="+mn-cs"/>
+              </a:rPr>
+              <a:t>db</a:t>
+            </a:r>
+            <a:r>
+              <a:rPr lang="it-IT" sz="1200" b="0" i="0" u="none" strike="noStrike" kern="1200" baseline="0" dirty="0">
+                <a:solidFill>
+                  <a:schemeClr val="tx1"/>
+                </a:solidFill>
+                <a:latin typeface="+mn-lt"/>
+                <a:ea typeface="+mn-ea"/>
+                <a:cs typeface="+mn-cs"/>
+              </a:rPr>
+              <a:t> dovrebbe essere «Incorporato» all’interno dei </a:t>
+            </a:r>
+            <a:r>
+              <a:rPr lang="it-IT" sz="1200" b="0" i="0" u="none" strike="noStrike" kern="1200" baseline="0" dirty="0" err="1">
+                <a:solidFill>
+                  <a:schemeClr val="tx1"/>
+                </a:solidFill>
+                <a:latin typeface="+mn-lt"/>
+                <a:ea typeface="+mn-ea"/>
+                <a:cs typeface="+mn-cs"/>
+              </a:rPr>
+              <a:t>serivizi</a:t>
+            </a:r>
+            <a:r>
+              <a:rPr lang="it-IT" sz="1200" b="0" i="0" u="none" strike="noStrike" kern="1200" baseline="0" dirty="0">
+                <a:solidFill>
+                  <a:schemeClr val="tx1"/>
+                </a:solidFill>
+                <a:latin typeface="+mn-lt"/>
+                <a:ea typeface="+mn-ea"/>
+                <a:cs typeface="+mn-cs"/>
+              </a:rPr>
+              <a:t>. I servizi offrono API per consentire accesso e manipolazione dei dati. Se la soluzione corrente non può essere modificata, i sistemi </a:t>
+            </a:r>
+            <a:r>
+              <a:rPr lang="it-IT" sz="1200" b="0" i="0" u="none" strike="noStrike" kern="1200" baseline="0" dirty="0" err="1">
+                <a:solidFill>
+                  <a:schemeClr val="tx1"/>
+                </a:solidFill>
+                <a:latin typeface="+mn-lt"/>
+                <a:ea typeface="+mn-ea"/>
+                <a:cs typeface="+mn-cs"/>
+              </a:rPr>
+              <a:t>NoSQL</a:t>
+            </a:r>
+            <a:r>
+              <a:rPr lang="it-IT" sz="1200" b="0" i="0" u="none" strike="noStrike" kern="1200" baseline="0" dirty="0">
+                <a:solidFill>
+                  <a:schemeClr val="tx1"/>
+                </a:solidFill>
+                <a:latin typeface="+mn-lt"/>
+                <a:ea typeface="+mn-ea"/>
+                <a:cs typeface="+mn-cs"/>
+              </a:rPr>
+              <a:t> possono supportarla.</a:t>
+            </a:r>
+          </a:p>
+          <a:p>
+            <a:endParaRPr lang="it-IT" sz="1200" b="0" i="0" u="none" strike="noStrike" kern="1200" baseline="0" dirty="0">
+              <a:solidFill>
+                <a:schemeClr val="tx1"/>
+              </a:solidFill>
+              <a:latin typeface="+mn-lt"/>
+              <a:ea typeface="+mn-ea"/>
+              <a:cs typeface="+mn-cs"/>
+            </a:endParaRPr>
+          </a:p>
+          <a:p>
+            <a:r>
+              <a:rPr lang="it-IT" sz="1200" b="0" i="0" u="none" strike="noStrike" kern="1200" baseline="0" dirty="0">
+                <a:solidFill>
+                  <a:schemeClr val="tx1"/>
+                </a:solidFill>
+                <a:latin typeface="+mn-lt"/>
+                <a:ea typeface="+mn-ea"/>
+                <a:cs typeface="+mn-cs"/>
+              </a:rPr>
+              <a:t>A key-</a:t>
+            </a:r>
+            <a:r>
+              <a:rPr lang="it-IT" sz="1200" b="0" i="0" u="none" strike="noStrike" kern="1200" baseline="0" dirty="0" err="1">
+                <a:solidFill>
+                  <a:schemeClr val="tx1"/>
+                </a:solidFill>
+                <a:latin typeface="+mn-lt"/>
+                <a:ea typeface="+mn-ea"/>
+                <a:cs typeface="+mn-cs"/>
+              </a:rPr>
+              <a:t>value</a:t>
+            </a:r>
+            <a:r>
+              <a:rPr lang="it-IT" sz="1200" b="0" i="0" u="none" strike="noStrike" kern="1200" baseline="0" dirty="0">
+                <a:solidFill>
+                  <a:schemeClr val="tx1"/>
+                </a:solidFill>
+                <a:latin typeface="+mn-lt"/>
+                <a:ea typeface="+mn-ea"/>
+                <a:cs typeface="+mn-cs"/>
+              </a:rPr>
+              <a:t> data </a:t>
+            </a:r>
+            <a:r>
+              <a:rPr lang="en-US" sz="1200" b="0" i="0" u="none" strike="noStrike" kern="1200" baseline="0" dirty="0">
+                <a:solidFill>
+                  <a:schemeClr val="tx1"/>
+                </a:solidFill>
+                <a:latin typeface="+mn-lt"/>
+                <a:ea typeface="+mn-ea"/>
+                <a:cs typeface="+mn-cs"/>
+              </a:rPr>
+              <a:t>store could be used to store the shopping cart data before the order is confirmed by the customer and also store the session data so that the RDBMS is not used for this transient data. Key-value stores make sense here since the shopping cart is usually accessed by user ID and, once confirmed and paid by the customer, can be saved in the RDBMS. Similarly, session data is keyed by the session ID. If we need to recommend products to customers when they place products into their shopping carts—for example, “ your friends also bought these products” or “ your friends bought these accessories for this product”—then introducing a graph data store in the mix becomes relevant.</a:t>
+            </a:r>
+          </a:p>
+          <a:p>
+            <a:endParaRPr lang="en-US" sz="1200" b="0" i="0" u="none" strike="noStrike" kern="1200" baseline="0" dirty="0">
+              <a:solidFill>
+                <a:schemeClr val="tx1"/>
+              </a:solidFill>
+              <a:latin typeface="+mn-lt"/>
+              <a:ea typeface="+mn-ea"/>
+              <a:cs typeface="+mn-cs"/>
+            </a:endParaRPr>
+          </a:p>
+          <a:p>
+            <a:r>
+              <a:rPr lang="en-US" sz="1200" b="0" i="0" u="none" strike="noStrike" kern="1200" baseline="0" dirty="0">
+                <a:solidFill>
+                  <a:schemeClr val="tx1"/>
+                </a:solidFill>
+                <a:latin typeface="+mn-lt"/>
+                <a:ea typeface="+mn-ea"/>
+                <a:cs typeface="+mn-cs"/>
+              </a:rPr>
+              <a:t>Even using specialized relational databases for different purposes, such as data warehousing appliances or analytics appliances within the same application, can be </a:t>
+            </a:r>
+            <a:r>
+              <a:rPr lang="it-IT" sz="1200" b="0" i="0" u="none" strike="noStrike" kern="1200" baseline="0" dirty="0" err="1">
+                <a:solidFill>
+                  <a:schemeClr val="tx1"/>
+                </a:solidFill>
+                <a:latin typeface="+mn-lt"/>
+                <a:ea typeface="+mn-ea"/>
+                <a:cs typeface="+mn-cs"/>
+              </a:rPr>
+              <a:t>viewed</a:t>
+            </a:r>
+            <a:r>
+              <a:rPr lang="it-IT" sz="1200" b="0" i="0" u="none" strike="noStrike" kern="1200" baseline="0" dirty="0">
+                <a:solidFill>
+                  <a:schemeClr val="tx1"/>
+                </a:solidFill>
+                <a:latin typeface="+mn-lt"/>
+                <a:ea typeface="+mn-ea"/>
+                <a:cs typeface="+mn-cs"/>
+              </a:rPr>
+              <a:t> </a:t>
+            </a:r>
+            <a:r>
+              <a:rPr lang="it-IT" sz="1200" b="0" i="0" u="none" strike="noStrike" kern="1200" baseline="0" dirty="0" err="1">
+                <a:solidFill>
+                  <a:schemeClr val="tx1"/>
+                </a:solidFill>
+                <a:latin typeface="+mn-lt"/>
+                <a:ea typeface="+mn-ea"/>
+                <a:cs typeface="+mn-cs"/>
+              </a:rPr>
+              <a:t>as</a:t>
+            </a:r>
+            <a:r>
+              <a:rPr lang="it-IT" sz="1200" b="0" i="0" u="none" strike="noStrike" kern="1200" baseline="0" dirty="0">
+                <a:solidFill>
+                  <a:schemeClr val="tx1"/>
+                </a:solidFill>
+                <a:latin typeface="+mn-lt"/>
+                <a:ea typeface="+mn-ea"/>
+                <a:cs typeface="+mn-cs"/>
+              </a:rPr>
+              <a:t> </a:t>
+            </a:r>
+            <a:r>
+              <a:rPr lang="it-IT" sz="1200" b="0" i="0" u="none" strike="noStrike" kern="1200" baseline="0" dirty="0" err="1">
+                <a:solidFill>
+                  <a:schemeClr val="tx1"/>
+                </a:solidFill>
+                <a:latin typeface="+mn-lt"/>
+                <a:ea typeface="+mn-ea"/>
+                <a:cs typeface="+mn-cs"/>
+              </a:rPr>
+              <a:t>polyglot</a:t>
+            </a:r>
+            <a:r>
+              <a:rPr lang="it-IT" sz="1200" b="0" i="0" u="none" strike="noStrike" kern="1200" baseline="0" dirty="0">
+                <a:solidFill>
+                  <a:schemeClr val="tx1"/>
+                </a:solidFill>
+                <a:latin typeface="+mn-lt"/>
+                <a:ea typeface="+mn-ea"/>
+                <a:cs typeface="+mn-cs"/>
+              </a:rPr>
+              <a:t> </a:t>
+            </a:r>
+            <a:r>
+              <a:rPr lang="it-IT" sz="1200" b="0" i="0" u="none" strike="noStrike" kern="1200" baseline="0" dirty="0" err="1">
+                <a:solidFill>
+                  <a:schemeClr val="tx1"/>
+                </a:solidFill>
+                <a:latin typeface="+mn-lt"/>
+                <a:ea typeface="+mn-ea"/>
+                <a:cs typeface="+mn-cs"/>
+              </a:rPr>
+              <a:t>persistence</a:t>
+            </a:r>
+            <a:endParaRPr lang="en-US" sz="1200" b="0" i="0" u="none" strike="noStrike" kern="1200" baseline="0" dirty="0">
+              <a:solidFill>
+                <a:schemeClr val="tx1"/>
+              </a:solidFill>
+              <a:latin typeface="+mn-lt"/>
+              <a:ea typeface="+mn-ea"/>
+              <a:cs typeface="+mn-cs"/>
+            </a:endParaRPr>
+          </a:p>
+          <a:p>
+            <a:endParaRPr lang="en-US" sz="1200" b="0" i="0" u="none" strike="noStrike" kern="1200" baseline="0" dirty="0">
+              <a:solidFill>
+                <a:schemeClr val="tx1"/>
+              </a:solidFill>
+              <a:latin typeface="+mn-lt"/>
+              <a:ea typeface="+mn-ea"/>
+              <a:cs typeface="+mn-cs"/>
+            </a:endParaRPr>
+          </a:p>
+          <a:p>
+            <a:endParaRPr lang="it-IT" dirty="0"/>
+          </a:p>
+        </p:txBody>
+      </p:sp>
+    </p:spTree>
+    <p:extLst>
+      <p:ext uri="{BB962C8B-B14F-4D97-AF65-F5344CB8AC3E}">
+        <p14:creationId xmlns:p14="http://schemas.microsoft.com/office/powerpoint/2010/main" val="3609248034"/>
+      </p:ext>
+    </p:extLst>
+  </p:cSld>
+  <p:clrMapOvr>
+    <a:masterClrMapping/>
+  </p:clrMapOvr>
+</p:notes>
+</file>
+
+<file path=ppt/notesSlides/notesSlide44.xml><?xml version="1.0" encoding="utf-8"?>
+<p:notes xmlns:a="http://schemas.openxmlformats.org/drawingml/2006/main" xmlns:r="http://schemas.openxmlformats.org/officeDocument/2006/relationships" xmlns:p="http://schemas.openxmlformats.org/presentationml/2006/main">
+  <p:cSld>
+    <p:spTree>
+      <p:nvGrpSpPr>
+        <p:cNvPr id="1" name=""/>
+        <p:cNvGrpSpPr/>
+        <p:nvPr/>
+      </p:nvGrpSpPr>
+      <p:grpSpPr>
+        <a:xfrm>
+          <a:off x="0" y="0"/>
+          <a:ext cx="0" cy="0"/>
+          <a:chOff x="0" y="0"/>
+          <a:chExt cx="0" cy="0"/>
+        </a:xfrm>
+      </p:grpSpPr>
+      <p:sp>
+        <p:nvSpPr>
+          <p:cNvPr id="2" name="Segnaposto immagine diapositiva 1"/>
+          <p:cNvSpPr>
+            <a:spLocks noGrp="1" noRot="1" noChangeAspect="1"/>
+          </p:cNvSpPr>
+          <p:nvPr>
+            <p:ph type="sldImg"/>
+          </p:nvPr>
+        </p:nvSpPr>
+        <p:spPr/>
+      </p:sp>
+      <p:sp>
+        <p:nvSpPr>
+          <p:cNvPr id="3" name="Segnaposto note 2"/>
+          <p:cNvSpPr>
+            <a:spLocks noGrp="1"/>
+          </p:cNvSpPr>
+          <p:nvPr>
+            <p:ph type="body" idx="1"/>
+          </p:nvPr>
+        </p:nvSpPr>
+        <p:spPr/>
+        <p:txBody>
+          <a:bodyPr/>
+          <a:lstStyle/>
+          <a:p>
+            <a:endParaRPr lang="it-IT" dirty="0"/>
+          </a:p>
+        </p:txBody>
+      </p:sp>
+    </p:spTree>
+    <p:extLst>
+      <p:ext uri="{BB962C8B-B14F-4D97-AF65-F5344CB8AC3E}">
+        <p14:creationId xmlns:p14="http://schemas.microsoft.com/office/powerpoint/2010/main" val="3461734294"/>
+      </p:ext>
+    </p:extLst>
+  </p:cSld>
+  <p:clrMapOvr>
+    <a:masterClrMapping/>
+  </p:clrMapOvr>
+</p:notes>
+</file>
+
+<file path=ppt/notesSlides/notesSlide45.xml><?xml version="1.0" encoding="utf-8"?>
+<p:notes xmlns:a="http://schemas.openxmlformats.org/drawingml/2006/main" xmlns:r="http://schemas.openxmlformats.org/officeDocument/2006/relationships" xmlns:p="http://schemas.openxmlformats.org/presentationml/2006/main">
+  <p:cSld>
+    <p:spTree>
+      <p:nvGrpSpPr>
+        <p:cNvPr id="1" name=""/>
+        <p:cNvGrpSpPr/>
+        <p:nvPr/>
+      </p:nvGrpSpPr>
+      <p:grpSpPr>
+        <a:xfrm>
+          <a:off x="0" y="0"/>
+          <a:ext cx="0" cy="0"/>
+          <a:chOff x="0" y="0"/>
+          <a:chExt cx="0" cy="0"/>
+        </a:xfrm>
+      </p:grpSpPr>
+      <p:sp>
+        <p:nvSpPr>
+          <p:cNvPr id="2" name="Segnaposto immagine diapositiva 1"/>
+          <p:cNvSpPr>
+            <a:spLocks noGrp="1" noRot="1" noChangeAspect="1"/>
+          </p:cNvSpPr>
+          <p:nvPr>
+            <p:ph type="sldImg"/>
+          </p:nvPr>
+        </p:nvSpPr>
+        <p:spPr/>
+      </p:sp>
+      <p:sp>
+        <p:nvSpPr>
+          <p:cNvPr id="3" name="Segnaposto note 2"/>
+          <p:cNvSpPr>
+            <a:spLocks noGrp="1"/>
+          </p:cNvSpPr>
+          <p:nvPr>
+            <p:ph type="body" idx="1"/>
+          </p:nvPr>
+        </p:nvSpPr>
+        <p:spPr/>
+        <p:txBody>
+          <a:bodyPr/>
+          <a:lstStyle/>
+          <a:p>
+            <a:r>
               <a:rPr lang="en-US" sz="1200" b="0" i="0" u="none" strike="noStrike" kern="1200" baseline="0" dirty="0">
                 <a:solidFill>
                   <a:schemeClr val="tx1"/>
@@ -4005,7 +4293,7 @@
 </p:notes>
 </file>
 
-<file path=ppt/notesSlides/notesSlide42.xml><?xml version="1.0" encoding="utf-8"?>
+<file path=ppt/notesSlides/notesSlide46.xml><?xml version="1.0" encoding="utf-8"?>
 <p:notes xmlns:a="http://schemas.openxmlformats.org/drawingml/2006/main" xmlns:r="http://schemas.openxmlformats.org/officeDocument/2006/relationships" xmlns:p="http://schemas.openxmlformats.org/presentationml/2006/main">
   <p:cSld>
     <p:spTree>
@@ -4113,173 +4401,14 @@
           <a:bodyPr/>
           <a:lstStyle/>
           <a:p>
-            <a:pPr marL="0" marR="0" lvl="0" indent="0" algn="l" defTabSz="914400" rtl="0" eaLnBrk="1" fontAlgn="auto" latinLnBrk="0" hangingPunct="1">
-              <a:lnSpc>
-                <a:spcPct val="100000"/>
-              </a:lnSpc>
-              <a:spcBef>
-                <a:spcPts val="0"/>
-              </a:spcBef>
-              <a:spcAft>
-                <a:spcPts val="0"/>
-              </a:spcAft>
-              <a:buClrTx/>
-              <a:buSzTx/>
-              <a:buFontTx/>
-              <a:buNone/>
-              <a:tabLst/>
-              <a:defRPr/>
-            </a:pPr>
-            <a:r>
-              <a:rPr lang="it-IT" dirty="0"/>
-              <a:t> </a:t>
-            </a:r>
-            <a:r>
-              <a:rPr lang="it-IT" dirty="0" err="1"/>
-              <a:t>It’s</a:t>
-            </a:r>
-            <a:r>
-              <a:rPr lang="it-IT" dirty="0"/>
-              <a:t> </a:t>
-            </a:r>
-            <a:r>
-              <a:rPr lang="it-IT" dirty="0" err="1"/>
-              <a:t>not</a:t>
-            </a:r>
-            <a:r>
-              <a:rPr lang="it-IT" dirty="0"/>
-              <a:t> </a:t>
-            </a:r>
-            <a:r>
-              <a:rPr lang="it-IT" dirty="0" err="1"/>
-              <a:t>about</a:t>
-            </a:r>
-            <a:r>
-              <a:rPr lang="it-IT" dirty="0"/>
-              <a:t> a </a:t>
-            </a:r>
-            <a:r>
-              <a:rPr lang="it-IT" dirty="0" err="1"/>
-              <a:t>clever</a:t>
-            </a:r>
-            <a:r>
-              <a:rPr lang="it-IT" dirty="0"/>
-              <a:t> use of RAM and SSD—</a:t>
-            </a:r>
-            <a:r>
-              <a:rPr lang="it-IT" dirty="0" err="1"/>
-              <a:t>Many</a:t>
-            </a:r>
-            <a:r>
-              <a:rPr lang="it-IT" dirty="0"/>
-              <a:t> </a:t>
-            </a:r>
-            <a:r>
-              <a:rPr lang="it-IT" dirty="0" err="1"/>
-              <a:t>NoSQL</a:t>
-            </a:r>
-            <a:r>
-              <a:rPr lang="it-IT" dirty="0"/>
-              <a:t> </a:t>
-            </a:r>
-            <a:r>
-              <a:rPr lang="it-IT" dirty="0" err="1"/>
-              <a:t>systems</a:t>
-            </a:r>
-            <a:r>
-              <a:rPr lang="it-IT" dirty="0"/>
-              <a:t> focus on the </a:t>
-            </a:r>
-            <a:r>
-              <a:rPr lang="it-IT" dirty="0" err="1"/>
-              <a:t>efficient</a:t>
-            </a:r>
-            <a:r>
-              <a:rPr lang="it-IT" dirty="0"/>
-              <a:t> use of RAM or </a:t>
-            </a:r>
-            <a:r>
-              <a:rPr lang="it-IT" dirty="0" err="1"/>
-              <a:t>solid</a:t>
-            </a:r>
-            <a:r>
-              <a:rPr lang="it-IT" dirty="0"/>
-              <a:t> state disks to </a:t>
-            </a:r>
-            <a:r>
-              <a:rPr lang="it-IT" dirty="0" err="1"/>
-              <a:t>increase</a:t>
-            </a:r>
-            <a:r>
-              <a:rPr lang="it-IT" dirty="0"/>
-              <a:t> performance. </a:t>
-            </a:r>
-            <a:r>
-              <a:rPr lang="it-IT" dirty="0" err="1"/>
-              <a:t>Though</a:t>
-            </a:r>
-            <a:r>
-              <a:rPr lang="it-IT" dirty="0"/>
-              <a:t> </a:t>
-            </a:r>
-            <a:r>
-              <a:rPr lang="it-IT" dirty="0" err="1"/>
-              <a:t>this</a:t>
-            </a:r>
-            <a:r>
-              <a:rPr lang="it-IT" dirty="0"/>
-              <a:t> </a:t>
-            </a:r>
-            <a:r>
-              <a:rPr lang="it-IT" dirty="0" err="1"/>
-              <a:t>is</a:t>
-            </a:r>
-            <a:r>
-              <a:rPr lang="it-IT" dirty="0"/>
-              <a:t> </a:t>
-            </a:r>
-            <a:r>
-              <a:rPr lang="it-IT" dirty="0" err="1"/>
-              <a:t>important</a:t>
-            </a:r>
-            <a:r>
-              <a:rPr lang="it-IT" dirty="0"/>
-              <a:t>, </a:t>
-            </a:r>
-            <a:r>
-              <a:rPr lang="it-IT" dirty="0" err="1"/>
-              <a:t>NoSQL</a:t>
-            </a:r>
-            <a:r>
-              <a:rPr lang="it-IT" dirty="0"/>
-              <a:t> </a:t>
-            </a:r>
-            <a:r>
-              <a:rPr lang="it-IT" dirty="0" err="1"/>
-              <a:t>systems</a:t>
-            </a:r>
-            <a:r>
-              <a:rPr lang="it-IT" dirty="0"/>
-              <a:t> can </a:t>
-            </a:r>
-            <a:r>
-              <a:rPr lang="it-IT" dirty="0" err="1"/>
-              <a:t>run</a:t>
-            </a:r>
-            <a:r>
-              <a:rPr lang="it-IT" dirty="0"/>
-              <a:t> on standard hardware.</a:t>
-            </a:r>
-          </a:p>
-          <a:p>
-            <a:endParaRPr lang="en-US" dirty="0"/>
+            <a:endParaRPr lang="it-IT" dirty="0"/>
           </a:p>
         </p:txBody>
       </p:sp>
     </p:spTree>
     <p:extLst>
       <p:ext uri="{BB962C8B-B14F-4D97-AF65-F5344CB8AC3E}">
-        <p14:creationId xmlns:p14="http://schemas.microsoft.com/office/powerpoint/2010/main" val="942735773"/>
+        <p14:creationId xmlns:p14="http://schemas.microsoft.com/office/powerpoint/2010/main" val="1277977162"/>
       </p:ext>
     </p:extLst>
   </p:cSld>
@@ -4335,15 +4464,7 @@
           <a:p>
             <a:r>
               <a:rPr lang="it-IT" dirty="0"/>
-              <a:t>https://en.wikipedia.org/wiki/LiveJournal </a:t>
-            </a:r>
-            <a:r>
-              <a:rPr lang="it-IT" dirty="0" err="1"/>
-              <a:t>LiveJournal</a:t>
-            </a:r>
-            <a:r>
-              <a:rPr lang="it-IT" dirty="0"/>
-              <a:t> è una sorta di MSN russo</a:t>
+              <a:t>Il fatto di essere standard garantisce la portabilità delle applicazioni</a:t>
             </a:r>
           </a:p>
         </p:txBody>
@@ -4351,7 +4472,7 @@
     </p:spTree>
     <p:extLst>
       <p:ext uri="{BB962C8B-B14F-4D97-AF65-F5344CB8AC3E}">
-        <p14:creationId xmlns:p14="http://schemas.microsoft.com/office/powerpoint/2010/main" val="2665115093"/>
+        <p14:creationId xmlns:p14="http://schemas.microsoft.com/office/powerpoint/2010/main" val="19197220"/>
       </p:ext>
     </p:extLst>
   </p:cSld>
@@ -4407,7 +4528,7 @@
           <a:p>
             <a:r>
               <a:rPr lang="it-IT" dirty="0"/>
-              <a:t>Un’operazione che coinvolge tante righe non è atomica</a:t>
+              <a:t>Il motivo scatenante è il fatto di non scalare orizzontalmente</a:t>
             </a:r>
           </a:p>
         </p:txBody>
@@ -4415,7 +4536,7 @@
     </p:spTree>
     <p:extLst>
       <p:ext uri="{BB962C8B-B14F-4D97-AF65-F5344CB8AC3E}">
-        <p14:creationId xmlns:p14="http://schemas.microsoft.com/office/powerpoint/2010/main" val="2979786480"/>
+        <p14:creationId xmlns:p14="http://schemas.microsoft.com/office/powerpoint/2010/main" val="588048382"/>
       </p:ext>
     </p:extLst>
   </p:cSld>
@@ -4471,7 +4592,7 @@
           <a:p>
             <a:r>
               <a:rPr lang="it-IT" dirty="0"/>
-              <a:t>Il nesting è limitato, rispetto a quello del documentale</a:t>
+              <a:t>I join sono scoraggiati</a:t>
             </a:r>
           </a:p>
         </p:txBody>
@@ -4479,7 +4600,7 @@
     </p:spTree>
     <p:extLst>
       <p:ext uri="{BB962C8B-B14F-4D97-AF65-F5344CB8AC3E}">
-        <p14:creationId xmlns:p14="http://schemas.microsoft.com/office/powerpoint/2010/main" val="3838656144"/>
+        <p14:creationId xmlns:p14="http://schemas.microsoft.com/office/powerpoint/2010/main" val="3434853798"/>
       </p:ext>
     </p:extLst>
   </p:cSld>
@@ -4533,9 +4654,30 @@
           <a:bodyPr/>
           <a:lstStyle/>
           <a:p>
+            <a:pPr marL="0" marR="0" lvl="0" indent="0" algn="l" defTabSz="914400" rtl="0" eaLnBrk="1" fontAlgn="auto" latinLnBrk="0" hangingPunct="1">
+              <a:lnSpc>
+                <a:spcPct val="100000"/>
+              </a:lnSpc>
+              <a:spcBef>
+                <a:spcPts val="0"/>
+              </a:spcBef>
+              <a:spcAft>
+                <a:spcPts val="0"/>
+              </a:spcAft>
+              <a:buClrTx/>
+              <a:buSzTx/>
+              <a:buFontTx/>
+              <a:buNone/>
+              <a:tabLst/>
+              <a:defRPr/>
+            </a:pPr>
+            <a:r>
+              <a:rPr lang="it-IT" dirty="0"/>
+              <a:t> </a:t>
+            </a:r>
             <a:r>
               <a:rPr lang="it-IT" dirty="0" err="1"/>
-              <a:t>Row</a:t>
+              <a:t>It’s</a:t>
             </a:r>
             <a:r>
               <a:rPr lang="it-IT" dirty="0"/>
@@ -4543,20 +4685,31 @@
             </a:r>
             <a:r>
               <a:rPr lang="it-IT" dirty="0" err="1"/>
-              <a:t>oriented</a:t>
-            </a:r>
-            <a:r>
-              <a:rPr lang="it-IT" dirty="0"/>
-              <a:t>: inserire un record è facile, ma è possibile accedere a dati non necessari durante la lettura</a:t>
-            </a:r>
-          </a:p>
-          <a:p>
-            <a:endParaRPr lang="it-IT" dirty="0"/>
-          </a:p>
-          <a:p>
+              <a:t>not</a:t>
+            </a:r>
+            <a:r>
+              <a:rPr lang="it-IT" dirty="0"/>
+              <a:t> </a:t>
+            </a:r>
             <a:r>
               <a:rPr lang="it-IT" dirty="0" err="1"/>
-              <a:t>Column</a:t>
+              <a:t>about</a:t>
+            </a:r>
+            <a:r>
+              <a:rPr lang="it-IT" dirty="0"/>
+              <a:t> a </a:t>
+            </a:r>
+            <a:r>
+              <a:rPr lang="it-IT" dirty="0" err="1"/>
+              <a:t>clever</a:t>
+            </a:r>
+            <a:r>
+              <a:rPr lang="it-IT" dirty="0"/>
+              <a:t> use of RAM and SSD—</a:t>
+            </a:r>
+            <a:r>
+              <a:rPr lang="it-IT" dirty="0" err="1"/>
+              <a:t>Many</a:t>
             </a:r>
             <a:r>
               <a:rPr lang="it-IT" dirty="0"/>
@@ -4564,19 +4717,110 @@
             </a:r>
             <a:r>
               <a:rPr lang="it-IT" dirty="0" err="1"/>
-              <a:t>oriented</a:t>
-            </a:r>
-            <a:r>
-              <a:rPr lang="it-IT" dirty="0"/>
-              <a:t>: solo i valori richiesti sono accessibili, la scrittura di un record richiede più accessi</a:t>
-            </a:r>
+              <a:t>NoSQL</a:t>
+            </a:r>
+            <a:r>
+              <a:rPr lang="it-IT" dirty="0"/>
+              <a:t> </a:t>
+            </a:r>
+            <a:r>
+              <a:rPr lang="it-IT" dirty="0" err="1"/>
+              <a:t>systems</a:t>
+            </a:r>
+            <a:r>
+              <a:rPr lang="it-IT" dirty="0"/>
+              <a:t> focus on the </a:t>
+            </a:r>
+            <a:r>
+              <a:rPr lang="it-IT" dirty="0" err="1"/>
+              <a:t>efficient</a:t>
+            </a:r>
+            <a:r>
+              <a:rPr lang="it-IT" dirty="0"/>
+              <a:t> use of RAM or </a:t>
+            </a:r>
+            <a:r>
+              <a:rPr lang="it-IT" dirty="0" err="1"/>
+              <a:t>solid</a:t>
+            </a:r>
+            <a:r>
+              <a:rPr lang="it-IT" dirty="0"/>
+              <a:t> state disks to </a:t>
+            </a:r>
+            <a:r>
+              <a:rPr lang="it-IT" dirty="0" err="1"/>
+              <a:t>increase</a:t>
+            </a:r>
+            <a:r>
+              <a:rPr lang="it-IT" dirty="0"/>
+              <a:t> performance. </a:t>
+            </a:r>
+            <a:r>
+              <a:rPr lang="it-IT" dirty="0" err="1"/>
+              <a:t>Though</a:t>
+            </a:r>
+            <a:r>
+              <a:rPr lang="it-IT" dirty="0"/>
+              <a:t> </a:t>
+            </a:r>
+            <a:r>
+              <a:rPr lang="it-IT" dirty="0" err="1"/>
+              <a:t>this</a:t>
+            </a:r>
+            <a:r>
+              <a:rPr lang="it-IT" dirty="0"/>
+              <a:t> </a:t>
+            </a:r>
+            <a:r>
+              <a:rPr lang="it-IT" dirty="0" err="1"/>
+              <a:t>is</a:t>
+            </a:r>
+            <a:r>
+              <a:rPr lang="it-IT" dirty="0"/>
+              <a:t> </a:t>
+            </a:r>
+            <a:r>
+              <a:rPr lang="it-IT" dirty="0" err="1"/>
+              <a:t>important</a:t>
+            </a:r>
+            <a:r>
+              <a:rPr lang="it-IT" dirty="0"/>
+              <a:t>, </a:t>
+            </a:r>
+            <a:r>
+              <a:rPr lang="it-IT" dirty="0" err="1"/>
+              <a:t>NoSQL</a:t>
+            </a:r>
+            <a:r>
+              <a:rPr lang="it-IT" dirty="0"/>
+              <a:t> </a:t>
+            </a:r>
+            <a:r>
+              <a:rPr lang="it-IT" dirty="0" err="1"/>
+              <a:t>systems</a:t>
+            </a:r>
+            <a:r>
+              <a:rPr lang="it-IT" dirty="0"/>
+              <a:t> can </a:t>
+            </a:r>
+            <a:r>
+              <a:rPr lang="it-IT" dirty="0" err="1"/>
+              <a:t>run</a:t>
+            </a:r>
+            <a:r>
+              <a:rPr lang="it-IT" dirty="0"/>
+              <a:t> on standard hardware.</a:t>
+            </a:r>
+          </a:p>
+          <a:p>
+            <a:endParaRPr lang="en-US" dirty="0"/>
           </a:p>
         </p:txBody>
       </p:sp>
     </p:spTree>
     <p:extLst>
       <p:ext uri="{BB962C8B-B14F-4D97-AF65-F5344CB8AC3E}">
-        <p14:creationId xmlns:p14="http://schemas.microsoft.com/office/powerpoint/2010/main" val="1307117406"/>
+        <p14:creationId xmlns:p14="http://schemas.microsoft.com/office/powerpoint/2010/main" val="942735773"/>
       </p:ext>
     </p:extLst>
   </p:cSld>
@@ -6101,13 +6345,10 @@
           </a:lstStyle>
           <a:p>
             <a:pPr algn="ctr"/>
-            <a:r>
-              <a:rPr lang="en-US" dirty="0">
-                <a:latin typeface="Helvetica" panose="020B0604020202020204" pitchFamily="34" charset="0"/>
-                <a:cs typeface="Helvetica" panose="020B0604020202020204" pitchFamily="34" charset="0"/>
-              </a:rPr>
-              <a:t>FITSTIC</a:t>
-            </a:r>
+            <a:endParaRPr lang="en-US" dirty="0">
+              <a:latin typeface="Helvetica" panose="020B0604020202020204" pitchFamily="34" charset="0"/>
+              <a:cs typeface="Helvetica" panose="020B0604020202020204" pitchFamily="34" charset="0"/>
+            </a:endParaRPr>
           </a:p>
         </p:txBody>
       </p:sp>
@@ -6192,7 +6433,7 @@
             <a:pPr lvl="0" algn="l"/>
             <a:r>
               <a:rPr lang="it-IT" dirty="0"/>
-              <a:t>Chiara Forresi – University of Bologna</a:t>
+              <a:t>Manuele Pasini – University of Bologna</a:t>
             </a:r>
           </a:p>
         </p:txBody>
@@ -6664,14 +6905,19 @@
             <p:ph type="subTitle" idx="1"/>
           </p:nvPr>
         </p:nvSpPr>
-        <p:spPr/>
+        <p:spPr>
+          <a:xfrm>
+            <a:off x="1524000" y="3612590"/>
+            <a:ext cx="9144000" cy="1655762"/>
+          </a:xfrm>
+        </p:spPr>
         <p:txBody>
           <a:bodyPr anchor="ctr"/>
           <a:lstStyle/>
           <a:p>
             <a:r>
               <a:rPr lang="it-IT" dirty="0"/>
-              <a:t>FITSTIC 2024</a:t>
+              <a:t>2026</a:t>
             </a:r>
           </a:p>
         </p:txBody>
@@ -6686,7 +6932,12 @@
             <p:ph type="title"/>
           </p:nvPr>
         </p:nvSpPr>
-        <p:spPr/>
+        <p:spPr>
+          <a:xfrm>
+            <a:off x="1524000" y="2271199"/>
+            <a:ext cx="9144000" cy="1325563"/>
+          </a:xfrm>
+        </p:spPr>
         <p:txBody>
           <a:bodyPr anchor="b">
             <a:normAutofit/>
@@ -10494,7 +10745,7 @@
           <a:p>
             <a:r>
               <a:rPr lang="en-US" dirty="0"/>
-              <a:t>Chiara Forresi</a:t>
+              <a:t>Manuele Pasini</a:t>
             </a:r>
           </a:p>
           <a:p>
@@ -10505,9 +10756,9 @@
             </a:r>
             <a:r>
               <a:rPr lang="en-US" dirty="0">
-                <a:hlinkClick r:id="rId2"/>
-              </a:rPr>
-              <a:t>chiara.forresi@unibo.it</a:t>
+                <a:hlinkClick r:id="rId3"/>
+              </a:rPr>
+              <a:t>manuele.pasini@unibo.it</a:t>
             </a:r>
             <a:endParaRPr lang="en-US" dirty="0"/>
           </a:p>
@@ -10515,11 +10766,11 @@
             <a:pPr lvl="1"/>
             <a:r>
               <a:rPr lang="en-US" dirty="0"/>
-              <a:t>4th year Ph.D. Candidate in Data Science and Computation @ </a:t>
+              <a:t>3rd year Ph.D. Candidate in Computer Science and Engineering @ </a:t>
             </a:r>
             <a:r>
               <a:rPr lang="en-US" dirty="0" err="1"/>
-              <a:t>UniBO</a:t>
+              <a:t>UniBo</a:t>
             </a:r>
             <a:endParaRPr lang="en-US" dirty="0"/>
           </a:p>
@@ -10533,14 +10784,28 @@
             <a:pPr lvl="1"/>
             <a:r>
               <a:rPr lang="en-US" dirty="0"/>
-              <a:t>Big data / database </a:t>
+              <a:t>Big Data</a:t>
             </a:r>
           </a:p>
           <a:p>
             <a:pPr lvl="1"/>
             <a:r>
               <a:rPr lang="en-US" dirty="0"/>
-              <a:t>Streaming data</a:t>
+              <a:t>Data Platforms</a:t>
+            </a:r>
+          </a:p>
+          <a:p>
+            <a:pPr lvl="1"/>
+            <a:r>
+              <a:rPr lang="en-US" dirty="0"/>
+              <a:t>Hybrid data architectures &amp; models</a:t>
+            </a:r>
+          </a:p>
+          <a:p>
+            <a:pPr lvl="1"/>
+            <a:r>
+              <a:rPr lang="en-US" dirty="0"/>
+              <a:t>Precision Agriculture</a:t>
             </a:r>
           </a:p>
         </p:txBody>
@@ -10562,7 +10827,7 @@
           </p:nvPr>
         </p:nvPicPr>
         <p:blipFill>
-          <a:blip r:embed="rId3">
+          <a:blip r:embed="rId4">
             <a:extLst>
               <a:ext uri="{28A0092B-C50C-407E-A947-70E740481C1C}">
                 <a14:useLocalDpi xmlns:a14="http://schemas.microsoft.com/office/drawing/2010/main" val="0"/>
@@ -10603,7 +10868,7 @@
           <a:p>
             <a:r>
               <a:rPr lang="en-US" dirty="0">
-                <a:hlinkClick r:id="rId4"/>
+                <a:hlinkClick r:id="rId5"/>
               </a:rPr>
               <a:t>https://big.csr.unibo.it/</a:t>
             </a:r>
@@ -12758,7 +13023,7 @@
         </p:blipFill>
         <p:spPr>
           <a:xfrm>
-            <a:off x="3120788" y="1777854"/>
+            <a:off x="5552100" y="1774541"/>
             <a:ext cx="6117530" cy="4165746"/>
           </a:xfrm>
           <a:prstGeom prst="rect">
@@ -13039,6 +13304,36 @@
           </a:p>
         </p:txBody>
       </p:sp>
+      <p:pic>
+        <p:nvPicPr>
+          <p:cNvPr id="6" name="Immagine 5">
+            <a:extLst>
+              <a:ext uri="{FF2B5EF4-FFF2-40B4-BE49-F238E27FC236}">
+                <a16:creationId xmlns:a16="http://schemas.microsoft.com/office/drawing/2014/main" id="{0A4202BF-C65E-47DF-A3EC-5241D4C72E5F}"/>
+              </a:ext>
+            </a:extLst>
+          </p:cNvPr>
+          <p:cNvPicPr>
+            <a:picLocks noChangeAspect="1"/>
+          </p:cNvPicPr>
+          <p:nvPr/>
+        </p:nvPicPr>
+        <p:blipFill>
+          <a:blip r:embed="rId3"/>
+          <a:stretch>
+            <a:fillRect/>
+          </a:stretch>
+        </p:blipFill>
+        <p:spPr>
+          <a:xfrm>
+            <a:off x="233507" y="1877592"/>
+            <a:ext cx="5148472" cy="3959643"/>
+          </a:xfrm>
+          <a:prstGeom prst="rect">
+            <a:avLst/>
+          </a:prstGeom>
+        </p:spPr>
+      </p:pic>
     </p:spTree>
     <p:extLst>
       <p:ext uri="{BB962C8B-B14F-4D97-AF65-F5344CB8AC3E}">
@@ -15326,12 +15621,7 @@
             <p:ph type="title"/>
           </p:nvPr>
         </p:nvSpPr>
-        <p:spPr>
-          <a:xfrm>
-            <a:off x="838200" y="365125"/>
-            <a:ext cx="10515600" cy="1325563"/>
-          </a:xfrm>
-        </p:spPr>
+        <p:spPr/>
         <p:txBody>
           <a:bodyPr>
             <a:normAutofit fontScale="90000"/>
@@ -15879,12 +16169,7 @@
             <p:ph type="title"/>
           </p:nvPr>
         </p:nvSpPr>
-        <p:spPr>
-          <a:xfrm>
-            <a:off x="838200" y="365125"/>
-            <a:ext cx="10515600" cy="1325563"/>
-          </a:xfrm>
-        </p:spPr>
+        <p:spPr/>
         <p:txBody>
           <a:bodyPr>
             <a:normAutofit fontScale="90000"/>
@@ -17409,19 +17694,53 @@
           <a:p>
             <a:pPr algn="ctr"/>
             <a:r>
-              <a:rPr lang="it-IT" sz="4800" b="1" i="0" u="sng" dirty="0">
+              <a:rPr lang="it-IT" sz="4400" b="1" i="0" u="sng" dirty="0">
+                <a:solidFill>
+                  <a:srgbClr val="212529"/>
+                </a:solidFill>
                 <a:effectLst/>
-                <a:latin typeface="Roboto" panose="02000000000000000000" pitchFamily="2" charset="0"/>
-                <a:hlinkClick r:id="rId2"/>
-              </a:rPr>
-              <a:t>https://tinyurl.com/fitstic-nosql-2024</a:t>
-            </a:r>
-            <a:endParaRPr lang="it-IT" sz="6000" b="1" i="0" u="sng" dirty="0">
+                <a:hlinkClick r:id="rId3"/>
+              </a:rPr>
+              <a:t>Materiale </a:t>
+            </a:r>
+            <a:r>
+              <a:rPr lang="it-IT" sz="4400" b="1" i="0" u="sng" dirty="0" err="1">
+                <a:solidFill>
+                  <a:srgbClr val="212529"/>
+                </a:solidFill>
+                <a:effectLst/>
+                <a:hlinkClick r:id="rId3"/>
+              </a:rPr>
+              <a:t>NoSQL</a:t>
+            </a:r>
+            <a:r>
+              <a:rPr lang="it-IT" sz="4400" b="1" i="0" u="sng" dirty="0">
+                <a:solidFill>
+                  <a:srgbClr val="212529"/>
+                </a:solidFill>
+                <a:effectLst/>
+                <a:hlinkClick r:id="rId3"/>
+              </a:rPr>
+              <a:t> 2026</a:t>
+            </a:r>
+            <a:endParaRPr lang="it-IT" sz="4400" b="1" i="0" u="sng" dirty="0">
               <a:solidFill>
                 <a:srgbClr val="212529"/>
               </a:solidFill>
               <a:effectLst/>
             </a:endParaRPr>
+          </a:p>
+          <a:p>
+            <a:pPr algn="ctr"/>
+            <a:r>
+              <a:rPr lang="it-IT" b="1" i="0" u="sng" dirty="0">
+                <a:solidFill>
+                  <a:srgbClr val="212529"/>
+                </a:solidFill>
+                <a:effectLst/>
+              </a:rPr>
+              <a:t>tinyurl.com/nosql2026</a:t>
+            </a:r>
           </a:p>
         </p:txBody>
       </p:sp>
@@ -20714,7 +21033,7 @@
             <a:spLocks noGrp="1"/>
           </p:cNvSpPr>
           <p:nvPr>
-            <p:ph sz="quarter" idx="1"/>
+            <p:ph idx="1"/>
           </p:nvPr>
         </p:nvSpPr>
         <p:spPr/>
@@ -21152,7 +21471,7 @@
             <a:spLocks noGrp="1"/>
           </p:cNvSpPr>
           <p:nvPr>
-            <p:ph sz="quarter" idx="1"/>
+            <p:ph idx="1"/>
           </p:nvPr>
         </p:nvSpPr>
         <p:spPr/>
@@ -21386,7 +21705,7 @@
             <a:spLocks noGrp="1"/>
           </p:cNvSpPr>
           <p:nvPr>
-            <p:ph sz="quarter" idx="1"/>
+            <p:ph idx="1"/>
           </p:nvPr>
         </p:nvSpPr>
         <p:spPr/>
@@ -21793,31 +22112,6 @@
           </a:p>
         </p:txBody>
       </p:sp>
-      <p:sp>
-        <p:nvSpPr>
-          <p:cNvPr id="6" name="Segnaposto contenuto 5">
-            <a:extLst>
-              <a:ext uri="{FF2B5EF4-FFF2-40B4-BE49-F238E27FC236}">
-                <a16:creationId xmlns:a16="http://schemas.microsoft.com/office/drawing/2014/main" id="{0354DB4B-FC4F-4BE2-928F-BEE4C990FF01}"/>
-              </a:ext>
-            </a:extLst>
-          </p:cNvPr>
-          <p:cNvSpPr>
-            <a:spLocks noGrp="1"/>
-          </p:cNvSpPr>
-          <p:nvPr>
-            <p:ph idx="13"/>
-          </p:nvPr>
-        </p:nvSpPr>
-        <p:spPr/>
-        <p:txBody>
-          <a:bodyPr/>
-          <a:lstStyle/>
-          <a:p>
-            <a:endParaRPr lang="en-US"/>
-          </a:p>
-        </p:txBody>
-      </p:sp>
       <p:pic>
         <p:nvPicPr>
           <p:cNvPr id="8" name="Segnaposto contenuto 7">
@@ -21850,6 +22144,31 @@
           </a:prstGeom>
         </p:spPr>
       </p:pic>
+      <p:sp>
+        <p:nvSpPr>
+          <p:cNvPr id="6" name="Segnaposto contenuto 5">
+            <a:extLst>
+              <a:ext uri="{FF2B5EF4-FFF2-40B4-BE49-F238E27FC236}">
+                <a16:creationId xmlns:a16="http://schemas.microsoft.com/office/drawing/2014/main" id="{0354DB4B-FC4F-4BE2-928F-BEE4C990FF01}"/>
+              </a:ext>
+            </a:extLst>
+          </p:cNvPr>
+          <p:cNvSpPr>
+            <a:spLocks noGrp="1"/>
+          </p:cNvSpPr>
+          <p:nvPr>
+            <p:ph idx="13"/>
+          </p:nvPr>
+        </p:nvSpPr>
+        <p:spPr/>
+        <p:txBody>
+          <a:bodyPr/>
+          <a:lstStyle/>
+          <a:p>
+            <a:endParaRPr lang="en-US"/>
+          </a:p>
+        </p:txBody>
+      </p:sp>
     </p:spTree>
     <p:extLst>
       <p:ext uri="{BB962C8B-B14F-4D97-AF65-F5344CB8AC3E}">
@@ -21914,7 +22233,7 @@
             <a:spLocks noGrp="1"/>
           </p:cNvSpPr>
           <p:nvPr>
-            <p:ph sz="quarter" idx="1"/>
+            <p:ph idx="1"/>
           </p:nvPr>
         </p:nvSpPr>
         <p:spPr/>
@@ -22087,14 +22406,14 @@
             <p:ph idx="1"/>
             <p:extLst>
               <p:ext uri="{D42A27DB-BD31-4B8C-83A1-F6EECF244321}">
-                <p14:modId xmlns:p14="http://schemas.microsoft.com/office/powerpoint/2010/main" val="1386652385"/>
+                <p14:modId xmlns:p14="http://schemas.microsoft.com/office/powerpoint/2010/main" val="2661419206"/>
               </p:ext>
             </p:extLst>
           </p:nvPr>
         </p:nvGraphicFramePr>
         <p:xfrm>
-          <a:off x="838200" y="1700213"/>
-          <a:ext cx="10259718" cy="3337560"/>
+          <a:off x="779947" y="1690688"/>
+          <a:ext cx="10259718" cy="4071804"/>
         </p:xfrm>
         <a:graphic>
           <a:graphicData uri="http://schemas.openxmlformats.org/drawingml/2006/table">
@@ -22125,9 +22444,10 @@
                     <a:lstStyle/>
                     <a:p>
                       <a:r>
-                        <a:rPr lang="it-IT" dirty="0"/>
-                        <a:t>Data</a:t>
+                        <a:rPr lang="it-IT" dirty="0" err="1"/>
+                        <a:t>DataS</a:t>
                       </a:r>
+                      <a:endParaRPr lang="it-IT" dirty="0"/>
                     </a:p>
                   </a:txBody>
                   <a:tcPr/>
@@ -22159,11 +22479,74 @@
                     <a:p>
                       <a:r>
                         <a:rPr lang="it-IT" dirty="0"/>
-                        <a:t>09/04/2024 09-13</a:t>
+                        <a:t>04/05/2026 10-13</a:t>
                       </a:r>
                     </a:p>
                   </a:txBody>
-                  <a:tcPr/>
+                  <a:tcPr>
+                    <a:solidFill>
+                      <a:schemeClr val="accent4">
+                        <a:lumMod val="20000"/>
+                        <a:lumOff val="80000"/>
+                      </a:schemeClr>
+                    </a:solidFill>
+                  </a:tcPr>
+                </a:tc>
+                <a:tc>
+                  <a:txBody>
+                    <a:bodyPr/>
+                    <a:lstStyle/>
+                    <a:p>
+                      <a:r>
+                        <a:rPr lang="it-IT" b="1" dirty="0"/>
+                        <a:t>Introduzione</a:t>
+                      </a:r>
+                      <a:r>
+                        <a:rPr lang="it-IT" dirty="0"/>
+                        <a:t> ai database </a:t>
+                      </a:r>
+                      <a:r>
+                        <a:rPr lang="it-IT" dirty="0" err="1"/>
+                        <a:t>NoSQL</a:t>
+                      </a:r>
+                      <a:endParaRPr lang="it-IT" dirty="0"/>
+                    </a:p>
+                  </a:txBody>
+                  <a:tcPr>
+                    <a:solidFill>
+                      <a:schemeClr val="accent4">
+                        <a:lumMod val="20000"/>
+                        <a:lumOff val="80000"/>
+                      </a:schemeClr>
+                    </a:solidFill>
+                  </a:tcPr>
+                </a:tc>
+                <a:extLst>
+                  <a:ext uri="{0D108BD9-81ED-4DB2-BD59-A6C34878D82A}">
+                    <a16:rowId xmlns:a16="http://schemas.microsoft.com/office/drawing/2014/main" val="3202416412"/>
+                  </a:ext>
+                </a:extLst>
+              </a:tr>
+              <a:tr h="360451">
+                <a:tc>
+                  <a:txBody>
+                    <a:bodyPr/>
+                    <a:lstStyle/>
+                    <a:p>
+                      <a:r>
+                        <a:rPr lang="it-IT" dirty="0"/>
+                        <a:t>04/05/2026 14-17</a:t>
+                      </a:r>
+                    </a:p>
+                  </a:txBody>
+                  <a:tcPr>
+                    <a:solidFill>
+                      <a:schemeClr val="accent4">
+                        <a:lumMod val="20000"/>
+                        <a:lumOff val="80000"/>
+                      </a:schemeClr>
+                    </a:solidFill>
+                  </a:tcPr>
                 </a:tc>
                 <a:tc>
                   <a:txBody>
@@ -22172,57 +22555,26 @@
                     <a:p>
                       <a:r>
                         <a:rPr lang="it-IT" dirty="0"/>
-                        <a:t>Introduzione ai database </a:t>
+                        <a:t>Fine introduzione + Setup ambiente laboratorio </a:t>
                       </a:r>
                       <a:r>
                         <a:rPr lang="it-IT" dirty="0" err="1"/>
-                        <a:t>NoSQL</a:t>
+                        <a:t>Git</a:t>
                       </a:r>
-                      <a:endParaRPr lang="it-IT" dirty="0"/>
-                    </a:p>
-                  </a:txBody>
-                  <a:tcPr/>
-                </a:tc>
-                <a:extLst>
-                  <a:ext uri="{0D108BD9-81ED-4DB2-BD59-A6C34878D82A}">
-                    <a16:rowId xmlns:a16="http://schemas.microsoft.com/office/drawing/2014/main" val="3202416412"/>
-                  </a:ext>
-                </a:extLst>
-              </a:tr>
-              <a:tr h="370840">
-                <a:tc>
-                  <a:txBody>
-                    <a:bodyPr/>
-                    <a:lstStyle/>
-                    <a:p>
                       <a:r>
                         <a:rPr lang="it-IT" dirty="0"/>
-                        <a:t>11/04/2024 09-13</a:t>
+                        <a:t>/Docker</a:t>
                       </a:r>
                     </a:p>
                   </a:txBody>
-                  <a:tcPr/>
-                </a:tc>
-                <a:tc>
-                  <a:txBody>
-                    <a:bodyPr/>
-                    <a:lstStyle/>
-                    <a:p>
-                      <a:r>
-                        <a:rPr lang="it-IT" dirty="0"/>
-                        <a:t>Introduzione ai database </a:t>
-                      </a:r>
-                      <a:r>
-                        <a:rPr lang="it-IT" dirty="0" err="1"/>
-                        <a:t>NoSQL</a:t>
-                      </a:r>
-                      <a:r>
-                        <a:rPr lang="it-IT" dirty="0"/>
-                        <a:t>, installazione software per prove pratiche, Cassandra</a:t>
-                      </a:r>
-                    </a:p>
-                  </a:txBody>
-                  <a:tcPr/>
+                  <a:tcPr>
+                    <a:solidFill>
+                      <a:schemeClr val="accent4">
+                        <a:lumMod val="20000"/>
+                        <a:lumOff val="80000"/>
+                      </a:schemeClr>
+                    </a:solidFill>
+                  </a:tcPr>
                 </a:tc>
                 <a:extLst>
                   <a:ext uri="{0D108BD9-81ED-4DB2-BD59-A6C34878D82A}">
@@ -22238,11 +22590,18 @@
                     <a:p>
                       <a:r>
                         <a:rPr lang="it-IT" dirty="0"/>
-                        <a:t>16/04/2024 09-13</a:t>
+                        <a:t>05/05/2026 10-13</a:t>
                       </a:r>
                     </a:p>
                   </a:txBody>
-                  <a:tcPr/>
+                  <a:tcPr>
+                    <a:solidFill>
+                      <a:schemeClr val="accent5">
+                        <a:lumMod val="20000"/>
+                        <a:lumOff val="80000"/>
+                      </a:schemeClr>
+                    </a:solidFill>
+                  </a:tcPr>
                 </a:tc>
                 <a:tc>
                   <a:txBody>
@@ -22250,20 +22609,59 @@
                     <a:lstStyle/>
                     <a:p>
                       <a:r>
+                        <a:rPr lang="it-IT" b="1" dirty="0">
+                          <a:solidFill>
+                            <a:schemeClr val="tx1"/>
+                          </a:solidFill>
+                        </a:rPr>
+                        <a:t>Wide </a:t>
+                      </a:r>
+                      <a:r>
+                        <a:rPr lang="it-IT" b="1" dirty="0" err="1">
+                          <a:solidFill>
+                            <a:schemeClr val="tx1"/>
+                          </a:solidFill>
+                        </a:rPr>
+                        <a:t>Column</a:t>
+                      </a:r>
+                      <a:r>
+                        <a:rPr lang="it-IT" b="1" dirty="0">
+                          <a:solidFill>
+                            <a:schemeClr val="tx1"/>
+                          </a:solidFill>
+                        </a:rPr>
+                        <a:t> model </a:t>
+                      </a:r>
+                      <a:r>
+                        <a:rPr lang="it-IT" dirty="0">
+                          <a:solidFill>
+                            <a:schemeClr val="tx1"/>
+                          </a:solidFill>
+                        </a:rPr>
+                        <a:t>- Apache</a:t>
+                      </a:r>
+                      <a:r>
                         <a:rPr lang="it-IT" dirty="0">
                           <a:solidFill>
                             <a:srgbClr val="FF0000"/>
                           </a:solidFill>
                         </a:rPr>
-                        <a:t>Test teoria</a:t>
+                        <a:t> </a:t>
                       </a:r>
                       <a:r>
                         <a:rPr lang="it-IT" dirty="0"/>
-                        <a:t>, Cassandra</a:t>
+                        <a:t>Cassandra</a:t>
                       </a:r>
                     </a:p>
                   </a:txBody>
-                  <a:tcPr/>
+                  <a:tcPr>
+                    <a:solidFill>
+                      <a:schemeClr val="accent5">
+                        <a:lumMod val="20000"/>
+                        <a:lumOff val="80000"/>
+                      </a:schemeClr>
+                    </a:solidFill>
+                  </a:tcPr>
                 </a:tc>
                 <a:extLst>
                   <a:ext uri="{0D108BD9-81ED-4DB2-BD59-A6C34878D82A}">
@@ -22279,11 +22677,18 @@
                     <a:p>
                       <a:r>
                         <a:rPr lang="it-IT" dirty="0"/>
-                        <a:t>18/04/2024 09-13</a:t>
+                        <a:t>05/05/2026 14-17</a:t>
                       </a:r>
                     </a:p>
                   </a:txBody>
-                  <a:tcPr/>
+                  <a:tcPr>
+                    <a:solidFill>
+                      <a:schemeClr val="accent5">
+                        <a:lumMod val="20000"/>
+                        <a:lumOff val="80000"/>
+                      </a:schemeClr>
+                    </a:solidFill>
+                  </a:tcPr>
                 </a:tc>
                 <a:tc>
                   <a:txBody>
@@ -22292,11 +22697,18 @@
                     <a:p>
                       <a:r>
                         <a:rPr lang="it-IT" dirty="0"/>
-                        <a:t>Cassandra, Neo4J</a:t>
+                        <a:t>Esercitazioni Cassandra</a:t>
                       </a:r>
                     </a:p>
                   </a:txBody>
-                  <a:tcPr/>
+                  <a:tcPr>
+                    <a:solidFill>
+                      <a:schemeClr val="accent5">
+                        <a:lumMod val="20000"/>
+                        <a:lumOff val="80000"/>
+                      </a:schemeClr>
+                    </a:solidFill>
+                  </a:tcPr>
                 </a:tc>
                 <a:extLst>
                   <a:ext uri="{0D108BD9-81ED-4DB2-BD59-A6C34878D82A}">
@@ -22312,11 +22724,18 @@
                     <a:p>
                       <a:r>
                         <a:rPr lang="it-IT" dirty="0"/>
-                        <a:t>22/04/2024 09-13</a:t>
+                        <a:t>06/05/2026 10-13</a:t>
                       </a:r>
                     </a:p>
                   </a:txBody>
-                  <a:tcPr/>
+                  <a:tcPr>
+                    <a:solidFill>
+                      <a:schemeClr val="accent6">
+                        <a:lumMod val="20000"/>
+                        <a:lumOff val="80000"/>
+                      </a:schemeClr>
+                    </a:solidFill>
+                  </a:tcPr>
                 </a:tc>
                 <a:tc>
                   <a:txBody>
@@ -22324,20 +22743,43 @@
                     <a:lstStyle/>
                     <a:p>
                       <a:r>
+                        <a:rPr lang="it-IT" b="1" dirty="0" err="1">
+                          <a:solidFill>
+                            <a:schemeClr val="tx1"/>
+                          </a:solidFill>
+                        </a:rPr>
+                        <a:t>Graph</a:t>
+                      </a:r>
+                      <a:r>
+                        <a:rPr lang="it-IT" b="1" dirty="0">
+                          <a:solidFill>
+                            <a:schemeClr val="tx1"/>
+                          </a:solidFill>
+                        </a:rPr>
+                        <a:t> model </a:t>
+                      </a:r>
+                      <a:r>
                         <a:rPr lang="it-IT" dirty="0">
                           <a:solidFill>
-                            <a:srgbClr val="FF0000"/>
+                            <a:schemeClr val="tx1"/>
                           </a:solidFill>
                         </a:rPr>
-                        <a:t>Test Cassandra</a:t>
+                        <a:t>- </a:t>
                       </a:r>
                       <a:r>
                         <a:rPr lang="it-IT" dirty="0"/>
-                        <a:t>, Neo4J</a:t>
+                        <a:t>Neo4J</a:t>
                       </a:r>
                     </a:p>
                   </a:txBody>
-                  <a:tcPr/>
+                  <a:tcPr>
+                    <a:solidFill>
+                      <a:schemeClr val="accent6">
+                        <a:lumMod val="20000"/>
+                        <a:lumOff val="80000"/>
+                      </a:schemeClr>
+                    </a:solidFill>
+                  </a:tcPr>
                 </a:tc>
                 <a:extLst>
                   <a:ext uri="{0D108BD9-81ED-4DB2-BD59-A6C34878D82A}">
@@ -22353,11 +22795,18 @@
                     <a:p>
                       <a:r>
                         <a:rPr lang="it-IT" dirty="0"/>
-                        <a:t>23/04/2024 09-13</a:t>
+                        <a:t>06/05/2026 14-17</a:t>
                       </a:r>
                     </a:p>
                   </a:txBody>
-                  <a:tcPr/>
+                  <a:tcPr>
+                    <a:solidFill>
+                      <a:schemeClr val="accent6">
+                        <a:lumMod val="20000"/>
+                        <a:lumOff val="80000"/>
+                      </a:schemeClr>
+                    </a:solidFill>
+                  </a:tcPr>
                 </a:tc>
                 <a:tc>
                   <a:txBody>
@@ -22366,16 +22815,18 @@
                     <a:p>
                       <a:r>
                         <a:rPr lang="it-IT" dirty="0"/>
-                        <a:t>Neo4J, Mongo DB </a:t>
+                        <a:t>Esercitazioni Neo4J</a:t>
                       </a:r>
-                      <a:r>
-                        <a:rPr lang="it-IT" dirty="0" err="1"/>
-                        <a:t>Find</a:t>
-                      </a:r>
-                      <a:endParaRPr lang="it-IT" dirty="0"/>
                     </a:p>
                   </a:txBody>
-                  <a:tcPr/>
+                  <a:tcPr>
+                    <a:solidFill>
+                      <a:schemeClr val="accent6">
+                        <a:lumMod val="20000"/>
+                        <a:lumOff val="80000"/>
+                      </a:schemeClr>
+                    </a:solidFill>
+                  </a:tcPr>
                 </a:tc>
                 <a:extLst>
                   <a:ext uri="{0D108BD9-81ED-4DB2-BD59-A6C34878D82A}">
@@ -22383,7 +22834,7 @@
                   </a:ext>
                 </a:extLst>
               </a:tr>
-              <a:tr h="370840">
+              <a:tr h="368484">
                 <a:tc>
                   <a:txBody>
                     <a:bodyPr/>
@@ -22391,11 +22842,18 @@
                     <a:p>
                       <a:r>
                         <a:rPr lang="it-IT" dirty="0"/>
-                        <a:t>30/04/2024 09-13</a:t>
+                        <a:t>11/05/2026 10-13</a:t>
                       </a:r>
                     </a:p>
                   </a:txBody>
-                  <a:tcPr/>
+                  <a:tcPr>
+                    <a:solidFill>
+                      <a:schemeClr val="accent2">
+                        <a:lumMod val="20000"/>
+                        <a:lumOff val="80000"/>
+                      </a:schemeClr>
+                    </a:solidFill>
+                  </a:tcPr>
                 </a:tc>
                 <a:tc>
                   <a:txBody>
@@ -22403,33 +22861,67 @@
                     <a:lstStyle/>
                     <a:p>
                       <a:r>
-                        <a:rPr lang="it-IT" dirty="0">
+                        <a:rPr lang="it-IT" sz="1800" b="1" kern="1200" dirty="0" err="1">
                           <a:solidFill>
-                            <a:srgbClr val="FF0000"/>
+                            <a:schemeClr val="tx1"/>
                           </a:solidFill>
+                          <a:latin typeface="+mn-lt"/>
+                          <a:ea typeface="+mn-ea"/>
+                          <a:cs typeface="+mn-cs"/>
                         </a:rPr>
-                        <a:t>Test Neo4J</a:t>
+                        <a:t>Document</a:t>
                       </a:r>
                       <a:r>
-                        <a:rPr lang="it-IT" dirty="0"/>
-                        <a:t>, </a:t>
+                        <a:rPr lang="it-IT" sz="1800" b="1" kern="1200" dirty="0">
+                          <a:solidFill>
+                            <a:schemeClr val="tx1"/>
+                          </a:solidFill>
+                          <a:latin typeface="+mn-lt"/>
+                          <a:ea typeface="+mn-ea"/>
+                          <a:cs typeface="+mn-cs"/>
+                        </a:rPr>
+                        <a:t> model </a:t>
                       </a:r>
                       <a:r>
-                        <a:rPr lang="it-IT" dirty="0" err="1"/>
+                        <a:rPr lang="it-IT" sz="1800" kern="1200" dirty="0">
+                          <a:solidFill>
+                            <a:schemeClr val="tx1"/>
+                          </a:solidFill>
+                          <a:latin typeface="+mn-lt"/>
+                          <a:ea typeface="+mn-ea"/>
+                          <a:cs typeface="+mn-cs"/>
+                        </a:rPr>
+                        <a:t>– </a:t>
+                      </a:r>
+                      <a:r>
+                        <a:rPr lang="it-IT" sz="1800" kern="1200" dirty="0" err="1">
+                          <a:solidFill>
+                            <a:schemeClr val="tx1"/>
+                          </a:solidFill>
+                          <a:latin typeface="+mn-lt"/>
+                          <a:ea typeface="+mn-ea"/>
+                          <a:cs typeface="+mn-cs"/>
+                        </a:rPr>
                         <a:t>MongoDB</a:t>
                       </a:r>
-                      <a:r>
-                        <a:rPr lang="it-IT" dirty="0"/>
-                        <a:t> </a:t>
-                      </a:r>
-                      <a:r>
-                        <a:rPr lang="it-IT" dirty="0" err="1"/>
-                        <a:t>Find</a:t>
-                      </a:r>
-                      <a:endParaRPr lang="it-IT" dirty="0"/>
+                      <a:endParaRPr lang="it-IT" sz="1800" kern="1200" dirty="0">
+                        <a:solidFill>
+                          <a:schemeClr val="tx1"/>
+                        </a:solidFill>
+                        <a:latin typeface="+mn-lt"/>
+                        <a:ea typeface="+mn-ea"/>
+                        <a:cs typeface="+mn-cs"/>
+                      </a:endParaRPr>
                     </a:p>
                   </a:txBody>
-                  <a:tcPr/>
+                  <a:tcPr>
+                    <a:solidFill>
+                      <a:schemeClr val="accent2">
+                        <a:lumMod val="20000"/>
+                        <a:lumOff val="80000"/>
+                      </a:schemeClr>
+                    </a:solidFill>
+                  </a:tcPr>
                 </a:tc>
                 <a:extLst>
                   <a:ext uri="{0D108BD9-81ED-4DB2-BD59-A6C34878D82A}">
@@ -22445,11 +22937,70 @@
                     <a:p>
                       <a:r>
                         <a:rPr lang="it-IT" dirty="0"/>
-                        <a:t>02/05/2024 10-12</a:t>
+                        <a:t>11/05/2026 14-17</a:t>
                       </a:r>
                     </a:p>
                   </a:txBody>
-                  <a:tcPr/>
+                  <a:tcPr>
+                    <a:solidFill>
+                      <a:schemeClr val="accent2">
+                        <a:lumMod val="20000"/>
+                        <a:lumOff val="80000"/>
+                      </a:schemeClr>
+                    </a:solidFill>
+                  </a:tcPr>
+                </a:tc>
+                <a:tc>
+                  <a:txBody>
+                    <a:bodyPr/>
+                    <a:lstStyle/>
+                    <a:p>
+                      <a:r>
+                        <a:rPr lang="it-IT" dirty="0"/>
+                        <a:t>Esercizi </a:t>
+                      </a:r>
+                      <a:r>
+                        <a:rPr lang="it-IT" dirty="0" err="1"/>
+                        <a:t>MongoDB</a:t>
+                      </a:r>
+                      <a:endParaRPr lang="it-IT" dirty="0"/>
+                    </a:p>
+                  </a:txBody>
+                  <a:tcPr>
+                    <a:solidFill>
+                      <a:schemeClr val="accent2">
+                        <a:lumMod val="20000"/>
+                        <a:lumOff val="80000"/>
+                      </a:schemeClr>
+                    </a:solidFill>
+                  </a:tcPr>
+                </a:tc>
+                <a:extLst>
+                  <a:ext uri="{0D108BD9-81ED-4DB2-BD59-A6C34878D82A}">
+                    <a16:rowId xmlns:a16="http://schemas.microsoft.com/office/drawing/2014/main" val="2073778428"/>
+                  </a:ext>
+                </a:extLst>
+              </a:tr>
+              <a:tr h="370840">
+                <a:tc>
+                  <a:txBody>
+                    <a:bodyPr/>
+                    <a:lstStyle/>
+                    <a:p>
+                      <a:r>
+                        <a:rPr lang="it-IT" dirty="0"/>
+                        <a:t>12/05/2026 10-13</a:t>
+                      </a:r>
+                    </a:p>
+                  </a:txBody>
+                  <a:tcPr>
+                    <a:solidFill>
+                      <a:schemeClr val="tx2">
+                        <a:lumMod val="20000"/>
+                        <a:lumOff val="80000"/>
+                      </a:schemeClr>
+                    </a:solidFill>
+                  </a:tcPr>
                 </a:tc>
                 <a:tc>
                   <a:txBody>
@@ -22462,27 +23013,73 @@
                             <a:srgbClr val="FF0000"/>
                           </a:solidFill>
                         </a:rPr>
-                        <a:t>Test </a:t>
-                      </a:r>
-                      <a:r>
-                        <a:rPr lang="it-IT" dirty="0" err="1">
-                          <a:solidFill>
-                            <a:srgbClr val="FF0000"/>
-                          </a:solidFill>
-                        </a:rPr>
-                        <a:t>MongoDB</a:t>
-                      </a:r>
-                      <a:r>
-                        <a:rPr lang="it-IT" dirty="0"/>
-                        <a:t>, …</a:t>
+                        <a:t>Verifica</a:t>
                       </a:r>
                     </a:p>
                   </a:txBody>
-                  <a:tcPr/>
+                  <a:tcPr>
+                    <a:solidFill>
+                      <a:schemeClr val="tx2">
+                        <a:lumMod val="20000"/>
+                        <a:lumOff val="80000"/>
+                      </a:schemeClr>
+                    </a:solidFill>
+                  </a:tcPr>
                 </a:tc>
                 <a:extLst>
                   <a:ext uri="{0D108BD9-81ED-4DB2-BD59-A6C34878D82A}">
-                    <a16:rowId xmlns:a16="http://schemas.microsoft.com/office/drawing/2014/main" val="2073778428"/>
+                    <a16:rowId xmlns:a16="http://schemas.microsoft.com/office/drawing/2014/main" val="401002907"/>
+                  </a:ext>
+                </a:extLst>
+              </a:tr>
+              <a:tr h="370840">
+                <a:tc>
+                  <a:txBody>
+                    <a:bodyPr/>
+                    <a:lstStyle/>
+                    <a:p>
+                      <a:r>
+                        <a:rPr lang="it-IT" dirty="0"/>
+                        <a:t>12/05/2026 14-17</a:t>
+                      </a:r>
+                    </a:p>
+                  </a:txBody>
+                  <a:tcPr>
+                    <a:solidFill>
+                      <a:schemeClr val="tx2">
+                        <a:lumMod val="20000"/>
+                        <a:lumOff val="80000"/>
+                      </a:schemeClr>
+                    </a:solidFill>
+                  </a:tcPr>
+                </a:tc>
+                <a:tc>
+                  <a:txBody>
+                    <a:bodyPr/>
+                    <a:lstStyle/>
+                    <a:p>
+                      <a:r>
+                        <a:rPr lang="it-IT" dirty="0">
+                          <a:solidFill>
+                            <a:schemeClr val="tx1"/>
+                          </a:solidFill>
+                        </a:rPr>
+                        <a:t>Caso di studio - Una piattaforma dati per la ricerca</a:t>
+                      </a:r>
+                    </a:p>
+                  </a:txBody>
+                  <a:tcPr>
+                    <a:solidFill>
+                      <a:schemeClr val="tx2">
+                        <a:lumMod val="20000"/>
+                        <a:lumOff val="80000"/>
+                      </a:schemeClr>
+                    </a:solidFill>
+                  </a:tcPr>
+                </a:tc>
+                <a:extLst>
+                  <a:ext uri="{0D108BD9-81ED-4DB2-BD59-A6C34878D82A}">
+                    <a16:rowId xmlns:a16="http://schemas.microsoft.com/office/drawing/2014/main" val="2799736118"/>
                   </a:ext>
                 </a:extLst>
               </a:tr>
@@ -22490,41 +23087,6 @@
           </a:graphicData>
         </a:graphic>
       </p:graphicFrame>
-      <p:sp>
-        <p:nvSpPr>
-          <p:cNvPr id="7" name="CasellaDiTesto 6">
-            <a:extLst>
-              <a:ext uri="{FF2B5EF4-FFF2-40B4-BE49-F238E27FC236}">
-                <a16:creationId xmlns:a16="http://schemas.microsoft.com/office/drawing/2014/main" id="{374EA9B8-E8F0-FA38-BFFC-A354B338452A}"/>
-              </a:ext>
-            </a:extLst>
-          </p:cNvPr>
-          <p:cNvSpPr txBox="1"/>
-          <p:nvPr/>
-        </p:nvSpPr>
-        <p:spPr>
-          <a:xfrm>
-            <a:off x="838200" y="5574376"/>
-            <a:ext cx="7534013" cy="369332"/>
-          </a:xfrm>
-          <a:prstGeom prst="rect">
-            <a:avLst/>
-          </a:prstGeom>
-          <a:noFill/>
-        </p:spPr>
-        <p:txBody>
-          <a:bodyPr wrap="square">
-            <a:spAutoFit/>
-          </a:bodyPr>
-          <a:lstStyle/>
-          <a:p>
-            <a:r>
-              <a:rPr lang="it-IT" b="1" dirty="0"/>
-              <a:t>Il calendario verrà aggiornato di volta in volta, nel sito del materiale!</a:t>
-            </a:r>
-          </a:p>
-        </p:txBody>
-      </p:sp>
     </p:spTree>
     <p:extLst>
       <p:ext uri="{BB962C8B-B14F-4D97-AF65-F5344CB8AC3E}">
@@ -22654,31 +23216,6 @@
           </a:p>
         </p:txBody>
       </p:sp>
-      <p:sp>
-        <p:nvSpPr>
-          <p:cNvPr id="7" name="Segnaposto contenuto 6">
-            <a:extLst>
-              <a:ext uri="{FF2B5EF4-FFF2-40B4-BE49-F238E27FC236}">
-                <a16:creationId xmlns:a16="http://schemas.microsoft.com/office/drawing/2014/main" id="{2F9E0C95-B0D8-4B87-84E3-BE1DAB961041}"/>
-              </a:ext>
-            </a:extLst>
-          </p:cNvPr>
-          <p:cNvSpPr>
-            <a:spLocks noGrp="1"/>
-          </p:cNvSpPr>
-          <p:nvPr>
-            <p:ph idx="13"/>
-          </p:nvPr>
-        </p:nvSpPr>
-        <p:spPr/>
-        <p:txBody>
-          <a:bodyPr/>
-          <a:lstStyle/>
-          <a:p>
-            <a:endParaRPr lang="en-US"/>
-          </a:p>
-        </p:txBody>
-      </p:sp>
       <p:pic>
         <p:nvPicPr>
           <p:cNvPr id="8" name="Segnaposto contenuto 7">
@@ -22711,6 +23248,31 @@
           </a:prstGeom>
         </p:spPr>
       </p:pic>
+      <p:sp>
+        <p:nvSpPr>
+          <p:cNvPr id="7" name="Segnaposto contenuto 6">
+            <a:extLst>
+              <a:ext uri="{FF2B5EF4-FFF2-40B4-BE49-F238E27FC236}">
+                <a16:creationId xmlns:a16="http://schemas.microsoft.com/office/drawing/2014/main" id="{2F9E0C95-B0D8-4B87-84E3-BE1DAB961041}"/>
+              </a:ext>
+            </a:extLst>
+          </p:cNvPr>
+          <p:cNvSpPr>
+            <a:spLocks noGrp="1"/>
+          </p:cNvSpPr>
+          <p:nvPr>
+            <p:ph idx="13"/>
+          </p:nvPr>
+        </p:nvSpPr>
+        <p:spPr/>
+        <p:txBody>
+          <a:bodyPr/>
+          <a:lstStyle/>
+          <a:p>
+            <a:endParaRPr lang="en-US"/>
+          </a:p>
+        </p:txBody>
+      </p:sp>
     </p:spTree>
     <p:extLst>
       <p:ext uri="{BB962C8B-B14F-4D97-AF65-F5344CB8AC3E}">
@@ -22743,129 +23305,6 @@
       </p:grpSpPr>
       <p:sp>
         <p:nvSpPr>
-          <p:cNvPr id="5" name="Segnaposto contenuto 2"/>
-          <p:cNvSpPr>
-            <a:spLocks noGrp="1"/>
-          </p:cNvSpPr>
-          <p:nvPr>
-            <p:ph sz="quarter" idx="1"/>
-          </p:nvPr>
-        </p:nvSpPr>
-        <p:spPr>
-          <a:xfrm>
-            <a:off x="1097280" y="1243914"/>
-            <a:ext cx="10058400" cy="4625180"/>
-          </a:xfrm>
-        </p:spPr>
-        <p:txBody>
-          <a:bodyPr>
-            <a:normAutofit/>
-          </a:bodyPr>
-          <a:lstStyle/>
-          <a:p>
-            <a:r>
-              <a:rPr lang="it-IT" b="1" dirty="0"/>
-              <a:t>Replication</a:t>
-            </a:r>
-            <a:r>
-              <a:rPr lang="it-IT" dirty="0"/>
-              <a:t>: i dati vengono </a:t>
-            </a:r>
-            <a:r>
-              <a:rPr lang="it-IT" dirty="0">
-                <a:solidFill>
-                  <a:srgbClr val="0070C0"/>
-                </a:solidFill>
-              </a:rPr>
-              <a:t>copiati</a:t>
-            </a:r>
-            <a:r>
-              <a:rPr lang="it-IT" dirty="0"/>
-              <a:t> su diversi nodi</a:t>
-            </a:r>
-          </a:p>
-          <a:p>
-            <a:r>
-              <a:rPr lang="it-IT" dirty="0"/>
-              <a:t>Come gestire la distribuzione delle repliche nei nodi?</a:t>
-            </a:r>
-          </a:p>
-          <a:p>
-            <a:pPr lvl="1"/>
-            <a:r>
-              <a:rPr lang="it-IT" dirty="0"/>
-              <a:t>Principio comunemente adottato:</a:t>
-            </a:r>
-          </a:p>
-          <a:p>
-            <a:pPr lvl="2"/>
-            <a:r>
-              <a:rPr lang="it-IT" dirty="0"/>
-              <a:t>Una replica nel nodo che riceve il dato</a:t>
-            </a:r>
-          </a:p>
-          <a:p>
-            <a:pPr lvl="2"/>
-            <a:r>
-              <a:rPr lang="it-IT" dirty="0"/>
-              <a:t>Una replica in un nodo diverso all’interno dello stesso </a:t>
-            </a:r>
-            <a:r>
-              <a:rPr lang="it-IT" dirty="0" err="1"/>
-              <a:t>rack</a:t>
-            </a:r>
-            <a:endParaRPr lang="it-IT" dirty="0"/>
-          </a:p>
-          <a:p>
-            <a:pPr lvl="2"/>
-            <a:r>
-              <a:rPr lang="it-IT" dirty="0"/>
-              <a:t>Una replica in un nodo all’interno di un </a:t>
-            </a:r>
-            <a:r>
-              <a:rPr lang="it-IT" dirty="0" err="1"/>
-              <a:t>rack</a:t>
-            </a:r>
-            <a:r>
-              <a:rPr lang="it-IT" dirty="0"/>
-              <a:t> diverso</a:t>
-            </a:r>
-          </a:p>
-          <a:p>
-            <a:r>
-              <a:rPr lang="it-IT" dirty="0"/>
-              <a:t>Ogni aggiornamento ad un dato richiede la propagazione delle modifiche a tutte le sue repliche</a:t>
-            </a:r>
-          </a:p>
-          <a:p>
-            <a:r>
-              <a:rPr lang="it-IT" dirty="0"/>
-              <a:t>Due tecniche per gestire gli aggiornamenti:</a:t>
-            </a:r>
-          </a:p>
-          <a:p>
-            <a:pPr lvl="1"/>
-            <a:r>
-              <a:rPr lang="it-IT" dirty="0"/>
-              <a:t>Master-slave</a:t>
-            </a:r>
-          </a:p>
-          <a:p>
-            <a:pPr lvl="1"/>
-            <a:r>
-              <a:rPr lang="it-IT" dirty="0"/>
-              <a:t>Peer to </a:t>
-            </a:r>
-            <a:r>
-              <a:rPr lang="it-IT" dirty="0" err="1"/>
-              <a:t>peer</a:t>
-            </a:r>
-            <a:endParaRPr lang="it-IT" dirty="0"/>
-          </a:p>
-        </p:txBody>
-      </p:sp>
-      <p:sp>
-        <p:nvSpPr>
           <p:cNvPr id="2" name="Titolo 1"/>
           <p:cNvSpPr>
             <a:spLocks noGrp="1"/>
@@ -22885,6 +23324,129 @@
               <a:rPr lang="it-IT" noProof="0" dirty="0"/>
               <a:t>Replication</a:t>
             </a:r>
+          </a:p>
+        </p:txBody>
+      </p:sp>
+      <p:sp>
+        <p:nvSpPr>
+          <p:cNvPr id="5" name="Segnaposto contenuto 2"/>
+          <p:cNvSpPr>
+            <a:spLocks noGrp="1"/>
+          </p:cNvSpPr>
+          <p:nvPr>
+            <p:ph idx="1"/>
+          </p:nvPr>
+        </p:nvSpPr>
+        <p:spPr>
+          <a:xfrm>
+            <a:off x="1097280" y="1243914"/>
+            <a:ext cx="10058400" cy="4625180"/>
+          </a:xfrm>
+        </p:spPr>
+        <p:txBody>
+          <a:bodyPr>
+            <a:normAutofit/>
+          </a:bodyPr>
+          <a:lstStyle/>
+          <a:p>
+            <a:r>
+              <a:rPr lang="it-IT" b="1" dirty="0"/>
+              <a:t>Replication</a:t>
+            </a:r>
+            <a:r>
+              <a:rPr lang="it-IT" dirty="0"/>
+              <a:t>: i dati vengono </a:t>
+            </a:r>
+            <a:r>
+              <a:rPr lang="it-IT" dirty="0">
+                <a:solidFill>
+                  <a:srgbClr val="0070C0"/>
+                </a:solidFill>
+              </a:rPr>
+              <a:t>copiati</a:t>
+            </a:r>
+            <a:r>
+              <a:rPr lang="it-IT" dirty="0"/>
+              <a:t> su diversi nodi</a:t>
+            </a:r>
+          </a:p>
+          <a:p>
+            <a:r>
+              <a:rPr lang="it-IT" dirty="0"/>
+              <a:t>Come gestire la distribuzione delle repliche nei nodi?</a:t>
+            </a:r>
+          </a:p>
+          <a:p>
+            <a:pPr lvl="1"/>
+            <a:r>
+              <a:rPr lang="it-IT" dirty="0"/>
+              <a:t>Principio comunemente adottato:</a:t>
+            </a:r>
+          </a:p>
+          <a:p>
+            <a:pPr lvl="2"/>
+            <a:r>
+              <a:rPr lang="it-IT" dirty="0"/>
+              <a:t>Una replica nel nodo che riceve il dato</a:t>
+            </a:r>
+          </a:p>
+          <a:p>
+            <a:pPr lvl="2"/>
+            <a:r>
+              <a:rPr lang="it-IT" dirty="0"/>
+              <a:t>Una replica in un nodo diverso all’interno dello stesso </a:t>
+            </a:r>
+            <a:r>
+              <a:rPr lang="it-IT" dirty="0" err="1"/>
+              <a:t>rack</a:t>
+            </a:r>
+            <a:endParaRPr lang="it-IT" dirty="0"/>
+          </a:p>
+          <a:p>
+            <a:pPr lvl="2"/>
+            <a:r>
+              <a:rPr lang="it-IT" dirty="0"/>
+              <a:t>Una replica in un nodo all’interno di un </a:t>
+            </a:r>
+            <a:r>
+              <a:rPr lang="it-IT" dirty="0" err="1"/>
+              <a:t>rack</a:t>
+            </a:r>
+            <a:r>
+              <a:rPr lang="it-IT" dirty="0"/>
+              <a:t> diverso</a:t>
+            </a:r>
+          </a:p>
+          <a:p>
+            <a:r>
+              <a:rPr lang="it-IT" dirty="0"/>
+              <a:t>Ogni aggiornamento ad un dato richiede la propagazione delle modifiche a tutte le sue repliche</a:t>
+            </a:r>
+          </a:p>
+          <a:p>
+            <a:r>
+              <a:rPr lang="it-IT" dirty="0"/>
+              <a:t>Due tecniche per gestire gli aggiornamenti:</a:t>
+            </a:r>
+          </a:p>
+          <a:p>
+            <a:pPr lvl="1"/>
+            <a:r>
+              <a:rPr lang="it-IT" dirty="0"/>
+              <a:t>Master-slave</a:t>
+            </a:r>
+          </a:p>
+          <a:p>
+            <a:pPr lvl="1"/>
+            <a:r>
+              <a:rPr lang="it-IT" dirty="0"/>
+              <a:t>Peer to </a:t>
+            </a:r>
+            <a:r>
+              <a:rPr lang="it-IT" dirty="0" err="1"/>
+              <a:t>peer</a:t>
+            </a:r>
+            <a:endParaRPr lang="it-IT" dirty="0"/>
           </a:p>
         </p:txBody>
       </p:sp>
@@ -23199,7 +23761,7 @@
             <a:spLocks noGrp="1"/>
           </p:cNvSpPr>
           <p:nvPr>
-            <p:ph sz="quarter" idx="1"/>
+            <p:ph idx="1"/>
           </p:nvPr>
         </p:nvSpPr>
         <p:spPr/>
@@ -23637,31 +24199,6 @@
           </a:p>
         </p:txBody>
       </p:sp>
-      <p:sp>
-        <p:nvSpPr>
-          <p:cNvPr id="10" name="Segnaposto contenuto 9">
-            <a:extLst>
-              <a:ext uri="{FF2B5EF4-FFF2-40B4-BE49-F238E27FC236}">
-                <a16:creationId xmlns:a16="http://schemas.microsoft.com/office/drawing/2014/main" id="{69A0A2EB-5654-492C-BE1A-503C31F0CDB7}"/>
-              </a:ext>
-            </a:extLst>
-          </p:cNvPr>
-          <p:cNvSpPr>
-            <a:spLocks noGrp="1"/>
-          </p:cNvSpPr>
-          <p:nvPr>
-            <p:ph idx="13"/>
-          </p:nvPr>
-        </p:nvSpPr>
-        <p:spPr/>
-        <p:txBody>
-          <a:bodyPr/>
-          <a:lstStyle/>
-          <a:p>
-            <a:endParaRPr lang="en-US"/>
-          </a:p>
-        </p:txBody>
-      </p:sp>
       <p:pic>
         <p:nvPicPr>
           <p:cNvPr id="11" name="Segnaposto contenuto 10">
@@ -23694,6 +24231,31 @@
           </a:prstGeom>
         </p:spPr>
       </p:pic>
+      <p:sp>
+        <p:nvSpPr>
+          <p:cNvPr id="10" name="Segnaposto contenuto 9">
+            <a:extLst>
+              <a:ext uri="{FF2B5EF4-FFF2-40B4-BE49-F238E27FC236}">
+                <a16:creationId xmlns:a16="http://schemas.microsoft.com/office/drawing/2014/main" id="{69A0A2EB-5654-492C-BE1A-503C31F0CDB7}"/>
+              </a:ext>
+            </a:extLst>
+          </p:cNvPr>
+          <p:cNvSpPr>
+            <a:spLocks noGrp="1"/>
+          </p:cNvSpPr>
+          <p:nvPr>
+            <p:ph idx="13"/>
+          </p:nvPr>
+        </p:nvSpPr>
+        <p:spPr/>
+        <p:txBody>
+          <a:bodyPr/>
+          <a:lstStyle/>
+          <a:p>
+            <a:endParaRPr lang="en-US"/>
+          </a:p>
+        </p:txBody>
+      </p:sp>
     </p:spTree>
     <p:extLst>
       <p:ext uri="{BB962C8B-B14F-4D97-AF65-F5344CB8AC3E}">
@@ -23767,7 +24329,7 @@
             <a:spLocks noGrp="1"/>
           </p:cNvSpPr>
           <p:nvPr>
-            <p:ph sz="quarter" idx="1"/>
+            <p:ph idx="1"/>
           </p:nvPr>
         </p:nvSpPr>
         <p:spPr/>
@@ -23944,211 +24506,6 @@
       </p:grpSpPr>
       <p:sp>
         <p:nvSpPr>
-          <p:cNvPr id="4" name="Segnaposto contenuto 3"/>
-          <p:cNvSpPr>
-            <a:spLocks noGrp="1"/>
-          </p:cNvSpPr>
-          <p:nvPr>
-            <p:ph sz="quarter" idx="1"/>
-          </p:nvPr>
-        </p:nvSpPr>
-        <p:spPr/>
-        <p:txBody>
-          <a:bodyPr/>
-          <a:lstStyle/>
-          <a:p>
-            <a:r>
-              <a:rPr lang="it-IT" dirty="0"/>
-              <a:t>Conflitti in lettura</a:t>
-            </a:r>
-          </a:p>
-          <a:p>
-            <a:pPr lvl="1"/>
-            <a:r>
-              <a:rPr lang="it-IT" dirty="0">
-                <a:solidFill>
-                  <a:schemeClr val="accent2"/>
-                </a:solidFill>
-              </a:rPr>
-              <a:t>Tolleranza</a:t>
-            </a:r>
-            <a:r>
-              <a:rPr lang="it-IT" dirty="0">
-                <a:solidFill>
-                  <a:srgbClr val="FF0000"/>
-                </a:solidFill>
-              </a:rPr>
-              <a:t>: </a:t>
-            </a:r>
-            <a:r>
-              <a:rPr lang="it-IT" dirty="0"/>
-              <a:t>la finestra di inconsistenza è solitamente limitata</a:t>
-            </a:r>
-          </a:p>
-          <a:p>
-            <a:pPr lvl="1"/>
-            <a:r>
-              <a:rPr lang="it-IT" dirty="0">
-                <a:solidFill>
-                  <a:schemeClr val="accent2"/>
-                </a:solidFill>
-              </a:rPr>
-              <a:t>Read-</a:t>
-            </a:r>
-            <a:r>
-              <a:rPr lang="it-IT" dirty="0" err="1">
-                <a:solidFill>
-                  <a:schemeClr val="accent2"/>
-                </a:solidFill>
-              </a:rPr>
-              <a:t>your</a:t>
-            </a:r>
-            <a:r>
-              <a:rPr lang="it-IT" dirty="0">
-                <a:solidFill>
-                  <a:schemeClr val="accent2"/>
-                </a:solidFill>
-              </a:rPr>
-              <a:t>-</a:t>
-            </a:r>
-            <a:r>
-              <a:rPr lang="it-IT" dirty="0" err="1">
-                <a:solidFill>
-                  <a:schemeClr val="accent2"/>
-                </a:solidFill>
-              </a:rPr>
-              <a:t>writes</a:t>
-            </a:r>
-            <a:r>
-              <a:rPr lang="it-IT" dirty="0">
-                <a:solidFill>
-                  <a:schemeClr val="accent2"/>
-                </a:solidFill>
-              </a:rPr>
-              <a:t>:</a:t>
-            </a:r>
-            <a:r>
-              <a:rPr lang="it-IT" dirty="0">
-                <a:solidFill>
-                  <a:srgbClr val="FF0000"/>
-                </a:solidFill>
-              </a:rPr>
-              <a:t> </a:t>
-            </a:r>
-            <a:r>
-              <a:rPr lang="it-IT" dirty="0"/>
-              <a:t>la consistenza in lettura è garantita rispetto alle proprie modifiche</a:t>
-            </a:r>
-          </a:p>
-          <a:p>
-            <a:pPr lvl="2"/>
-            <a:r>
-              <a:rPr lang="it-IT" dirty="0"/>
-              <a:t>Si associa un utente ad un unico nodo (rischio: carico di lavoro sbilanciato)</a:t>
-            </a:r>
-          </a:p>
-          <a:p>
-            <a:pPr lvl="2"/>
-            <a:r>
-              <a:rPr lang="it-IT" dirty="0"/>
-              <a:t>Si usano campi di </a:t>
-            </a:r>
-            <a:r>
-              <a:rPr lang="it-IT" dirty="0" err="1"/>
-              <a:t>versionamento</a:t>
-            </a:r>
-            <a:r>
-              <a:rPr lang="it-IT" dirty="0"/>
-              <a:t> per assicurarsi che nessuno abbia modificato il valore dall’ultima lettura</a:t>
-            </a:r>
-          </a:p>
-          <a:p>
-            <a:r>
-              <a:rPr lang="it-IT" dirty="0"/>
-              <a:t>Conflitti in scrittura (modello P2P)</a:t>
-            </a:r>
-          </a:p>
-          <a:p>
-            <a:pPr lvl="1"/>
-            <a:r>
-              <a:rPr lang="it-IT" dirty="0">
-                <a:solidFill>
-                  <a:srgbClr val="0070C0"/>
-                </a:solidFill>
-              </a:rPr>
-              <a:t>Last </a:t>
-            </a:r>
-            <a:r>
-              <a:rPr lang="it-IT" dirty="0" err="1">
-                <a:solidFill>
-                  <a:srgbClr val="0070C0"/>
-                </a:solidFill>
-              </a:rPr>
-              <a:t>write</a:t>
-            </a:r>
-            <a:r>
-              <a:rPr lang="it-IT" dirty="0">
-                <a:solidFill>
-                  <a:srgbClr val="0070C0"/>
-                </a:solidFill>
-              </a:rPr>
-              <a:t> </a:t>
-            </a:r>
-            <a:r>
-              <a:rPr lang="it-IT" dirty="0" err="1">
-                <a:solidFill>
-                  <a:srgbClr val="0070C0"/>
-                </a:solidFill>
-              </a:rPr>
-              <a:t>wins</a:t>
-            </a:r>
-            <a:r>
-              <a:rPr lang="it-IT" dirty="0">
-                <a:solidFill>
-                  <a:srgbClr val="0070C0"/>
-                </a:solidFill>
-              </a:rPr>
-              <a:t>: </a:t>
-            </a:r>
-            <a:r>
-              <a:rPr lang="it-IT" dirty="0"/>
-              <a:t>l’ultimo update sovrascrive i precedenti</a:t>
-            </a:r>
-          </a:p>
-          <a:p>
-            <a:pPr lvl="1"/>
-            <a:r>
-              <a:rPr lang="it-IT" dirty="0">
-                <a:solidFill>
-                  <a:srgbClr val="0070C0"/>
-                </a:solidFill>
-              </a:rPr>
-              <a:t>Prevenzione</a:t>
-            </a:r>
-            <a:r>
-              <a:rPr lang="it-IT" dirty="0"/>
-              <a:t>: nuove scritture solo sulla versione più recente</a:t>
-            </a:r>
-          </a:p>
-          <a:p>
-            <a:pPr lvl="1"/>
-            <a:r>
-              <a:rPr lang="it-IT" dirty="0">
-                <a:solidFill>
-                  <a:srgbClr val="0070C0"/>
-                </a:solidFill>
-              </a:rPr>
-              <a:t>Rilevamento</a:t>
-            </a:r>
-            <a:r>
-              <a:rPr lang="it-IT" dirty="0"/>
-              <a:t>: si mantiene la cronologia delle modifiche e si segnala il problema all’utente, lasciandogli facoltà di decidere quale versione confermare</a:t>
-            </a:r>
-          </a:p>
-        </p:txBody>
-      </p:sp>
-      <p:sp>
-        <p:nvSpPr>
           <p:cNvPr id="2" name="Titolo 1"/>
           <p:cNvSpPr>
             <a:spLocks noGrp="1"/>
@@ -24169,6 +24526,211 @@
               <a:t>Consistenza con replicazione: gestire i conflitti</a:t>
             </a:r>
             <a:endParaRPr lang="it-IT" noProof="0" dirty="0"/>
+          </a:p>
+        </p:txBody>
+      </p:sp>
+      <p:sp>
+        <p:nvSpPr>
+          <p:cNvPr id="4" name="Segnaposto contenuto 3"/>
+          <p:cNvSpPr>
+            <a:spLocks noGrp="1"/>
+          </p:cNvSpPr>
+          <p:nvPr>
+            <p:ph idx="1"/>
+          </p:nvPr>
+        </p:nvSpPr>
+        <p:spPr/>
+        <p:txBody>
+          <a:bodyPr/>
+          <a:lstStyle/>
+          <a:p>
+            <a:r>
+              <a:rPr lang="it-IT" dirty="0"/>
+              <a:t>Conflitti in lettura</a:t>
+            </a:r>
+          </a:p>
+          <a:p>
+            <a:pPr lvl="1"/>
+            <a:r>
+              <a:rPr lang="it-IT" dirty="0">
+                <a:solidFill>
+                  <a:schemeClr val="accent2"/>
+                </a:solidFill>
+              </a:rPr>
+              <a:t>Tolleranza</a:t>
+            </a:r>
+            <a:r>
+              <a:rPr lang="it-IT" dirty="0">
+                <a:solidFill>
+                  <a:srgbClr val="FF0000"/>
+                </a:solidFill>
+              </a:rPr>
+              <a:t>: </a:t>
+            </a:r>
+            <a:r>
+              <a:rPr lang="it-IT" dirty="0"/>
+              <a:t>la finestra di inconsistenza è solitamente limitata</a:t>
+            </a:r>
+          </a:p>
+          <a:p>
+            <a:pPr lvl="1"/>
+            <a:r>
+              <a:rPr lang="it-IT" dirty="0">
+                <a:solidFill>
+                  <a:schemeClr val="accent2"/>
+                </a:solidFill>
+              </a:rPr>
+              <a:t>Read-</a:t>
+            </a:r>
+            <a:r>
+              <a:rPr lang="it-IT" dirty="0" err="1">
+                <a:solidFill>
+                  <a:schemeClr val="accent2"/>
+                </a:solidFill>
+              </a:rPr>
+              <a:t>your</a:t>
+            </a:r>
+            <a:r>
+              <a:rPr lang="it-IT" dirty="0">
+                <a:solidFill>
+                  <a:schemeClr val="accent2"/>
+                </a:solidFill>
+              </a:rPr>
+              <a:t>-</a:t>
+            </a:r>
+            <a:r>
+              <a:rPr lang="it-IT" dirty="0" err="1">
+                <a:solidFill>
+                  <a:schemeClr val="accent2"/>
+                </a:solidFill>
+              </a:rPr>
+              <a:t>writes</a:t>
+            </a:r>
+            <a:r>
+              <a:rPr lang="it-IT" dirty="0">
+                <a:solidFill>
+                  <a:schemeClr val="accent2"/>
+                </a:solidFill>
+              </a:rPr>
+              <a:t>:</a:t>
+            </a:r>
+            <a:r>
+              <a:rPr lang="it-IT" dirty="0">
+                <a:solidFill>
+                  <a:srgbClr val="FF0000"/>
+                </a:solidFill>
+              </a:rPr>
+              <a:t> </a:t>
+            </a:r>
+            <a:r>
+              <a:rPr lang="it-IT" dirty="0"/>
+              <a:t>la consistenza in lettura è garantita rispetto alle proprie modifiche</a:t>
+            </a:r>
+          </a:p>
+          <a:p>
+            <a:pPr lvl="2"/>
+            <a:r>
+              <a:rPr lang="it-IT" dirty="0"/>
+              <a:t>Si associa un utente ad un unico nodo (rischio: carico di lavoro sbilanciato)</a:t>
+            </a:r>
+          </a:p>
+          <a:p>
+            <a:pPr lvl="2"/>
+            <a:r>
+              <a:rPr lang="it-IT" dirty="0"/>
+              <a:t>Si usano campi di </a:t>
+            </a:r>
+            <a:r>
+              <a:rPr lang="it-IT" dirty="0" err="1"/>
+              <a:t>versionamento</a:t>
+            </a:r>
+            <a:r>
+              <a:rPr lang="it-IT" dirty="0"/>
+              <a:t> per assicurarsi che nessuno abbia modificato il valore dall’ultima lettura</a:t>
+            </a:r>
+          </a:p>
+          <a:p>
+            <a:r>
+              <a:rPr lang="it-IT" dirty="0"/>
+              <a:t>Conflitti in scrittura (modello P2P)</a:t>
+            </a:r>
+          </a:p>
+          <a:p>
+            <a:pPr lvl="1"/>
+            <a:r>
+              <a:rPr lang="it-IT" dirty="0">
+                <a:solidFill>
+                  <a:srgbClr val="0070C0"/>
+                </a:solidFill>
+              </a:rPr>
+              <a:t>Last </a:t>
+            </a:r>
+            <a:r>
+              <a:rPr lang="it-IT" dirty="0" err="1">
+                <a:solidFill>
+                  <a:srgbClr val="0070C0"/>
+                </a:solidFill>
+              </a:rPr>
+              <a:t>write</a:t>
+            </a:r>
+            <a:r>
+              <a:rPr lang="it-IT" dirty="0">
+                <a:solidFill>
+                  <a:srgbClr val="0070C0"/>
+                </a:solidFill>
+              </a:rPr>
+              <a:t> </a:t>
+            </a:r>
+            <a:r>
+              <a:rPr lang="it-IT" dirty="0" err="1">
+                <a:solidFill>
+                  <a:srgbClr val="0070C0"/>
+                </a:solidFill>
+              </a:rPr>
+              <a:t>wins</a:t>
+            </a:r>
+            <a:r>
+              <a:rPr lang="it-IT" dirty="0">
+                <a:solidFill>
+                  <a:srgbClr val="0070C0"/>
+                </a:solidFill>
+              </a:rPr>
+              <a:t>: </a:t>
+            </a:r>
+            <a:r>
+              <a:rPr lang="it-IT" dirty="0"/>
+              <a:t>l’ultimo update sovrascrive i precedenti</a:t>
+            </a:r>
+          </a:p>
+          <a:p>
+            <a:pPr lvl="1"/>
+            <a:r>
+              <a:rPr lang="it-IT" dirty="0">
+                <a:solidFill>
+                  <a:srgbClr val="0070C0"/>
+                </a:solidFill>
+              </a:rPr>
+              <a:t>Prevenzione</a:t>
+            </a:r>
+            <a:r>
+              <a:rPr lang="it-IT" dirty="0"/>
+              <a:t>: nuove scritture solo sulla versione più recente</a:t>
+            </a:r>
+          </a:p>
+          <a:p>
+            <a:pPr lvl="1"/>
+            <a:r>
+              <a:rPr lang="it-IT" dirty="0">
+                <a:solidFill>
+                  <a:srgbClr val="0070C0"/>
+                </a:solidFill>
+              </a:rPr>
+              <a:t>Rilevamento</a:t>
+            </a:r>
+            <a:r>
+              <a:rPr lang="it-IT" dirty="0"/>
+              <a:t>: si mantiene la cronologia delle modifiche e si segnala il problema all’utente, lasciandogli facoltà di decidere quale versione confermare</a:t>
+            </a:r>
           </a:p>
         </p:txBody>
       </p:sp>
@@ -24246,7 +24808,7 @@
             <a:spLocks noGrp="1"/>
           </p:cNvSpPr>
           <p:nvPr>
-            <p:ph sz="quarter" idx="1"/>
+            <p:ph idx="1"/>
           </p:nvPr>
         </p:nvSpPr>
         <p:spPr/>
@@ -25728,12 +26290,7 @@
             <p:ph type="title"/>
           </p:nvPr>
         </p:nvSpPr>
-        <p:spPr>
-          <a:xfrm>
-            <a:off x="838200" y="365125"/>
-            <a:ext cx="10515600" cy="1325563"/>
-          </a:xfrm>
-        </p:spPr>
+        <p:spPr/>
         <p:txBody>
           <a:bodyPr/>
           <a:lstStyle/>
@@ -25763,12 +26320,7 @@
             <p:ph sz="half" idx="1"/>
           </p:nvPr>
         </p:nvSpPr>
-        <p:spPr>
-          <a:xfrm>
-            <a:off x="838200" y="1825625"/>
-            <a:ext cx="5181600" cy="4351338"/>
-          </a:xfrm>
-        </p:spPr>
+        <p:spPr/>
         <p:txBody>
           <a:bodyPr/>
           <a:lstStyle/>
@@ -25838,12 +26390,7 @@
             <p:ph sz="half" idx="2"/>
           </p:nvPr>
         </p:nvSpPr>
-        <p:spPr>
-          <a:xfrm>
-            <a:off x="6172200" y="1825625"/>
-            <a:ext cx="5181600" cy="4351338"/>
-          </a:xfrm>
-        </p:spPr>
+        <p:spPr/>
         <p:txBody>
           <a:bodyPr/>
           <a:lstStyle/>
@@ -27988,7 +28535,7 @@
             <a:spLocks noGrp="1"/>
           </p:cNvSpPr>
           <p:nvPr>
-            <p:ph sz="quarter" idx="1"/>
+            <p:ph idx="1"/>
           </p:nvPr>
         </p:nvSpPr>
         <p:spPr>
@@ -29276,7 +29823,7 @@
             <a:spLocks noGrp="1"/>
           </p:cNvSpPr>
           <p:nvPr>
-            <p:ph sz="quarter" idx="1"/>
+            <p:ph idx="1"/>
           </p:nvPr>
         </p:nvSpPr>
         <p:spPr/>
@@ -29586,7 +30133,7 @@
             <a:spLocks noGrp="1"/>
           </p:cNvSpPr>
           <p:nvPr>
-            <p:ph sz="quarter" idx="1"/>
+            <p:ph idx="1"/>
           </p:nvPr>
         </p:nvSpPr>
         <p:spPr/>
@@ -29867,7 +30414,7 @@
             <a:spLocks noGrp="1"/>
           </p:cNvSpPr>
           <p:nvPr>
-            <p:ph sz="quarter" idx="1"/>
+            <p:ph idx="1"/>
           </p:nvPr>
         </p:nvSpPr>
         <p:spPr/>
@@ -30170,7 +30717,7 @@
             <a:spLocks noGrp="1"/>
           </p:cNvSpPr>
           <p:nvPr>
-            <p:ph sz="quarter" idx="1"/>
+            <p:ph idx="1"/>
           </p:nvPr>
         </p:nvSpPr>
         <p:spPr/>
@@ -30318,7 +30865,7 @@
             <a:spLocks noGrp="1"/>
           </p:cNvSpPr>
           <p:nvPr>
-            <p:ph sz="quarter" idx="1"/>
+            <p:ph idx="1"/>
           </p:nvPr>
         </p:nvSpPr>
         <p:spPr/>
@@ -30520,7 +31067,7 @@
             <a:spLocks noGrp="1"/>
           </p:cNvSpPr>
           <p:nvPr>
-            <p:ph sz="quarter" idx="1"/>
+            <p:ph idx="1"/>
           </p:nvPr>
         </p:nvSpPr>
         <p:spPr>
@@ -30870,7 +31417,7 @@
             <a:spLocks noGrp="1"/>
           </p:cNvSpPr>
           <p:nvPr>
-            <p:ph sz="quarter" idx="1"/>
+            <p:ph idx="1"/>
           </p:nvPr>
         </p:nvSpPr>
         <p:spPr/>
@@ -31044,7 +31591,7 @@
             <a:spLocks noGrp="1"/>
           </p:cNvSpPr>
           <p:nvPr>
-            <p:ph sz="quarter" idx="1"/>
+            <p:ph idx="1"/>
           </p:nvPr>
         </p:nvSpPr>
         <p:spPr/>
@@ -31389,7 +31936,7 @@
             <a:spLocks noGrp="1"/>
           </p:cNvSpPr>
           <p:nvPr>
-            <p:ph sz="quarter" idx="1"/>
+            <p:ph idx="1"/>
           </p:nvPr>
         </p:nvSpPr>
         <p:spPr/>
@@ -31543,120 +32090,6 @@
       </p:grpSpPr>
       <p:sp>
         <p:nvSpPr>
-          <p:cNvPr id="9" name="Segnaposto contenuto 3"/>
-          <p:cNvSpPr>
-            <a:spLocks noGrp="1"/>
-          </p:cNvSpPr>
-          <p:nvPr>
-            <p:ph sz="quarter" idx="1"/>
-          </p:nvPr>
-        </p:nvSpPr>
-        <p:spPr>
-          <a:xfrm>
-            <a:off x="1097280" y="1243914"/>
-            <a:ext cx="10058400" cy="4625180"/>
-          </a:xfrm>
-        </p:spPr>
-        <p:txBody>
-          <a:bodyPr>
-            <a:normAutofit/>
-          </a:bodyPr>
-          <a:lstStyle/>
-          <a:p>
-            <a:r>
-              <a:rPr lang="it-IT" dirty="0"/>
-              <a:t>Compromesso tra espressività e semplicità, sia a livello di modellazione che di interrogazione dei dati</a:t>
-            </a:r>
-          </a:p>
-          <a:p>
-            <a:r>
-              <a:rPr lang="it-IT" dirty="0"/>
-              <a:t>Esempi</a:t>
-            </a:r>
-          </a:p>
-          <a:p>
-            <a:pPr lvl="1"/>
-            <a:r>
-              <a:rPr lang="it-IT" b="1" dirty="0"/>
-              <a:t>Log di eventi; CMS, piattaforme di blogging</a:t>
-            </a:r>
-          </a:p>
-          <a:p>
-            <a:pPr lvl="2"/>
-            <a:r>
-              <a:rPr lang="it-IT" dirty="0"/>
-              <a:t>Similmente ai database documentali, </a:t>
-            </a:r>
-            <a:r>
-              <a:rPr lang="it-IT" dirty="0">
-                <a:solidFill>
-                  <a:srgbClr val="0070C0"/>
-                </a:solidFill>
-              </a:rPr>
-              <a:t>applicazioni diverse possono usare colonne diverse</a:t>
-            </a:r>
-            <a:endParaRPr lang="it-IT" dirty="0"/>
-          </a:p>
-          <a:p>
-            <a:pPr lvl="1"/>
-            <a:r>
-              <a:rPr lang="it-IT" b="1" dirty="0"/>
-              <a:t>Matrici sparse</a:t>
-            </a:r>
-          </a:p>
-          <a:p>
-            <a:pPr lvl="2"/>
-            <a:r>
-              <a:rPr lang="it-IT" dirty="0"/>
-              <a:t>Mentre un RDBMS gestisce tutti i </a:t>
-            </a:r>
-            <a:r>
-              <a:rPr lang="it-IT" i="1" dirty="0" err="1"/>
-              <a:t>null</a:t>
-            </a:r>
-            <a:r>
-              <a:rPr lang="it-IT" dirty="0"/>
-              <a:t>, un database colonnare permette di </a:t>
-            </a:r>
-            <a:r>
-              <a:rPr lang="it-IT" dirty="0">
-                <a:solidFill>
-                  <a:srgbClr val="0070C0"/>
-                </a:solidFill>
-              </a:rPr>
-              <a:t>allocare solamente le colonne per cui è necessario memorizzare un dato</a:t>
-            </a:r>
-            <a:r>
-              <a:rPr lang="it-IT" dirty="0"/>
-              <a:t>.</a:t>
-            </a:r>
-          </a:p>
-          <a:p>
-            <a:pPr lvl="1"/>
-            <a:r>
-              <a:rPr lang="it-IT" b="1" dirty="0"/>
-              <a:t>Applicazioni GIS</a:t>
-            </a:r>
-          </a:p>
-          <a:p>
-            <a:pPr lvl="2"/>
-            <a:r>
-              <a:rPr lang="it-IT" dirty="0"/>
-              <a:t>"Pezzi" di mappa possono essere memorizzati come </a:t>
-            </a:r>
-            <a:r>
-              <a:rPr lang="it-IT" dirty="0">
-                <a:solidFill>
-                  <a:srgbClr val="0070C0"/>
-                </a:solidFill>
-              </a:rPr>
-              <a:t>coppie di longitudine (chiave di riga) e latitudine (colonna)</a:t>
-            </a:r>
-          </a:p>
-        </p:txBody>
-      </p:sp>
-      <p:sp>
-        <p:nvSpPr>
           <p:cNvPr id="2" name="Titolo 1"/>
           <p:cNvSpPr>
             <a:spLocks noGrp="1"/>
@@ -31685,6 +32118,120 @@
               <a:t>-family: quando usarli</a:t>
             </a:r>
             <a:endParaRPr lang="it-IT" noProof="0" dirty="0"/>
+          </a:p>
+        </p:txBody>
+      </p:sp>
+      <p:sp>
+        <p:nvSpPr>
+          <p:cNvPr id="9" name="Segnaposto contenuto 3"/>
+          <p:cNvSpPr>
+            <a:spLocks noGrp="1"/>
+          </p:cNvSpPr>
+          <p:nvPr>
+            <p:ph idx="1"/>
+          </p:nvPr>
+        </p:nvSpPr>
+        <p:spPr>
+          <a:xfrm>
+            <a:off x="1097280" y="1243914"/>
+            <a:ext cx="10058400" cy="4625180"/>
+          </a:xfrm>
+        </p:spPr>
+        <p:txBody>
+          <a:bodyPr>
+            <a:normAutofit/>
+          </a:bodyPr>
+          <a:lstStyle/>
+          <a:p>
+            <a:r>
+              <a:rPr lang="it-IT" dirty="0"/>
+              <a:t>Compromesso tra espressività e semplicità, sia a livello di modellazione che di interrogazione dei dati</a:t>
+            </a:r>
+          </a:p>
+          <a:p>
+            <a:r>
+              <a:rPr lang="it-IT" dirty="0"/>
+              <a:t>Esempi</a:t>
+            </a:r>
+          </a:p>
+          <a:p>
+            <a:pPr lvl="1"/>
+            <a:r>
+              <a:rPr lang="it-IT" b="1" dirty="0"/>
+              <a:t>Log di eventi; CMS, piattaforme di blogging</a:t>
+            </a:r>
+          </a:p>
+          <a:p>
+            <a:pPr lvl="2"/>
+            <a:r>
+              <a:rPr lang="it-IT" dirty="0"/>
+              <a:t>Similmente ai database documentali, </a:t>
+            </a:r>
+            <a:r>
+              <a:rPr lang="it-IT" dirty="0">
+                <a:solidFill>
+                  <a:srgbClr val="0070C0"/>
+                </a:solidFill>
+              </a:rPr>
+              <a:t>applicazioni diverse possono usare colonne diverse</a:t>
+            </a:r>
+            <a:endParaRPr lang="it-IT" dirty="0"/>
+          </a:p>
+          <a:p>
+            <a:pPr lvl="1"/>
+            <a:r>
+              <a:rPr lang="it-IT" b="1" dirty="0"/>
+              <a:t>Matrici sparse</a:t>
+            </a:r>
+          </a:p>
+          <a:p>
+            <a:pPr lvl="2"/>
+            <a:r>
+              <a:rPr lang="it-IT" dirty="0"/>
+              <a:t>Mentre un RDBMS gestisce tutti i </a:t>
+            </a:r>
+            <a:r>
+              <a:rPr lang="it-IT" i="1" dirty="0" err="1"/>
+              <a:t>null</a:t>
+            </a:r>
+            <a:r>
+              <a:rPr lang="it-IT" dirty="0"/>
+              <a:t>, un database colonnare permette di </a:t>
+            </a:r>
+            <a:r>
+              <a:rPr lang="it-IT" dirty="0">
+                <a:solidFill>
+                  <a:srgbClr val="0070C0"/>
+                </a:solidFill>
+              </a:rPr>
+              <a:t>allocare solamente le colonne per cui è necessario memorizzare un dato</a:t>
+            </a:r>
+            <a:r>
+              <a:rPr lang="it-IT" dirty="0"/>
+              <a:t>.</a:t>
+            </a:r>
+          </a:p>
+          <a:p>
+            <a:pPr lvl="1"/>
+            <a:r>
+              <a:rPr lang="it-IT" b="1" dirty="0"/>
+              <a:t>Applicazioni GIS</a:t>
+            </a:r>
+          </a:p>
+          <a:p>
+            <a:pPr lvl="2"/>
+            <a:r>
+              <a:rPr lang="it-IT" dirty="0"/>
+              <a:t>"Pezzi" di mappa possono essere memorizzati come </a:t>
+            </a:r>
+            <a:r>
+              <a:rPr lang="it-IT" dirty="0">
+                <a:solidFill>
+                  <a:srgbClr val="0070C0"/>
+                </a:solidFill>
+              </a:rPr>
+              <a:t>coppie di longitudine (chiave di riga) e latitudine (colonna)</a:t>
+            </a:r>
           </a:p>
         </p:txBody>
       </p:sp>
@@ -31728,121 +32275,6 @@
       </p:grpSpPr>
       <p:sp>
         <p:nvSpPr>
-          <p:cNvPr id="9" name="Segnaposto contenuto 3"/>
-          <p:cNvSpPr>
-            <a:spLocks noGrp="1"/>
-          </p:cNvSpPr>
-          <p:nvPr>
-            <p:ph sz="quarter" idx="1"/>
-          </p:nvPr>
-        </p:nvSpPr>
-        <p:spPr>
-          <a:xfrm>
-            <a:off x="1097280" y="1243914"/>
-            <a:ext cx="10058400" cy="4625180"/>
-          </a:xfrm>
-        </p:spPr>
-        <p:txBody>
-          <a:bodyPr>
-            <a:normAutofit/>
-          </a:bodyPr>
-          <a:lstStyle/>
-          <a:p>
-            <a:r>
-              <a:rPr lang="it-IT" b="1" dirty="0"/>
-              <a:t>Applicazioni Google</a:t>
-            </a:r>
-          </a:p>
-          <a:p>
-            <a:pPr lvl="1"/>
-            <a:r>
-              <a:rPr lang="it-IT" dirty="0" err="1"/>
-              <a:t>BigTable</a:t>
-            </a:r>
-            <a:r>
-              <a:rPr lang="it-IT" dirty="0"/>
-              <a:t> è il database di riferimento per molti servizi di Google, tra cui </a:t>
-            </a:r>
-            <a:r>
-              <a:rPr lang="it-IT" dirty="0" err="1"/>
-              <a:t>Search</a:t>
-            </a:r>
-            <a:r>
-              <a:rPr lang="it-IT" dirty="0"/>
-              <a:t>, Analytics, </a:t>
-            </a:r>
-            <a:r>
-              <a:rPr lang="it-IT" dirty="0" err="1"/>
-              <a:t>Maps</a:t>
-            </a:r>
-            <a:r>
-              <a:rPr lang="it-IT" dirty="0"/>
-              <a:t> e </a:t>
-            </a:r>
-            <a:r>
-              <a:rPr lang="it-IT" dirty="0" err="1"/>
-              <a:t>Gmail</a:t>
-            </a:r>
-            <a:endParaRPr lang="it-IT" dirty="0"/>
-          </a:p>
-          <a:p>
-            <a:r>
-              <a:rPr lang="it-IT" b="1" dirty="0"/>
-              <a:t>Profili utente e preferenze</a:t>
-            </a:r>
-          </a:p>
-          <a:p>
-            <a:pPr lvl="1"/>
-            <a:r>
-              <a:rPr lang="it-IT" dirty="0" err="1"/>
-              <a:t>Spotify</a:t>
-            </a:r>
-            <a:r>
-              <a:rPr lang="it-IT" dirty="0"/>
-              <a:t> usa Cassandra per gestire tutti i metadati relativi ad utenti, artisti, canzoni, </a:t>
-            </a:r>
-            <a:r>
-              <a:rPr lang="it-IT" dirty="0" err="1"/>
-              <a:t>playlist</a:t>
-            </a:r>
-            <a:r>
-              <a:rPr lang="it-IT" dirty="0"/>
-              <a:t>, ecc.</a:t>
-            </a:r>
-          </a:p>
-          <a:p>
-            <a:r>
-              <a:rPr lang="it-IT" b="1" dirty="0"/>
-              <a:t>Manhattan</a:t>
-            </a:r>
-          </a:p>
-          <a:p>
-            <a:pPr lvl="1"/>
-            <a:r>
-              <a:rPr lang="it-IT" dirty="0"/>
-              <a:t>Dopo aver provato Cassandra, </a:t>
-            </a:r>
-            <a:r>
-              <a:rPr lang="it-IT" dirty="0" err="1"/>
-              <a:t>Twitter</a:t>
-            </a:r>
-            <a:r>
-              <a:rPr lang="it-IT" dirty="0"/>
-              <a:t> ha sviluppato un suo DBMS </a:t>
-            </a:r>
-            <a:r>
-              <a:rPr lang="it-IT" dirty="0" err="1"/>
-              <a:t>NoSQL</a:t>
-            </a:r>
-            <a:r>
-              <a:rPr lang="it-IT" dirty="0"/>
-              <a:t> proprietario per gestire buona parte dei propri servizi</a:t>
-            </a:r>
-          </a:p>
-        </p:txBody>
-      </p:sp>
-      <p:sp>
-        <p:nvSpPr>
           <p:cNvPr id="2" name="Titolo 1"/>
           <p:cNvSpPr>
             <a:spLocks noGrp="1"/>
@@ -31871,6 +32303,121 @@
               <a:t>-family: casi d'uso reali</a:t>
             </a:r>
             <a:endParaRPr lang="it-IT" noProof="0" dirty="0"/>
+          </a:p>
+        </p:txBody>
+      </p:sp>
+      <p:sp>
+        <p:nvSpPr>
+          <p:cNvPr id="9" name="Segnaposto contenuto 3"/>
+          <p:cNvSpPr>
+            <a:spLocks noGrp="1"/>
+          </p:cNvSpPr>
+          <p:nvPr>
+            <p:ph idx="1"/>
+          </p:nvPr>
+        </p:nvSpPr>
+        <p:spPr>
+          <a:xfrm>
+            <a:off x="1097280" y="1243914"/>
+            <a:ext cx="10058400" cy="4625180"/>
+          </a:xfrm>
+        </p:spPr>
+        <p:txBody>
+          <a:bodyPr>
+            <a:normAutofit/>
+          </a:bodyPr>
+          <a:lstStyle/>
+          <a:p>
+            <a:r>
+              <a:rPr lang="it-IT" b="1" dirty="0"/>
+              <a:t>Applicazioni Google</a:t>
+            </a:r>
+          </a:p>
+          <a:p>
+            <a:pPr lvl="1"/>
+            <a:r>
+              <a:rPr lang="it-IT" dirty="0" err="1"/>
+              <a:t>BigTable</a:t>
+            </a:r>
+            <a:r>
+              <a:rPr lang="it-IT" dirty="0"/>
+              <a:t> è il database di riferimento per molti servizi di Google, tra cui </a:t>
+            </a:r>
+            <a:r>
+              <a:rPr lang="it-IT" dirty="0" err="1"/>
+              <a:t>Search</a:t>
+            </a:r>
+            <a:r>
+              <a:rPr lang="it-IT" dirty="0"/>
+              <a:t>, Analytics, </a:t>
+            </a:r>
+            <a:r>
+              <a:rPr lang="it-IT" dirty="0" err="1"/>
+              <a:t>Maps</a:t>
+            </a:r>
+            <a:r>
+              <a:rPr lang="it-IT" dirty="0"/>
+              <a:t> e </a:t>
+            </a:r>
+            <a:r>
+              <a:rPr lang="it-IT" dirty="0" err="1"/>
+              <a:t>Gmail</a:t>
+            </a:r>
+            <a:endParaRPr lang="it-IT" dirty="0"/>
+          </a:p>
+          <a:p>
+            <a:r>
+              <a:rPr lang="it-IT" b="1" dirty="0"/>
+              <a:t>Profili utente e preferenze</a:t>
+            </a:r>
+          </a:p>
+          <a:p>
+            <a:pPr lvl="1"/>
+            <a:r>
+              <a:rPr lang="it-IT" dirty="0" err="1"/>
+              <a:t>Spotify</a:t>
+            </a:r>
+            <a:r>
+              <a:rPr lang="it-IT" dirty="0"/>
+              <a:t> usa Cassandra per gestire tutti i metadati relativi ad utenti, artisti, canzoni, </a:t>
+            </a:r>
+            <a:r>
+              <a:rPr lang="it-IT" dirty="0" err="1"/>
+              <a:t>playlist</a:t>
+            </a:r>
+            <a:r>
+              <a:rPr lang="it-IT" dirty="0"/>
+              <a:t>, ecc.</a:t>
+            </a:r>
+          </a:p>
+          <a:p>
+            <a:r>
+              <a:rPr lang="it-IT" b="1" dirty="0"/>
+              <a:t>Manhattan</a:t>
+            </a:r>
+          </a:p>
+          <a:p>
+            <a:pPr lvl="1"/>
+            <a:r>
+              <a:rPr lang="it-IT" dirty="0"/>
+              <a:t>Dopo aver provato Cassandra, </a:t>
+            </a:r>
+            <a:r>
+              <a:rPr lang="it-IT" dirty="0" err="1"/>
+              <a:t>Twitter</a:t>
+            </a:r>
+            <a:r>
+              <a:rPr lang="it-IT" dirty="0"/>
+              <a:t> ha sviluppato un suo DBMS </a:t>
+            </a:r>
+            <a:r>
+              <a:rPr lang="it-IT" dirty="0" err="1"/>
+              <a:t>NoSQL</a:t>
+            </a:r>
+            <a:r>
+              <a:rPr lang="it-IT" dirty="0"/>
+              <a:t> proprietario per gestire buona parte dei propri servizi</a:t>
+            </a:r>
           </a:p>
         </p:txBody>
       </p:sp>
@@ -31952,7 +32499,7 @@
             <a:spLocks noGrp="1"/>
           </p:cNvSpPr>
           <p:nvPr>
-            <p:ph sz="quarter" idx="1"/>
+            <p:ph idx="1"/>
           </p:nvPr>
         </p:nvSpPr>
         <p:spPr/>
@@ -32079,7 +32626,7 @@
             <a:spLocks noGrp="1"/>
           </p:cNvSpPr>
           <p:nvPr>
-            <p:ph sz="quarter" idx="1"/>
+            <p:ph idx="1"/>
           </p:nvPr>
         </p:nvSpPr>
         <p:spPr/>
@@ -32202,173 +32749,6 @@
       </p:grpSpPr>
       <p:sp>
         <p:nvSpPr>
-          <p:cNvPr id="9" name="Segnaposto contenuto 3"/>
-          <p:cNvSpPr>
-            <a:spLocks noGrp="1"/>
-          </p:cNvSpPr>
-          <p:nvPr>
-            <p:ph sz="quarter" idx="1"/>
-          </p:nvPr>
-        </p:nvSpPr>
-        <p:spPr>
-          <a:xfrm>
-            <a:off x="1097280" y="1243914"/>
-            <a:ext cx="10058400" cy="4625180"/>
-          </a:xfrm>
-        </p:spPr>
-        <p:txBody>
-          <a:bodyPr>
-            <a:normAutofit/>
-          </a:bodyPr>
-          <a:lstStyle/>
-          <a:p>
-            <a:r>
-              <a:rPr lang="it-IT" b="1" dirty="0"/>
-              <a:t>Dati interconnessi</a:t>
-            </a:r>
-          </a:p>
-          <a:p>
-            <a:pPr lvl="1"/>
-            <a:r>
-              <a:rPr lang="it-IT" dirty="0"/>
-              <a:t>I </a:t>
-            </a:r>
-            <a:r>
-              <a:rPr lang="it-IT" dirty="0">
-                <a:solidFill>
-                  <a:srgbClr val="0070C0"/>
-                </a:solidFill>
-              </a:rPr>
-              <a:t>social network</a:t>
-            </a:r>
-            <a:r>
-              <a:rPr lang="it-IT" dirty="0"/>
-              <a:t> sono un’applicazione in un cui i database a grafo sono molto efficienti (non solo per memorizzare amicizie, ma, per esempio, per memorizzare relazioni di lavoro); </a:t>
-            </a:r>
-            <a:r>
-              <a:rPr lang="it-IT" dirty="0">
-                <a:solidFill>
-                  <a:srgbClr val="0070C0"/>
-                </a:solidFill>
-              </a:rPr>
-              <a:t>ogni dominio ricco di relazioni è un buon contesto</a:t>
-            </a:r>
-          </a:p>
-          <a:p>
-            <a:r>
-              <a:rPr lang="it-IT" b="1" dirty="0"/>
-              <a:t>Servizi di instradamento e location-</a:t>
-            </a:r>
-            <a:r>
-              <a:rPr lang="it-IT" b="1" dirty="0" err="1"/>
-              <a:t>based</a:t>
-            </a:r>
-            <a:endParaRPr lang="it-IT" b="1" dirty="0"/>
-          </a:p>
-          <a:p>
-            <a:pPr lvl="1"/>
-            <a:r>
-              <a:rPr lang="it-IT" dirty="0"/>
-              <a:t>Applicazioni che affrontano il </a:t>
-            </a:r>
-            <a:r>
-              <a:rPr lang="it-IT" dirty="0">
-                <a:solidFill>
-                  <a:srgbClr val="0070C0"/>
-                </a:solidFill>
-              </a:rPr>
-              <a:t>problema del commesso viaggiatore </a:t>
-            </a:r>
-            <a:r>
-              <a:rPr lang="it-IT" dirty="0"/>
-              <a:t>(TSP, </a:t>
-            </a:r>
-            <a:r>
-              <a:rPr lang="it-IT" dirty="0" err="1"/>
-              <a:t>Travelling</a:t>
-            </a:r>
-            <a:r>
-              <a:rPr lang="it-IT" dirty="0"/>
-              <a:t> Salesman </a:t>
-            </a:r>
-            <a:r>
-              <a:rPr lang="it-IT" dirty="0" err="1"/>
-              <a:t>Problem</a:t>
-            </a:r>
-            <a:r>
-              <a:rPr lang="it-IT" dirty="0"/>
-              <a:t>) </a:t>
-            </a:r>
-          </a:p>
-          <a:p>
-            <a:pPr lvl="1"/>
-            <a:r>
-              <a:rPr lang="it-IT" dirty="0"/>
-              <a:t>Applicazioni location-</a:t>
-            </a:r>
-            <a:r>
-              <a:rPr lang="it-IT" dirty="0" err="1"/>
-              <a:t>based</a:t>
-            </a:r>
-            <a:r>
-              <a:rPr lang="it-IT" dirty="0"/>
-              <a:t> per suggerire, ad esempio, i migliori ristoranti nelle vicinanze. In questi casi, </a:t>
-            </a:r>
-            <a:r>
-              <a:rPr lang="it-IT" dirty="0">
-                <a:solidFill>
-                  <a:srgbClr val="0070C0"/>
-                </a:solidFill>
-              </a:rPr>
-              <a:t>le relazioni modellano il concetto di distanza tra i nodi</a:t>
-            </a:r>
-            <a:endParaRPr lang="it-IT" dirty="0"/>
-          </a:p>
-          <a:p>
-            <a:r>
-              <a:rPr lang="it-IT" b="1" dirty="0"/>
-              <a:t>Applicazioni di </a:t>
-            </a:r>
-            <a:r>
-              <a:rPr lang="it-IT" b="1" dirty="0" err="1"/>
-              <a:t>recommendation</a:t>
-            </a:r>
-            <a:r>
-              <a:rPr lang="it-IT" b="1" dirty="0"/>
-              <a:t>, </a:t>
-            </a:r>
-            <a:r>
-              <a:rPr lang="it-IT" b="1" dirty="0" err="1"/>
-              <a:t>fraud-detection</a:t>
-            </a:r>
-            <a:endParaRPr lang="it-IT" b="1" dirty="0"/>
-          </a:p>
-          <a:p>
-            <a:pPr lvl="1"/>
-            <a:r>
-              <a:rPr lang="it-IT" dirty="0"/>
-              <a:t>Sistemi che suggeriscono «i prodotti acquistati dai tuoi amici», o «i prodotti acquistati da chi ha acquistato questo prodotto»</a:t>
-            </a:r>
-          </a:p>
-          <a:p>
-            <a:pPr lvl="1"/>
-            <a:r>
-              <a:rPr lang="it-IT" dirty="0"/>
-              <a:t>Quando le relazioni sono talmente tante da evidenziare chiari pattern comportamentali, la ricerca di </a:t>
-            </a:r>
-            <a:r>
-              <a:rPr lang="it-IT" dirty="0" err="1"/>
-              <a:t>outlier</a:t>
-            </a:r>
-            <a:r>
-              <a:rPr lang="it-IT" dirty="0"/>
-              <a:t> può servire per la rilevazione di frodi</a:t>
-            </a:r>
-          </a:p>
-        </p:txBody>
-      </p:sp>
-      <p:sp>
-        <p:nvSpPr>
           <p:cNvPr id="2" name="Titolo 1"/>
           <p:cNvSpPr>
             <a:spLocks noGrp="1"/>
@@ -32389,6 +32769,173 @@
               <a:t>DB a grafo: quando usarli</a:t>
             </a:r>
             <a:endParaRPr lang="it-IT" noProof="0" dirty="0"/>
+          </a:p>
+        </p:txBody>
+      </p:sp>
+      <p:sp>
+        <p:nvSpPr>
+          <p:cNvPr id="9" name="Segnaposto contenuto 3"/>
+          <p:cNvSpPr>
+            <a:spLocks noGrp="1"/>
+          </p:cNvSpPr>
+          <p:nvPr>
+            <p:ph idx="1"/>
+          </p:nvPr>
+        </p:nvSpPr>
+        <p:spPr>
+          <a:xfrm>
+            <a:off x="1097280" y="1243914"/>
+            <a:ext cx="10058400" cy="4625180"/>
+          </a:xfrm>
+        </p:spPr>
+        <p:txBody>
+          <a:bodyPr>
+            <a:normAutofit/>
+          </a:bodyPr>
+          <a:lstStyle/>
+          <a:p>
+            <a:r>
+              <a:rPr lang="it-IT" b="1" dirty="0"/>
+              <a:t>Dati interconnessi</a:t>
+            </a:r>
+          </a:p>
+          <a:p>
+            <a:pPr lvl="1"/>
+            <a:r>
+              <a:rPr lang="it-IT" dirty="0"/>
+              <a:t>I </a:t>
+            </a:r>
+            <a:r>
+              <a:rPr lang="it-IT" dirty="0">
+                <a:solidFill>
+                  <a:srgbClr val="0070C0"/>
+                </a:solidFill>
+              </a:rPr>
+              <a:t>social network</a:t>
+            </a:r>
+            <a:r>
+              <a:rPr lang="it-IT" dirty="0"/>
+              <a:t> sono un’applicazione in un cui i database a grafo sono molto efficienti (non solo per memorizzare amicizie, ma, per esempio, per memorizzare relazioni di lavoro); </a:t>
+            </a:r>
+            <a:r>
+              <a:rPr lang="it-IT" dirty="0">
+                <a:solidFill>
+                  <a:srgbClr val="0070C0"/>
+                </a:solidFill>
+              </a:rPr>
+              <a:t>ogni dominio ricco di relazioni è un buon contesto</a:t>
+            </a:r>
+          </a:p>
+          <a:p>
+            <a:r>
+              <a:rPr lang="it-IT" b="1" dirty="0"/>
+              <a:t>Servizi di instradamento e location-</a:t>
+            </a:r>
+            <a:r>
+              <a:rPr lang="it-IT" b="1" dirty="0" err="1"/>
+              <a:t>based</a:t>
+            </a:r>
+            <a:endParaRPr lang="it-IT" b="1" dirty="0"/>
+          </a:p>
+          <a:p>
+            <a:pPr lvl="1"/>
+            <a:r>
+              <a:rPr lang="it-IT" dirty="0"/>
+              <a:t>Applicazioni che affrontano il </a:t>
+            </a:r>
+            <a:r>
+              <a:rPr lang="it-IT" dirty="0">
+                <a:solidFill>
+                  <a:srgbClr val="0070C0"/>
+                </a:solidFill>
+              </a:rPr>
+              <a:t>problema del commesso viaggiatore </a:t>
+            </a:r>
+            <a:r>
+              <a:rPr lang="it-IT" dirty="0"/>
+              <a:t>(TSP, </a:t>
+            </a:r>
+            <a:r>
+              <a:rPr lang="it-IT" dirty="0" err="1"/>
+              <a:t>Travelling</a:t>
+            </a:r>
+            <a:r>
+              <a:rPr lang="it-IT" dirty="0"/>
+              <a:t> Salesman </a:t>
+            </a:r>
+            <a:r>
+              <a:rPr lang="it-IT" dirty="0" err="1"/>
+              <a:t>Problem</a:t>
+            </a:r>
+            <a:r>
+              <a:rPr lang="it-IT" dirty="0"/>
+              <a:t>) </a:t>
+            </a:r>
+          </a:p>
+          <a:p>
+            <a:pPr lvl="1"/>
+            <a:r>
+              <a:rPr lang="it-IT" dirty="0"/>
+              <a:t>Applicazioni location-</a:t>
+            </a:r>
+            <a:r>
+              <a:rPr lang="it-IT" dirty="0" err="1"/>
+              <a:t>based</a:t>
+            </a:r>
+            <a:r>
+              <a:rPr lang="it-IT" dirty="0"/>
+              <a:t> per suggerire, ad esempio, i migliori ristoranti nelle vicinanze. In questi casi, </a:t>
+            </a:r>
+            <a:r>
+              <a:rPr lang="it-IT" dirty="0">
+                <a:solidFill>
+                  <a:srgbClr val="0070C0"/>
+                </a:solidFill>
+              </a:rPr>
+              <a:t>le relazioni modellano il concetto di distanza tra i nodi</a:t>
+            </a:r>
+            <a:endParaRPr lang="it-IT" dirty="0"/>
+          </a:p>
+          <a:p>
+            <a:r>
+              <a:rPr lang="it-IT" b="1" dirty="0"/>
+              <a:t>Applicazioni di </a:t>
+            </a:r>
+            <a:r>
+              <a:rPr lang="it-IT" b="1" dirty="0" err="1"/>
+              <a:t>recommendation</a:t>
+            </a:r>
+            <a:r>
+              <a:rPr lang="it-IT" b="1" dirty="0"/>
+              <a:t>, </a:t>
+            </a:r>
+            <a:r>
+              <a:rPr lang="it-IT" b="1" dirty="0" err="1"/>
+              <a:t>fraud-detection</a:t>
+            </a:r>
+            <a:endParaRPr lang="it-IT" b="1" dirty="0"/>
+          </a:p>
+          <a:p>
+            <a:pPr lvl="1"/>
+            <a:r>
+              <a:rPr lang="it-IT" dirty="0"/>
+              <a:t>Sistemi che suggeriscono «i prodotti acquistati dai tuoi amici», o «i prodotti acquistati da chi ha acquistato questo prodotto»</a:t>
+            </a:r>
+          </a:p>
+          <a:p>
+            <a:pPr lvl="1"/>
+            <a:r>
+              <a:rPr lang="it-IT" dirty="0"/>
+              <a:t>Quando le relazioni sono talmente tante da evidenziare chiari pattern comportamentali, la ricerca di </a:t>
+            </a:r>
+            <a:r>
+              <a:rPr lang="it-IT" dirty="0" err="1"/>
+              <a:t>outlier</a:t>
+            </a:r>
+            <a:r>
+              <a:rPr lang="it-IT" dirty="0"/>
+              <a:t> può servire per la rilevazione di frodi</a:t>
+            </a:r>
           </a:p>
         </p:txBody>
       </p:sp>
@@ -32432,96 +32979,6 @@
       </p:grpSpPr>
       <p:sp>
         <p:nvSpPr>
-          <p:cNvPr id="9" name="Segnaposto contenuto 3"/>
-          <p:cNvSpPr>
-            <a:spLocks noGrp="1"/>
-          </p:cNvSpPr>
-          <p:nvPr>
-            <p:ph sz="quarter" idx="1"/>
-          </p:nvPr>
-        </p:nvSpPr>
-        <p:spPr>
-          <a:xfrm>
-            <a:off x="1097280" y="1243914"/>
-            <a:ext cx="10058400" cy="4625180"/>
-          </a:xfrm>
-        </p:spPr>
-        <p:txBody>
-          <a:bodyPr>
-            <a:normAutofit/>
-          </a:bodyPr>
-          <a:lstStyle/>
-          <a:p>
-            <a:r>
-              <a:rPr lang="it-IT" b="1" dirty="0"/>
-              <a:t>Analisi delle connessioni</a:t>
-            </a:r>
-          </a:p>
-          <a:p>
-            <a:pPr lvl="1"/>
-            <a:r>
-              <a:rPr lang="it-IT" dirty="0"/>
-              <a:t>Trovare di amici/relazioni comuni (friend-of-a-friend) in un social network</a:t>
-            </a:r>
-          </a:p>
-          <a:p>
-            <a:pPr lvl="1"/>
-            <a:r>
-              <a:rPr lang="it-IT" dirty="0"/>
-              <a:t>Individuare concentrazioni di telefonate che identificano una rete criminale</a:t>
-            </a:r>
-          </a:p>
-          <a:p>
-            <a:pPr lvl="1"/>
-            <a:r>
-              <a:rPr lang="it-IT" dirty="0"/>
-              <a:t>Analizzare flussi di denaro tra conti corrente che riscontrino pattern tipici di riciclaggio di denaro o furti di carte di credito</a:t>
-            </a:r>
-          </a:p>
-          <a:p>
-            <a:pPr lvl="1"/>
-            <a:r>
-              <a:rPr lang="it-IT" dirty="0"/>
-              <a:t>Principali utilizzatori: studi legali, forze di polizia, agenzie di intelligence</a:t>
-            </a:r>
-          </a:p>
-          <a:p>
-            <a:pPr lvl="2"/>
-            <a:r>
-              <a:rPr lang="it-IT" dirty="0">
-                <a:hlinkClick r:id="rId3"/>
-              </a:rPr>
-              <a:t>https://neo4j.com/use-cases/fraud-detection/</a:t>
-            </a:r>
-            <a:r>
-              <a:rPr lang="it-IT" dirty="0"/>
-              <a:t> </a:t>
-            </a:r>
-          </a:p>
-          <a:p>
-            <a:pPr lvl="1"/>
-            <a:r>
-              <a:rPr lang="it-IT" dirty="0"/>
-              <a:t>Utile anche in attività di analisi del testo (Natural Language Processing)</a:t>
-            </a:r>
-          </a:p>
-          <a:p>
-            <a:r>
-              <a:rPr lang="it-IT" b="1" dirty="0"/>
-              <a:t>Inferenza</a:t>
-            </a:r>
-          </a:p>
-          <a:p>
-            <a:pPr lvl="1"/>
-            <a:r>
-              <a:rPr lang="it-IT" dirty="0"/>
-              <a:t>Creazione di regole che permettano di estrarre nuova conoscenza in presenza di determinati pattern (e.g., transitività di relazioni, meccanismi di fiducia)</a:t>
-            </a:r>
-          </a:p>
-        </p:txBody>
-      </p:sp>
-      <p:sp>
-        <p:nvSpPr>
           <p:cNvPr id="2" name="Titolo 1"/>
           <p:cNvSpPr>
             <a:spLocks noGrp="1"/>
@@ -32542,6 +32999,96 @@
               <a:t>DB a grafo: casi d'uso reali</a:t>
             </a:r>
             <a:endParaRPr lang="it-IT" noProof="0" dirty="0"/>
+          </a:p>
+        </p:txBody>
+      </p:sp>
+      <p:sp>
+        <p:nvSpPr>
+          <p:cNvPr id="9" name="Segnaposto contenuto 3"/>
+          <p:cNvSpPr>
+            <a:spLocks noGrp="1"/>
+          </p:cNvSpPr>
+          <p:nvPr>
+            <p:ph idx="1"/>
+          </p:nvPr>
+        </p:nvSpPr>
+        <p:spPr>
+          <a:xfrm>
+            <a:off x="1097280" y="1243914"/>
+            <a:ext cx="10058400" cy="4625180"/>
+          </a:xfrm>
+        </p:spPr>
+        <p:txBody>
+          <a:bodyPr>
+            <a:normAutofit/>
+          </a:bodyPr>
+          <a:lstStyle/>
+          <a:p>
+            <a:r>
+              <a:rPr lang="it-IT" b="1" dirty="0"/>
+              <a:t>Analisi delle connessioni</a:t>
+            </a:r>
+          </a:p>
+          <a:p>
+            <a:pPr lvl="1"/>
+            <a:r>
+              <a:rPr lang="it-IT" dirty="0"/>
+              <a:t>Trovare di amici/relazioni comuni (friend-of-a-friend) in un social network</a:t>
+            </a:r>
+          </a:p>
+          <a:p>
+            <a:pPr lvl="1"/>
+            <a:r>
+              <a:rPr lang="it-IT" dirty="0"/>
+              <a:t>Individuare concentrazioni di telefonate che identificano una rete criminale</a:t>
+            </a:r>
+          </a:p>
+          <a:p>
+            <a:pPr lvl="1"/>
+            <a:r>
+              <a:rPr lang="it-IT" dirty="0"/>
+              <a:t>Analizzare flussi di denaro tra conti corrente che riscontrino pattern tipici di riciclaggio di denaro o furti di carte di credito</a:t>
+            </a:r>
+          </a:p>
+          <a:p>
+            <a:pPr lvl="1"/>
+            <a:r>
+              <a:rPr lang="it-IT" dirty="0"/>
+              <a:t>Principali utilizzatori: studi legali, forze di polizia, agenzie di intelligence</a:t>
+            </a:r>
+          </a:p>
+          <a:p>
+            <a:pPr lvl="2"/>
+            <a:r>
+              <a:rPr lang="it-IT" dirty="0">
+                <a:hlinkClick r:id="rId3"/>
+              </a:rPr>
+              <a:t>https://neo4j.com/use-cases/fraud-detection/</a:t>
+            </a:r>
+            <a:r>
+              <a:rPr lang="it-IT" dirty="0"/>
+              <a:t> </a:t>
+            </a:r>
+          </a:p>
+          <a:p>
+            <a:pPr lvl="1"/>
+            <a:r>
+              <a:rPr lang="it-IT" dirty="0"/>
+              <a:t>Utile anche in attività di analisi del testo (Natural Language Processing)</a:t>
+            </a:r>
+          </a:p>
+          <a:p>
+            <a:r>
+              <a:rPr lang="it-IT" b="1" dirty="0"/>
+              <a:t>Inferenza</a:t>
+            </a:r>
+          </a:p>
+          <a:p>
+            <a:pPr lvl="1"/>
+            <a:r>
+              <a:rPr lang="it-IT" dirty="0"/>
+              <a:t>Creazione di regole che permettano di estrarre nuova conoscenza in presenza di determinati pattern (e.g., transitività di relazioni, meccanismi di fiducia)</a:t>
+            </a:r>
           </a:p>
         </p:txBody>
       </p:sp>
@@ -32615,7 +33162,7 @@
             <a:spLocks noGrp="1"/>
           </p:cNvSpPr>
           <p:nvPr>
-            <p:ph sz="quarter" idx="1"/>
+            <p:ph idx="1"/>
           </p:nvPr>
         </p:nvSpPr>
         <p:spPr/>
@@ -32733,7 +33280,7 @@
             <a:spLocks noGrp="1"/>
           </p:cNvSpPr>
           <p:nvPr>
-            <p:ph sz="quarter" idx="1"/>
+            <p:ph idx="1"/>
           </p:nvPr>
         </p:nvSpPr>
         <p:spPr/>
@@ -32934,7 +33481,7 @@
             <a:spLocks noGrp="1"/>
           </p:cNvSpPr>
           <p:nvPr>
-            <p:ph sz="quarter" idx="1"/>
+            <p:ph idx="1"/>
           </p:nvPr>
         </p:nvSpPr>
         <p:spPr/>
@@ -33346,31 +33893,6 @@
           </a:p>
         </p:txBody>
       </p:sp>
-      <p:sp>
-        <p:nvSpPr>
-          <p:cNvPr id="6" name="Segnaposto contenuto 5">
-            <a:extLst>
-              <a:ext uri="{FF2B5EF4-FFF2-40B4-BE49-F238E27FC236}">
-                <a16:creationId xmlns:a16="http://schemas.microsoft.com/office/drawing/2014/main" id="{3A37DC79-69D5-465B-9017-869FDBEA50A7}"/>
-              </a:ext>
-            </a:extLst>
-          </p:cNvPr>
-          <p:cNvSpPr>
-            <a:spLocks noGrp="1"/>
-          </p:cNvSpPr>
-          <p:nvPr>
-            <p:ph idx="13"/>
-          </p:nvPr>
-        </p:nvSpPr>
-        <p:spPr/>
-        <p:txBody>
-          <a:bodyPr/>
-          <a:lstStyle/>
-          <a:p>
-            <a:endParaRPr lang="en-US"/>
-          </a:p>
-        </p:txBody>
-      </p:sp>
       <p:pic>
         <p:nvPicPr>
           <p:cNvPr id="7" name="Segnaposto contenuto 6">
@@ -33403,6 +33925,31 @@
           </a:prstGeom>
         </p:spPr>
       </p:pic>
+      <p:sp>
+        <p:nvSpPr>
+          <p:cNvPr id="6" name="Segnaposto contenuto 5">
+            <a:extLst>
+              <a:ext uri="{FF2B5EF4-FFF2-40B4-BE49-F238E27FC236}">
+                <a16:creationId xmlns:a16="http://schemas.microsoft.com/office/drawing/2014/main" id="{3A37DC79-69D5-465B-9017-869FDBEA50A7}"/>
+              </a:ext>
+            </a:extLst>
+          </p:cNvPr>
+          <p:cNvSpPr>
+            <a:spLocks noGrp="1"/>
+          </p:cNvSpPr>
+          <p:nvPr>
+            <p:ph idx="13"/>
+          </p:nvPr>
+        </p:nvSpPr>
+        <p:spPr/>
+        <p:txBody>
+          <a:bodyPr/>
+          <a:lstStyle/>
+          <a:p>
+            <a:endParaRPr lang="en-US"/>
+          </a:p>
+        </p:txBody>
+      </p:sp>
     </p:spTree>
     <p:extLst>
       <p:ext uri="{BB962C8B-B14F-4D97-AF65-F5344CB8AC3E}">
@@ -33455,31 +34002,6 @@
           </a:p>
         </p:txBody>
       </p:sp>
-      <p:sp>
-        <p:nvSpPr>
-          <p:cNvPr id="5" name="Segnaposto contenuto 4">
-            <a:extLst>
-              <a:ext uri="{FF2B5EF4-FFF2-40B4-BE49-F238E27FC236}">
-                <a16:creationId xmlns:a16="http://schemas.microsoft.com/office/drawing/2014/main" id="{824AD063-22B4-429B-A335-6591A123B045}"/>
-              </a:ext>
-            </a:extLst>
-          </p:cNvPr>
-          <p:cNvSpPr>
-            <a:spLocks noGrp="1"/>
-          </p:cNvSpPr>
-          <p:nvPr>
-            <p:ph idx="13"/>
-          </p:nvPr>
-        </p:nvSpPr>
-        <p:spPr/>
-        <p:txBody>
-          <a:bodyPr/>
-          <a:lstStyle/>
-          <a:p>
-            <a:endParaRPr lang="en-US"/>
-          </a:p>
-        </p:txBody>
-      </p:sp>
       <p:pic>
         <p:nvPicPr>
           <p:cNvPr id="7" name="Segnaposto contenuto 6">
@@ -33512,6 +34034,31 @@
           </a:prstGeom>
         </p:spPr>
       </p:pic>
+      <p:sp>
+        <p:nvSpPr>
+          <p:cNvPr id="5" name="Segnaposto contenuto 4">
+            <a:extLst>
+              <a:ext uri="{FF2B5EF4-FFF2-40B4-BE49-F238E27FC236}">
+                <a16:creationId xmlns:a16="http://schemas.microsoft.com/office/drawing/2014/main" id="{824AD063-22B4-429B-A335-6591A123B045}"/>
+              </a:ext>
+            </a:extLst>
+          </p:cNvPr>
+          <p:cNvSpPr>
+            <a:spLocks noGrp="1"/>
+          </p:cNvSpPr>
+          <p:nvPr>
+            <p:ph idx="13"/>
+          </p:nvPr>
+        </p:nvSpPr>
+        <p:spPr/>
+        <p:txBody>
+          <a:bodyPr/>
+          <a:lstStyle/>
+          <a:p>
+            <a:endParaRPr lang="en-US"/>
+          </a:p>
+        </p:txBody>
+      </p:sp>
     </p:spTree>
     <p:extLst>
       <p:ext uri="{BB962C8B-B14F-4D97-AF65-F5344CB8AC3E}">
@@ -33625,6 +34172,38 @@
           </a:p>
         </p:txBody>
       </p:sp>
+      <p:pic>
+        <p:nvPicPr>
+          <p:cNvPr id="12" name="Segnaposto contenuto 11">
+            <a:extLst>
+              <a:ext uri="{FF2B5EF4-FFF2-40B4-BE49-F238E27FC236}">
+                <a16:creationId xmlns:a16="http://schemas.microsoft.com/office/drawing/2014/main" id="{A2008C1A-B938-4B83-8572-9702CAD76579}"/>
+              </a:ext>
+            </a:extLst>
+          </p:cNvPr>
+          <p:cNvPicPr>
+            <a:picLocks noGrp="1" noChangeAspect="1"/>
+          </p:cNvPicPr>
+          <p:nvPr>
+            <p:ph sz="half" idx="2"/>
+          </p:nvPr>
+        </p:nvPicPr>
+        <p:blipFill>
+          <a:blip r:embed="rId3"/>
+          <a:stretch>
+            <a:fillRect/>
+          </a:stretch>
+        </p:blipFill>
+        <p:spPr>
+          <a:xfrm>
+            <a:off x="6172200" y="2738369"/>
+            <a:ext cx="5181600" cy="2525849"/>
+          </a:xfrm>
+          <a:prstGeom prst="rect">
+            <a:avLst/>
+          </a:prstGeom>
+        </p:spPr>
+      </p:pic>
       <p:sp>
         <p:nvSpPr>
           <p:cNvPr id="11" name="Segnaposto contenuto 10">
@@ -33922,38 +34501,6 @@
           </a:p>
         </p:txBody>
       </p:sp>
-      <p:pic>
-        <p:nvPicPr>
-          <p:cNvPr id="12" name="Segnaposto contenuto 11">
-            <a:extLst>
-              <a:ext uri="{FF2B5EF4-FFF2-40B4-BE49-F238E27FC236}">
-                <a16:creationId xmlns:a16="http://schemas.microsoft.com/office/drawing/2014/main" id="{A2008C1A-B938-4B83-8572-9702CAD76579}"/>
-              </a:ext>
-            </a:extLst>
-          </p:cNvPr>
-          <p:cNvPicPr>
-            <a:picLocks noGrp="1" noChangeAspect="1"/>
-          </p:cNvPicPr>
-          <p:nvPr>
-            <p:ph sz="half" idx="2"/>
-          </p:nvPr>
-        </p:nvPicPr>
-        <p:blipFill>
-          <a:blip r:embed="rId3"/>
-          <a:stretch>
-            <a:fillRect/>
-          </a:stretch>
-        </p:blipFill>
-        <p:spPr>
-          <a:xfrm>
-            <a:off x="6172200" y="2738369"/>
-            <a:ext cx="5181600" cy="2525849"/>
-          </a:xfrm>
-          <a:prstGeom prst="rect">
-            <a:avLst/>
-          </a:prstGeom>
-        </p:spPr>
-      </p:pic>
     </p:spTree>
     <p:extLst>
       <p:ext uri="{BB962C8B-B14F-4D97-AF65-F5344CB8AC3E}">
@@ -33994,12 +34541,7 @@
             <p:ph type="title"/>
           </p:nvPr>
         </p:nvSpPr>
-        <p:spPr>
-          <a:xfrm>
-            <a:off x="838200" y="365125"/>
-            <a:ext cx="10515600" cy="1325563"/>
-          </a:xfrm>
-        </p:spPr>
+        <p:spPr/>
         <p:txBody>
           <a:bodyPr/>
           <a:lstStyle/>
@@ -34027,12 +34569,7 @@
             <p:ph sz="half" idx="1"/>
           </p:nvPr>
         </p:nvSpPr>
-        <p:spPr>
-          <a:xfrm>
-            <a:off x="838200" y="1825625"/>
-            <a:ext cx="5181600" cy="4351338"/>
-          </a:xfrm>
-        </p:spPr>
+        <p:spPr/>
         <p:txBody>
           <a:bodyPr/>
           <a:lstStyle/>
@@ -34432,6 +34969,177 @@
       </p:sp>
       <p:sp>
         <p:nvSpPr>
+          <p:cNvPr id="7" name="Segnaposto contenuto 6"/>
+          <p:cNvSpPr>
+            <a:spLocks noGrp="1"/>
+          </p:cNvSpPr>
+          <p:nvPr>
+            <p:ph idx="1"/>
+          </p:nvPr>
+        </p:nvSpPr>
+        <p:spPr/>
+        <p:txBody>
+          <a:bodyPr>
+            <a:normAutofit lnSpcReduction="10000"/>
+          </a:bodyPr>
+          <a:lstStyle/>
+          <a:p>
+            <a:r>
+              <a:rPr lang="it-IT" dirty="0">
+                <a:solidFill>
+                  <a:srgbClr val="FF0000"/>
+                </a:solidFill>
+              </a:rPr>
+              <a:t>I DBA tendono a diventare sempre più poliglotti</a:t>
+            </a:r>
+          </a:p>
+          <a:p>
+            <a:pPr lvl="1"/>
+            <a:r>
+              <a:rPr lang="it-IT" dirty="0"/>
+              <a:t>E’ importante: capire come funzionano le tecnologie </a:t>
+            </a:r>
+            <a:r>
+              <a:rPr lang="it-IT" dirty="0" err="1"/>
+              <a:t>NoSQL</a:t>
+            </a:r>
+            <a:r>
+              <a:rPr lang="it-IT" dirty="0"/>
+              <a:t>, come monitorare questi sistemi e come sfruttarli al meglio delle loro potenzialità.</a:t>
+            </a:r>
+          </a:p>
+          <a:p>
+            <a:r>
+              <a:rPr lang="it-IT" dirty="0">
+                <a:solidFill>
+                  <a:srgbClr val="FF0000"/>
+                </a:solidFill>
+              </a:rPr>
+              <a:t>Questione sicurezza</a:t>
+            </a:r>
+            <a:r>
+              <a:rPr lang="it-IT" dirty="0"/>
+              <a:t>: verificare la possibilità di creare utenti e assegnare loro determinati privilegi. </a:t>
+            </a:r>
+          </a:p>
+          <a:p>
+            <a:pPr lvl="1"/>
+            <a:r>
+              <a:rPr lang="it-IT" dirty="0"/>
+              <a:t>La maggior parte dei DBMS </a:t>
+            </a:r>
+            <a:r>
+              <a:rPr lang="it-IT" dirty="0" err="1"/>
+              <a:t>NoSQL</a:t>
+            </a:r>
+            <a:r>
+              <a:rPr lang="it-IT" dirty="0"/>
+              <a:t> </a:t>
+            </a:r>
+            <a:r>
+              <a:rPr lang="it-IT" b="1" dirty="0"/>
+              <a:t>non</a:t>
+            </a:r>
+            <a:r>
+              <a:rPr lang="it-IT" dirty="0"/>
+              <a:t> offre una robusto sistema di sicurezza. </a:t>
+            </a:r>
+          </a:p>
+          <a:p>
+            <a:pPr lvl="1"/>
+            <a:r>
+              <a:rPr lang="it-IT" dirty="0">
+                <a:solidFill>
+                  <a:srgbClr val="0070C0"/>
+                </a:solidFill>
+              </a:rPr>
+              <a:t>La responsabilità viene «scaricata» sulle applicazioni.</a:t>
+            </a:r>
+          </a:p>
+          <a:p>
+            <a:r>
+              <a:rPr lang="it-IT" dirty="0"/>
+              <a:t>Attenzione alle problematiche legate a licenze, supporto, upgrade, driver, auditing, strumenti di supporto, ecc. </a:t>
+            </a:r>
+          </a:p>
+          <a:p>
+            <a:pPr lvl="1"/>
+            <a:r>
+              <a:rPr lang="it-IT" dirty="0">
+                <a:solidFill>
+                  <a:srgbClr val="0070C0"/>
+                </a:solidFill>
+              </a:rPr>
+              <a:t>Molti prodotti sono open-source </a:t>
+            </a:r>
+            <a:r>
+              <a:rPr lang="it-IT" dirty="0"/>
+              <a:t>e hanno una comunità attiva di collaboratori; alcune aziende offrono supporto a livello commerciale. </a:t>
+            </a:r>
+          </a:p>
+          <a:p>
+            <a:pPr lvl="1"/>
+            <a:r>
+              <a:rPr lang="it-IT" dirty="0"/>
+              <a:t>Alcuni strumenti di supporto stanno venendo progressivamente rilasciati (e.g., </a:t>
+            </a:r>
+            <a:r>
+              <a:rPr lang="it-IT" dirty="0" err="1"/>
+              <a:t>MongoDB</a:t>
+            </a:r>
+            <a:r>
+              <a:rPr lang="it-IT" dirty="0"/>
+              <a:t> </a:t>
+            </a:r>
+            <a:r>
+              <a:rPr lang="it-IT" dirty="0" err="1"/>
+              <a:t>Monitoring</a:t>
+            </a:r>
+            <a:r>
+              <a:rPr lang="it-IT" dirty="0"/>
+              <a:t> Service, </a:t>
+            </a:r>
+            <a:r>
+              <a:rPr lang="it-IT" dirty="0" err="1"/>
+              <a:t>Datastax</a:t>
+            </a:r>
+            <a:r>
+              <a:rPr lang="it-IT" dirty="0"/>
+              <a:t> </a:t>
+            </a:r>
+            <a:r>
+              <a:rPr lang="it-IT" dirty="0" err="1"/>
+              <a:t>Ops</a:t>
+            </a:r>
+            <a:r>
+              <a:rPr lang="it-IT" dirty="0"/>
+              <a:t> Center, </a:t>
+            </a:r>
+            <a:r>
+              <a:rPr lang="it-IT" dirty="0" err="1"/>
+              <a:t>Rekon</a:t>
+            </a:r>
+            <a:r>
+              <a:rPr lang="it-IT" dirty="0"/>
+              <a:t> browser)</a:t>
+            </a:r>
+          </a:p>
+          <a:p>
+            <a:pPr lvl="1"/>
+            <a:r>
+              <a:rPr lang="it-IT" dirty="0"/>
+              <a:t>Gli strumenti di ETL stanno aggiungendo il supporto ai DBMS </a:t>
+            </a:r>
+            <a:r>
+              <a:rPr lang="it-IT" dirty="0" err="1"/>
+              <a:t>NoSQL</a:t>
+            </a:r>
+            <a:endParaRPr lang="it-IT" dirty="0"/>
+          </a:p>
+        </p:txBody>
+      </p:sp>
+      <p:sp>
+        <p:nvSpPr>
           <p:cNvPr id="5" name="Segnaposto contenuto 3"/>
           <p:cNvSpPr txBox="1">
             <a:spLocks/>
@@ -34697,177 +35405,6 @@
           </a:lstStyle>
           <a:p>
             <a:endParaRPr lang="it-IT" sz="1600" dirty="0"/>
-          </a:p>
-        </p:txBody>
-      </p:sp>
-      <p:sp>
-        <p:nvSpPr>
-          <p:cNvPr id="7" name="Segnaposto contenuto 6"/>
-          <p:cNvSpPr>
-            <a:spLocks noGrp="1"/>
-          </p:cNvSpPr>
-          <p:nvPr>
-            <p:ph idx="1"/>
-          </p:nvPr>
-        </p:nvSpPr>
-        <p:spPr/>
-        <p:txBody>
-          <a:bodyPr>
-            <a:normAutofit lnSpcReduction="10000"/>
-          </a:bodyPr>
-          <a:lstStyle/>
-          <a:p>
-            <a:r>
-              <a:rPr lang="it-IT" dirty="0">
-                <a:solidFill>
-                  <a:srgbClr val="FF0000"/>
-                </a:solidFill>
-              </a:rPr>
-              <a:t>I DBA tendono a diventare sempre più poliglotti</a:t>
-            </a:r>
-          </a:p>
-          <a:p>
-            <a:pPr lvl="1"/>
-            <a:r>
-              <a:rPr lang="it-IT" dirty="0"/>
-              <a:t>E’ importante: capire come funzionano le tecnologie </a:t>
-            </a:r>
-            <a:r>
-              <a:rPr lang="it-IT" dirty="0" err="1"/>
-              <a:t>NoSQL</a:t>
-            </a:r>
-            <a:r>
-              <a:rPr lang="it-IT" dirty="0"/>
-              <a:t>, come monitorare questi sistemi e come sfruttarli al meglio delle loro potenzialità.</a:t>
-            </a:r>
-          </a:p>
-          <a:p>
-            <a:r>
-              <a:rPr lang="it-IT" dirty="0">
-                <a:solidFill>
-                  <a:srgbClr val="FF0000"/>
-                </a:solidFill>
-              </a:rPr>
-              <a:t>Questione sicurezza</a:t>
-            </a:r>
-            <a:r>
-              <a:rPr lang="it-IT" dirty="0"/>
-              <a:t>: verificare la possibilità di creare utenti e assegnare loro determinati privilegi. </a:t>
-            </a:r>
-          </a:p>
-          <a:p>
-            <a:pPr lvl="1"/>
-            <a:r>
-              <a:rPr lang="it-IT" dirty="0"/>
-              <a:t>La maggior parte dei DBMS </a:t>
-            </a:r>
-            <a:r>
-              <a:rPr lang="it-IT" dirty="0" err="1"/>
-              <a:t>NoSQL</a:t>
-            </a:r>
-            <a:r>
-              <a:rPr lang="it-IT" dirty="0"/>
-              <a:t> </a:t>
-            </a:r>
-            <a:r>
-              <a:rPr lang="it-IT" b="1" dirty="0"/>
-              <a:t>non</a:t>
-            </a:r>
-            <a:r>
-              <a:rPr lang="it-IT" dirty="0"/>
-              <a:t> offre una robusto sistema di sicurezza. </a:t>
-            </a:r>
-          </a:p>
-          <a:p>
-            <a:pPr lvl="1"/>
-            <a:r>
-              <a:rPr lang="it-IT" dirty="0">
-                <a:solidFill>
-                  <a:srgbClr val="0070C0"/>
-                </a:solidFill>
-              </a:rPr>
-              <a:t>La responsabilità viene «scaricata» sulle applicazioni.</a:t>
-            </a:r>
-          </a:p>
-          <a:p>
-            <a:r>
-              <a:rPr lang="it-IT" dirty="0"/>
-              <a:t>Attenzione alle problematiche legate a licenze, supporto, upgrade, driver, auditing, strumenti di supporto, ecc. </a:t>
-            </a:r>
-          </a:p>
-          <a:p>
-            <a:pPr lvl="1"/>
-            <a:r>
-              <a:rPr lang="it-IT" dirty="0">
-                <a:solidFill>
-                  <a:srgbClr val="0070C0"/>
-                </a:solidFill>
-              </a:rPr>
-              <a:t>Molti prodotti sono open-source </a:t>
-            </a:r>
-            <a:r>
-              <a:rPr lang="it-IT" dirty="0"/>
-              <a:t>e hanno una comunità attiva di collaboratori; alcune aziende offrono supporto a livello commerciale. </a:t>
-            </a:r>
-          </a:p>
-          <a:p>
-            <a:pPr lvl="1"/>
-            <a:r>
-              <a:rPr lang="it-IT" dirty="0"/>
-              <a:t>Alcuni strumenti di supporto stanno venendo progressivamente rilasciati (e.g., </a:t>
-            </a:r>
-            <a:r>
-              <a:rPr lang="it-IT" dirty="0" err="1"/>
-              <a:t>MongoDB</a:t>
-            </a:r>
-            <a:r>
-              <a:rPr lang="it-IT" dirty="0"/>
-              <a:t> </a:t>
-            </a:r>
-            <a:r>
-              <a:rPr lang="it-IT" dirty="0" err="1"/>
-              <a:t>Monitoring</a:t>
-            </a:r>
-            <a:r>
-              <a:rPr lang="it-IT" dirty="0"/>
-              <a:t> Service, </a:t>
-            </a:r>
-            <a:r>
-              <a:rPr lang="it-IT" dirty="0" err="1"/>
-              <a:t>Datastax</a:t>
-            </a:r>
-            <a:r>
-              <a:rPr lang="it-IT" dirty="0"/>
-              <a:t> </a:t>
-            </a:r>
-            <a:r>
-              <a:rPr lang="it-IT" dirty="0" err="1"/>
-              <a:t>Ops</a:t>
-            </a:r>
-            <a:r>
-              <a:rPr lang="it-IT" dirty="0"/>
-              <a:t> Center, </a:t>
-            </a:r>
-            <a:r>
-              <a:rPr lang="it-IT" dirty="0" err="1"/>
-              <a:t>Rekon</a:t>
-            </a:r>
-            <a:r>
-              <a:rPr lang="it-IT" dirty="0"/>
-              <a:t> browser)</a:t>
-            </a:r>
-          </a:p>
-          <a:p>
-            <a:pPr lvl="1"/>
-            <a:r>
-              <a:rPr lang="it-IT" dirty="0"/>
-              <a:t>Gli strumenti di ETL stanno aggiungendo il supporto ai DBMS </a:t>
-            </a:r>
-            <a:r>
-              <a:rPr lang="it-IT" dirty="0" err="1"/>
-              <a:t>NoSQL</a:t>
-            </a:r>
-            <a:endParaRPr lang="it-IT" dirty="0"/>
           </a:p>
         </p:txBody>
       </p:sp>
